--- a/Placement_Training_Progress_Tracker.pptx
+++ b/Placement_Training_Progress_Tracker.pptx
@@ -4,6 +4,9 @@
   <p:sldMasterIdLst>
     <p:sldMasterId id="2147483648" r:id="rId1"/>
   </p:sldMasterIdLst>
+  <p:notesMasterIdLst>
+    <p:notesMasterId r:id="rId10"/>
+  </p:notesMasterIdLst>
   <p:sldIdLst>
     <p:sldId id="256" r:id="rId2"/>
     <p:sldId id="257" r:id="rId3"/>
@@ -14,9 +17,6 @@
     <p:sldId id="262" r:id="rId8"/>
     <p:sldId id="263" r:id="rId9"/>
   </p:sldIdLst>
-  <p:notesMasterIdLst>
-    <p:notesMasterId r:id="rId10"/>
-  </p:notesMasterIdLst>
   <p:sldSz cx="12192000" cy="6858000"/>
   <p:notesSz cx="6858000" cy="12192000"/>
   <p:defaultTextStyle>
@@ -111,13 +111,20 @@
       </a:defRPr>
     </a:lvl9pPr>
   </p:defaultTextStyle>
+  <p:extLst>
+    <p:ext uri="{EFAFB233-063F-42B5-8137-9DF3F51BA10A}">
+      <p15:sldGuideLst xmlns:p15="http://schemas.microsoft.com/office/powerpoint/2012/main"/>
+    </p:ext>
+  </p:extLst>
 </p:presentation>
 </file>
 
 <file path=ppt/charts/chart1.xml><?xml version="1.0" encoding="utf-8"?>
-<c:chartSpace xmlns:c="http://schemas.openxmlformats.org/drawingml/2006/chart" xmlns:a="http://schemas.openxmlformats.org/drawingml/2006/main" xmlns:r="http://schemas.openxmlformats.org/officeDocument/2006/relationships">
+<c:chartSpace xmlns:c="http://schemas.openxmlformats.org/drawingml/2006/chart" xmlns:a="http://schemas.openxmlformats.org/drawingml/2006/main" xmlns:r="http://schemas.openxmlformats.org/officeDocument/2006/relationships" xmlns:c16r2="http://schemas.microsoft.com/office/drawing/2015/06/chart">
   <c:date1904 val="0"/>
+  <c:lang val="en-US"/>
   <c:roundedCorners val="1"/>
+  <c:style val="2"/>
   <c:chart>
     <c:title>
       <c:tx>
@@ -134,7 +141,7 @@
               </a:defRPr>
             </a:pPr>
             <a:r>
-              <a:rPr sz="1200" b="0" i="0" u="none" strike="noStrike">
+              <a:rPr lang="en-US" sz="1200" b="0" i="0" u="none" strike="noStrike">
                 <a:solidFill>
                   <a:srgbClr val="12395C"/>
                 </a:solidFill>
@@ -145,7 +152,6 @@
           </a:p>
         </c:rich>
       </c:tx>
-      <c:layout/>
       <c:overlay val="0"/>
     </c:title>
     <c:autoTitleDeleted val="0"/>
@@ -178,18 +184,26 @@
           <c:invertIfNegative val="0"/>
           <c:dLbls>
             <c:numFmt formatCode="0&quot;%&quot;" sourceLinked="0"/>
+            <c:spPr>
+              <a:noFill/>
+              <a:ln>
+                <a:noFill/>
+              </a:ln>
+              <a:effectLst/>
+            </c:spPr>
             <c:txPr>
               <a:bodyPr/>
               <a:lstStyle/>
               <a:p>
                 <a:pPr>
-                  <a:defRPr b="0" i="0" strike="noStrike" sz="1000" u="none">
+                  <a:defRPr sz="1000" b="0" i="0" u="none" strike="noStrike">
                     <a:solidFill>
                       <a:srgbClr val="1A2B3C"/>
                     </a:solidFill>
                     <a:latin typeface="Arial"/>
                   </a:defRPr>
                 </a:pPr>
+                <a:endParaRPr lang="en-US"/>
               </a:p>
             </c:txPr>
             <c:showLegendKey val="0"/>
@@ -199,28 +213,31 @@
             <c:showPercent val="0"/>
             <c:showBubbleSize val="0"/>
             <c:showLeaderLines val="0"/>
+            <c:extLst>
+              <c:ext xmlns:c15="http://schemas.microsoft.com/office/drawing/2012/chart" uri="{CE6537A1-D6FC-4f65-9D91-7224C49458BB}">
+                <c15:showLeaderLines val="0"/>
+              </c:ext>
+            </c:extLst>
           </c:dLbls>
           <c:cat>
-            <c:multiLvlStrRef>
+            <c:strRef>
               <c:f>Sheet1!$A$2:$A$5</c:f>
-              <c:multiLvlStrCache>
+              <c:strCache>
                 <c:ptCount val="4"/>
-                <c:lvl>
-                  <c:pt idx="0">
-                    <c:v>Aptitude</c:v>
-                  </c:pt>
-                  <c:pt idx="1">
-                    <c:v>Technical</c:v>
-                  </c:pt>
-                  <c:pt idx="2">
-                    <c:v>Communication</c:v>
-                  </c:pt>
-                  <c:pt idx="3">
-                    <c:v>Mock Interview</c:v>
-                  </c:pt>
-                </c:lvl>
-              </c:multiLvlStrCache>
-            </c:multiLvlStrRef>
+                <c:pt idx="0">
+                  <c:v>Aptitude</c:v>
+                </c:pt>
+                <c:pt idx="1">
+                  <c:v>Technical</c:v>
+                </c:pt>
+                <c:pt idx="2">
+                  <c:v>Communication</c:v>
+                </c:pt>
+                <c:pt idx="3">
+                  <c:v>Mock Interview</c:v>
+                </c:pt>
+              </c:strCache>
+            </c:strRef>
           </c:cat>
           <c:val>
             <c:numRef>
@@ -243,36 +260,23 @@
               </c:numCache>
             </c:numRef>
           </c:val>
+          <c:extLst>
+            <c:ext xmlns:c16="http://schemas.microsoft.com/office/drawing/2014/chart" uri="{C3380CC4-5D6E-409C-BE32-E72D297353CC}">
+              <c16:uniqueId val="{00000000-6026-46AF-9C68-5AF941DC136D}"/>
+            </c:ext>
+          </c:extLst>
         </c:ser>
         <c:dLbls>
-          <c:numFmt formatCode="0&quot;%&quot;" sourceLinked="0"/>
-          <c:txPr>
-            <a:bodyPr/>
-            <a:lstStyle/>
-            <a:p>
-              <a:pPr>
-                <a:defRPr b="0" i="0" strike="noStrike" sz="1000" u="none">
-                  <a:solidFill>
-                    <a:srgbClr val="1A2B3C"/>
-                  </a:solidFill>
-                  <a:latin typeface="Arial"/>
-                </a:defRPr>
-              </a:pPr>
-            </a:p>
-          </c:txPr>
           <c:showLegendKey val="0"/>
           <c:showVal val="1"/>
           <c:showCatName val="0"/>
           <c:showSerName val="0"/>
           <c:showPercent val="0"/>
           <c:showBubbleSize val="0"/>
-          <c:showLeaderLines val="0"/>
         </c:dLbls>
         <c:gapWidth val="150"/>
-        <c:overlap val="0"/>
         <c:axId val="2094734554"/>
         <c:axId val="2094734552"/>
-        <c:axId val="2094734556"/>
       </c:barChart>
       <c:catAx>
         <c:axId val="2094734554"/>
@@ -313,6 +317,7 @@
         <c:crosses val="autoZero"/>
         <c:auto val="1"/>
         <c:lblAlgn val="ctr"/>
+        <c:lblOffset val="100"/>
         <c:noMultiLvlLbl val="1"/>
       </c:catAx>
       <c:valAx>
@@ -379,6 +384,7 @@
     </c:plotArea>
     <c:plotVisOnly val="1"/>
     <c:dispBlanksAs val="span"/>
+    <c:showDLblsOverMax val="1"/>
   </c:chart>
   <c:spPr>
     <a:solidFill>
@@ -396,9 +402,11 @@
 </file>
 
 <file path=ppt/charts/chart2.xml><?xml version="1.0" encoding="utf-8"?>
-<c:chartSpace xmlns:c="http://schemas.openxmlformats.org/drawingml/2006/chart" xmlns:a="http://schemas.openxmlformats.org/drawingml/2006/main" xmlns:r="http://schemas.openxmlformats.org/officeDocument/2006/relationships">
+<c:chartSpace xmlns:c="http://schemas.openxmlformats.org/drawingml/2006/chart" xmlns:a="http://schemas.openxmlformats.org/drawingml/2006/main" xmlns:r="http://schemas.openxmlformats.org/officeDocument/2006/relationships" xmlns:c16r2="http://schemas.microsoft.com/office/drawing/2015/06/chart">
   <c:date1904 val="0"/>
+  <c:lang val="en-US"/>
   <c:roundedCorners val="1"/>
+  <c:style val="2"/>
   <c:chart>
     <c:title>
       <c:tx>
@@ -415,7 +423,7 @@
               </a:defRPr>
             </a:pPr>
             <a:r>
-              <a:rPr sz="1200" b="0" i="0" u="none" strike="noStrike">
+              <a:rPr lang="en-IN" sz="1200" b="0" i="0" u="none" strike="noStrike">
                 <a:solidFill>
                   <a:srgbClr val="12395C"/>
                 </a:solidFill>
@@ -426,7 +434,6 @@
           </a:p>
         </c:rich>
       </c:tx>
-      <c:layout/>
       <c:overlay val="0"/>
     </c:title>
     <c:autoTitleDeleted val="0"/>
@@ -477,6 +484,11 @@
               </a:ln>
               <a:effectLst/>
             </c:spPr>
+            <c:extLst>
+              <c:ext xmlns:c16="http://schemas.microsoft.com/office/drawing/2014/chart" uri="{C3380CC4-5D6E-409C-BE32-E72D297353CC}">
+                <c16:uniqueId val="{00000001-5AEB-47A9-A53E-2AD83717B686}"/>
+              </c:ext>
+            </c:extLst>
           </c:dPt>
           <c:dPt>
             <c:idx val="1"/>
@@ -494,6 +506,11 @@
               </a:ln>
               <a:effectLst/>
             </c:spPr>
+            <c:extLst>
+              <c:ext xmlns:c16="http://schemas.microsoft.com/office/drawing/2014/chart" uri="{C3380CC4-5D6E-409C-BE32-E72D297353CC}">
+                <c16:uniqueId val="{00000003-5AEB-47A9-A53E-2AD83717B686}"/>
+              </c:ext>
+            </c:extLst>
           </c:dPt>
           <c:dPt>
             <c:idx val="2"/>
@@ -511,6 +528,11 @@
               </a:ln>
               <a:effectLst/>
             </c:spPr>
+            <c:extLst>
+              <c:ext xmlns:c16="http://schemas.microsoft.com/office/drawing/2014/chart" uri="{C3380CC4-5D6E-409C-BE32-E72D297353CC}">
+                <c16:uniqueId val="{00000005-5AEB-47A9-A53E-2AD83717B686}"/>
+              </c:ext>
+            </c:extLst>
           </c:dPt>
           <c:dLbls>
             <c:dLbl>
@@ -529,6 +551,7 @@
                       <a:latin typeface="Arial"/>
                     </a:defRPr>
                   </a:pPr>
+                  <a:endParaRPr lang="en-US"/>
                 </a:p>
               </c:txPr>
               <c:dLblPos val="inEnd"/>
@@ -538,6 +561,12 @@
               <c:showSerName val="0"/>
               <c:showPercent val="0"/>
               <c:showBubbleSize val="0"/>
+              <c:extLst>
+                <c:ext xmlns:c15="http://schemas.microsoft.com/office/drawing/2012/chart" uri="{CE6537A1-D6FC-4f65-9D91-7224C49458BB}"/>
+                <c:ext xmlns:c16="http://schemas.microsoft.com/office/drawing/2014/chart" uri="{C3380CC4-5D6E-409C-BE32-E72D297353CC}">
+                  <c16:uniqueId val="{00000001-5AEB-47A9-A53E-2AD83717B686}"/>
+                </c:ext>
+              </c:extLst>
             </c:dLbl>
             <c:dLbl>
               <c:idx val="1"/>
@@ -555,6 +584,7 @@
                       <a:latin typeface="Arial"/>
                     </a:defRPr>
                   </a:pPr>
+                  <a:endParaRPr lang="en-US"/>
                 </a:p>
               </c:txPr>
               <c:dLblPos val="inEnd"/>
@@ -564,6 +594,12 @@
               <c:showSerName val="0"/>
               <c:showPercent val="0"/>
               <c:showBubbleSize val="0"/>
+              <c:extLst>
+                <c:ext xmlns:c15="http://schemas.microsoft.com/office/drawing/2012/chart" uri="{CE6537A1-D6FC-4f65-9D91-7224C49458BB}"/>
+                <c:ext xmlns:c16="http://schemas.microsoft.com/office/drawing/2014/chart" uri="{C3380CC4-5D6E-409C-BE32-E72D297353CC}">
+                  <c16:uniqueId val="{00000003-5AEB-47A9-A53E-2AD83717B686}"/>
+                </c:ext>
+              </c:extLst>
             </c:dLbl>
             <c:dLbl>
               <c:idx val="2"/>
@@ -581,6 +617,7 @@
                       <a:latin typeface="Arial"/>
                     </a:defRPr>
                   </a:pPr>
+                  <a:endParaRPr lang="en-US"/>
                 </a:p>
               </c:txPr>
               <c:dLblPos val="inEnd"/>
@@ -590,8 +627,21 @@
               <c:showSerName val="0"/>
               <c:showPercent val="0"/>
               <c:showBubbleSize val="0"/>
+              <c:extLst>
+                <c:ext xmlns:c15="http://schemas.microsoft.com/office/drawing/2012/chart" uri="{CE6537A1-D6FC-4f65-9D91-7224C49458BB}"/>
+                <c:ext xmlns:c16="http://schemas.microsoft.com/office/drawing/2014/chart" uri="{C3380CC4-5D6E-409C-BE32-E72D297353CC}">
+                  <c16:uniqueId val="{00000005-5AEB-47A9-A53E-2AD83717B686}"/>
+                </c:ext>
+              </c:extLst>
             </c:dLbl>
             <c:numFmt formatCode="0&quot;%&quot;" sourceLinked="0"/>
+            <c:spPr>
+              <a:noFill/>
+              <a:ln>
+                <a:noFill/>
+              </a:ln>
+              <a:effectLst/>
+            </c:spPr>
             <c:txPr>
               <a:bodyPr/>
               <a:lstStyle/>
@@ -604,6 +654,7 @@
                     <a:latin typeface="Arial"/>
                   </a:defRPr>
                 </a:pPr>
+                <a:endParaRPr lang="en-US"/>
               </a:p>
             </c:txPr>
             <c:dLblPos val="ctr"/>
@@ -614,6 +665,9 @@
             <c:showPercent val="1"/>
             <c:showBubbleSize val="0"/>
             <c:showLeaderLines val="0"/>
+            <c:extLst>
+              <c:ext xmlns:c15="http://schemas.microsoft.com/office/drawing/2012/chart" uri="{CE6537A1-D6FC-4f65-9D91-7224C49458BB}"/>
+            </c:extLst>
           </c:dLbls>
           <c:cat>
             <c:strRef>
@@ -636,6 +690,7 @@
             <c:numRef>
               <c:f>Sheet1!$B$2:$B$4</c:f>
               <c:numCache>
+                <c:formatCode>General</c:formatCode>
                 <c:ptCount val="3"/>
                 <c:pt idx="0">
                   <c:v>58</c:v>
@@ -649,7 +704,21 @@
               </c:numCache>
             </c:numRef>
           </c:val>
+          <c:extLst>
+            <c:ext xmlns:c16="http://schemas.microsoft.com/office/drawing/2014/chart" uri="{C3380CC4-5D6E-409C-BE32-E72D297353CC}">
+              <c16:uniqueId val="{00000006-5AEB-47A9-A53E-2AD83717B686}"/>
+            </c:ext>
+          </c:extLst>
         </c:ser>
+        <c:dLbls>
+          <c:showLegendKey val="0"/>
+          <c:showVal val="0"/>
+          <c:showCatName val="0"/>
+          <c:showSerName val="0"/>
+          <c:showPercent val="0"/>
+          <c:showBubbleSize val="0"/>
+          <c:showLeaderLines val="0"/>
+        </c:dLbls>
         <c:firstSliceAng val="0"/>
       </c:pieChart>
       <c:spPr>
@@ -680,6 +749,7 @@
     </c:legend>
     <c:plotVisOnly val="1"/>
     <c:dispBlanksAs val="span"/>
+    <c:showDLblsOverMax val="1"/>
   </c:chart>
   <c:spPr>
     <a:noFill/>
@@ -716,234 +786,10 @@
           <a:chExt cx="0" cy="0"/>
         </a:xfrm>
       </p:grpSpPr>
-      <p:sp>
-        <p:nvSpPr>
-          <p:cNvPr id="2" name="Header Placeholder 1"/>
-          <p:cNvSpPr>
-            <a:spLocks noGrp="1"/>
-          </p:cNvSpPr>
-          <p:nvPr>
-            <p:ph type="hdr" sz="quarter"/>
-          </p:nvPr>
-        </p:nvSpPr>
-        <p:spPr>
-          <a:xfrm>
-            <a:off x="0" y="0"/>
-            <a:ext cx="2971800" cy="458788"/>
-          </a:xfrm>
-          <a:prstGeom prst="rect">
-            <a:avLst/>
-          </a:prstGeom>
-        </p:spPr>
-        <p:txBody>
-          <a:bodyPr vert="horz" lIns="91440" tIns="45720" rIns="91440" bIns="45720" rtlCol="0"/>
-          <a:lstStyle>
-            <a:lvl1pPr algn="l">
-              <a:defRPr sz="1200"/>
-            </a:lvl1pPr>
-          </a:lstStyle>
-          <a:p>
-            <a:endParaRPr lang="en-US"/>
-          </a:p>
-        </p:txBody>
-      </p:sp>
-      <p:sp>
-        <p:nvSpPr>
-          <p:cNvPr id="3" name="Date Placeholder 2"/>
-          <p:cNvSpPr>
-            <a:spLocks noGrp="1"/>
-          </p:cNvSpPr>
-          <p:nvPr>
-            <p:ph type="dt" idx="1"/>
-          </p:nvPr>
-        </p:nvSpPr>
-        <p:spPr>
-          <a:xfrm>
-            <a:off x="3884613" y="0"/>
-            <a:ext cx="2971800" cy="458788"/>
-          </a:xfrm>
-          <a:prstGeom prst="rect">
-            <a:avLst/>
-          </a:prstGeom>
-        </p:spPr>
-        <p:txBody>
-          <a:bodyPr vert="horz" lIns="91440" tIns="45720" rIns="91440" bIns="45720" rtlCol="0"/>
-          <a:lstStyle>
-            <a:lvl1pPr algn="r">
-              <a:defRPr sz="1200"/>
-            </a:lvl1pPr>
-          </a:lstStyle>
-          <a:p>
-            <a:fld id="{5282F153-3F37-0F45-9E97-73ACFA13230C}" type="datetimeFigureOut">
-              <a:rPr lang="en-US"/>
-              <a:t>7/23/19</a:t>
-            </a:fld>
-            <a:endParaRPr lang="en-US"/>
-          </a:p>
-        </p:txBody>
-      </p:sp>
-      <p:sp>
-        <p:nvSpPr>
-          <p:cNvPr id="4" name="Slide Image Placeholder 3"/>
-          <p:cNvSpPr>
-            <a:spLocks noGrp="1" noRot="1" noChangeAspect="1"/>
-          </p:cNvSpPr>
-          <p:nvPr>
-            <p:ph type="sldImg" idx="2"/>
-          </p:nvPr>
-        </p:nvSpPr>
-        <p:spPr>
-          <a:xfrm>
-            <a:off x="685800" y="1143000"/>
-            <a:ext cx="5486400" cy="3086100"/>
-          </a:xfrm>
-          <a:prstGeom prst="rect">
-            <a:avLst/>
-          </a:prstGeom>
-          <a:noFill/>
-          <a:ln w="12700">
-            <a:solidFill>
-              <a:prstClr val="black"/>
-            </a:solidFill>
-          </a:ln>
-        </p:spPr>
-        <p:txBody>
-          <a:bodyPr vert="horz" lIns="91440" tIns="45720" rIns="91440" bIns="45720" rtlCol="0" anchor="ctr"/>
-          <a:lstStyle/>
-          <a:p>
-            <a:endParaRPr lang="en-US"/>
-          </a:p>
-        </p:txBody>
-      </p:sp>
-      <p:sp>
-        <p:nvSpPr>
-          <p:cNvPr id="5" name="Notes Placeholder 4"/>
-          <p:cNvSpPr>
-            <a:spLocks noGrp="1"/>
-          </p:cNvSpPr>
-          <p:nvPr>
-            <p:ph type="body" sz="quarter" idx="3"/>
-          </p:nvPr>
-        </p:nvSpPr>
-        <p:spPr>
-          <a:xfrm>
-            <a:off x="685800" y="4400550"/>
-            <a:ext cx="5486400" cy="3600450"/>
-          </a:xfrm>
-          <a:prstGeom prst="rect">
-            <a:avLst/>
-          </a:prstGeom>
-        </p:spPr>
-        <p:txBody>
-          <a:bodyPr vert="horz" lIns="91440" tIns="45720" rIns="91440" bIns="45720" rtlCol="0"/>
-          <a:lstStyle/>
-          <a:p>
-            <a:pPr lvl="0"/>
-            <a:r>
-              <a:rPr lang="en-US"/>
-              <a:t>Click to edit Master text styles</a:t>
-            </a:r>
-          </a:p>
-          <a:p>
-            <a:pPr lvl="1"/>
-            <a:r>
-              <a:rPr lang="en-US"/>
-              <a:t>Second level</a:t>
-            </a:r>
-          </a:p>
-          <a:p>
-            <a:pPr lvl="2"/>
-            <a:r>
-              <a:rPr lang="en-US"/>
-              <a:t>Third level</a:t>
-            </a:r>
-          </a:p>
-          <a:p>
-            <a:pPr lvl="3"/>
-            <a:r>
-              <a:rPr lang="en-US"/>
-              <a:t>Fourth level</a:t>
-            </a:r>
-          </a:p>
-          <a:p>
-            <a:pPr lvl="4"/>
-            <a:r>
-              <a:rPr lang="en-US"/>
-              <a:t>Fifth level</a:t>
-            </a:r>
-          </a:p>
-        </p:txBody>
-      </p:sp>
-      <p:sp>
-        <p:nvSpPr>
-          <p:cNvPr id="6" name="Footer Placeholder 5"/>
-          <p:cNvSpPr>
-            <a:spLocks noGrp="1"/>
-          </p:cNvSpPr>
-          <p:nvPr>
-            <p:ph type="ftr" sz="quarter" idx="4"/>
-          </p:nvPr>
-        </p:nvSpPr>
-        <p:spPr>
-          <a:xfrm>
-            <a:off x="0" y="8685213"/>
-            <a:ext cx="2971800" cy="458787"/>
-          </a:xfrm>
-          <a:prstGeom prst="rect">
-            <a:avLst/>
-          </a:prstGeom>
-        </p:spPr>
-        <p:txBody>
-          <a:bodyPr vert="horz" lIns="91440" tIns="45720" rIns="91440" bIns="45720" rtlCol="0" anchor="b"/>
-          <a:lstStyle>
-            <a:lvl1pPr algn="l">
-              <a:defRPr sz="1200"/>
-            </a:lvl1pPr>
-          </a:lstStyle>
-          <a:p>
-            <a:endParaRPr lang="en-US"/>
-          </a:p>
-        </p:txBody>
-      </p:sp>
-      <p:sp>
-        <p:nvSpPr>
-          <p:cNvPr id="7" name="Slide Number Placeholder 6"/>
-          <p:cNvSpPr>
-            <a:spLocks noGrp="1"/>
-          </p:cNvSpPr>
-          <p:nvPr>
-            <p:ph type="sldNum" sz="quarter" idx="5"/>
-          </p:nvPr>
-        </p:nvSpPr>
-        <p:spPr>
-          <a:xfrm>
-            <a:off x="3884613" y="8685213"/>
-            <a:ext cx="2971800" cy="458787"/>
-          </a:xfrm>
-          <a:prstGeom prst="rect">
-            <a:avLst/>
-          </a:prstGeom>
-        </p:spPr>
-        <p:txBody>
-          <a:bodyPr vert="horz" lIns="91440" tIns="45720" rIns="91440" bIns="45720" rtlCol="0" anchor="b"/>
-          <a:lstStyle>
-            <a:lvl1pPr algn="r">
-              <a:defRPr sz="1200"/>
-            </a:lvl1pPr>
-          </a:lstStyle>
-          <a:p>
-            <a:fld id="{CE5E9CC1-C706-0F49-92D6-E571CC5EEA8F}" type="slidenum">
-              <a:rPr lang="en-US"/>
-              <a:t>‹#›</a:t>
-            </a:fld>
-            <a:endParaRPr lang="en-US"/>
-          </a:p>
-        </p:txBody>
-      </p:sp>
     </p:spTree>
     <p:extLst>
       <p:ext uri="{BB962C8B-B14F-4D97-AF65-F5344CB8AC3E}">
-        <p14:creationId xmlns:p14="http://schemas.microsoft.com/office/powerpoint/2010/main" val="1024086991"/>
+        <p14:creationId xmlns:p14="http://schemas.microsoft.com/office/powerpoint/2010/main" val="4259500506"/>
       </p:ext>
     </p:extLst>
   </p:cSld>
@@ -1087,10 +933,6 @@
           <a:bodyPr/>
           <a:lstStyle/>
           <a:p>
-            <a:r>
-              <a:rPr lang="en-US" dirty="0"/>
-              <a:t/>
-            </a:r>
             <a:endParaRPr lang="en-US" dirty="0"/>
           </a:p>
         </p:txBody>
@@ -1175,10 +1017,6 @@
           <a:bodyPr/>
           <a:lstStyle/>
           <a:p>
-            <a:r>
-              <a:rPr lang="en-US" dirty="0"/>
-              <a:t/>
-            </a:r>
             <a:endParaRPr lang="en-US" dirty="0"/>
           </a:p>
         </p:txBody>
@@ -1263,10 +1101,6 @@
           <a:bodyPr/>
           <a:lstStyle/>
           <a:p>
-            <a:r>
-              <a:rPr lang="en-US" dirty="0"/>
-              <a:t/>
-            </a:r>
             <a:endParaRPr lang="en-US" dirty="0"/>
           </a:p>
         </p:txBody>
@@ -1351,10 +1185,6 @@
           <a:bodyPr/>
           <a:lstStyle/>
           <a:p>
-            <a:r>
-              <a:rPr lang="en-US" dirty="0"/>
-              <a:t/>
-            </a:r>
             <a:endParaRPr lang="en-US" dirty="0"/>
           </a:p>
         </p:txBody>
@@ -1439,10 +1269,6 @@
           <a:bodyPr/>
           <a:lstStyle/>
           <a:p>
-            <a:r>
-              <a:rPr lang="en-US" dirty="0"/>
-              <a:t/>
-            </a:r>
             <a:endParaRPr lang="en-US" dirty="0"/>
           </a:p>
         </p:txBody>
@@ -1527,10 +1353,6 @@
           <a:bodyPr/>
           <a:lstStyle/>
           <a:p>
-            <a:r>
-              <a:rPr lang="en-US" dirty="0"/>
-              <a:t/>
-            </a:r>
             <a:endParaRPr lang="en-US" dirty="0"/>
           </a:p>
         </p:txBody>
@@ -1615,10 +1437,6 @@
           <a:bodyPr/>
           <a:lstStyle/>
           <a:p>
-            <a:r>
-              <a:rPr lang="en-US" dirty="0"/>
-              <a:t/>
-            </a:r>
             <a:endParaRPr lang="en-US" dirty="0"/>
           </a:p>
         </p:txBody>
@@ -1703,10 +1521,6 @@
           <a:bodyPr/>
           <a:lstStyle/>
           <a:p>
-            <a:r>
-              <a:rPr lang="en-US" dirty="0"/>
-              <a:t/>
-            </a:r>
             <a:endParaRPr lang="en-US" dirty="0"/>
           </a:p>
         </p:txBody>
@@ -1785,6 +1599,7 @@
         <a:solidFill>
           <a:srgbClr val="FFFFFF"/>
         </a:solidFill>
+        <a:effectLst/>
       </p:bgPr>
     </p:bg>
     <p:spTree>
@@ -1812,6 +1627,11 @@
 <file path=ppt/slideMasters/slideMaster1.xml><?xml version="1.0" encoding="utf-8"?>
 <p:sldMaster xmlns:a="http://schemas.openxmlformats.org/drawingml/2006/main" xmlns:r="http://schemas.openxmlformats.org/officeDocument/2006/relationships" xmlns:p="http://schemas.openxmlformats.org/presentationml/2006/main">
   <p:cSld>
+    <p:bg>
+      <p:bgRef idx="1001">
+        <a:schemeClr val="bg1"/>
+      </p:bgRef>
+    </p:bg>
     <p:spTree>
       <p:nvGrpSpPr>
         <p:cNvPr id="1" name=""/>
@@ -2095,6 +1915,7 @@
         <a:solidFill>
           <a:srgbClr val="12395C"/>
         </a:solidFill>
+        <a:effectLst/>
       </p:bgPr>
     </p:bg>
     <p:spTree>
@@ -2177,14 +1998,14 @@
       </p:sp>
       <p:pic>
         <p:nvPicPr>
-          <p:cNvPr id="5" name="Image 0" descr="preencoded.png">    </p:cNvPr>
+          <p:cNvPr id="5" name="Image 0" descr="preencoded.png"/>
           <p:cNvPicPr>
             <a:picLocks noChangeAspect="1"/>
           </p:cNvPicPr>
           <p:nvPr/>
         </p:nvPicPr>
         <p:blipFill>
-          <a:blip r:embed="rId1"/>
+          <a:blip r:embed="rId3"/>
           <a:stretch>
             <a:fillRect/>
           </a:stretch>
@@ -2220,11 +2041,11 @@
           <a:bodyPr wrap="square" lIns="0" tIns="0" rIns="0" bIns="0" rtlCol="0" anchor="ctr"/>
           <a:lstStyle/>
           <a:p>
-            <a:pPr indent="0" marL="0">
-              <a:buNone/>
-            </a:pPr>
-            <a:r>
-              <a:rPr lang="en-US" sz="1400" b="1" spc="300" kern="0" dirty="0">
+            <a:pPr marL="0" indent="0">
+              <a:buNone/>
+            </a:pPr>
+            <a:r>
+              <a:rPr lang="en-US" sz="1400" b="1" kern="0" spc="300" dirty="0">
                 <a:solidFill>
                   <a:srgbClr val="5B9BD5"/>
                 </a:solidFill>
@@ -2259,7 +2080,7 @@
           <a:bodyPr wrap="square" lIns="0" tIns="0" rIns="0" bIns="0" rtlCol="0" anchor="ctr"/>
           <a:lstStyle/>
           <a:p>
-            <a:pPr indent="0" marL="0">
+            <a:pPr marL="0" indent="0">
               <a:buNone/>
             </a:pPr>
             <a:r>
@@ -2298,7 +2119,7 @@
           <a:bodyPr wrap="square" lIns="0" tIns="0" rIns="0" bIns="0" rtlCol="0" anchor="ctr"/>
           <a:lstStyle/>
           <a:p>
-            <a:pPr indent="0" marL="0">
+            <a:pPr marL="0" indent="0">
               <a:lnSpc>
                 <a:spcPct val="120000"/>
               </a:lnSpc>
@@ -2318,7 +2139,7 @@
             <a:endParaRPr lang="en-US" sz="1400" dirty="0"/>
           </a:p>
           <a:p>
-            <a:pPr indent="0" marL="0">
+            <a:pPr marL="0" indent="0">
               <a:lnSpc>
                 <a:spcPct val="120000"/>
               </a:lnSpc>
@@ -2392,251 +2213,7 @@
       </p:sp>
       <p:pic>
         <p:nvPicPr>
-          <p:cNvPr id="11" name="Image 1" descr="preencoded.png">    </p:cNvPr>
-          <p:cNvPicPr>
-            <a:picLocks noChangeAspect="1"/>
-          </p:cNvPicPr>
-          <p:nvPr/>
-        </p:nvPicPr>
-        <p:blipFill>
-          <a:blip r:embed="rId2"/>
-          <a:stretch>
-            <a:fillRect/>
-          </a:stretch>
-        </p:blipFill>
-        <p:spPr>
-          <a:xfrm>
-            <a:off x="1033272" y="4279392"/>
-            <a:ext cx="182880" cy="182880"/>
-          </a:xfrm>
-          <a:prstGeom prst="rect">
-            <a:avLst/>
-          </a:prstGeom>
-        </p:spPr>
-      </p:pic>
-      <p:sp>
-        <p:nvSpPr>
-          <p:cNvPr id="12" name="Text 8"/>
-          <p:cNvSpPr/>
-          <p:nvPr/>
-        </p:nvSpPr>
-        <p:spPr>
-          <a:xfrm>
-            <a:off x="1481328" y="4151376"/>
-            <a:ext cx="2743200" cy="228600"/>
-          </a:xfrm>
-          <a:prstGeom prst="rect">
-            <a:avLst/>
-          </a:prstGeom>
-          <a:noFill/>
-          <a:ln/>
-        </p:spPr>
-        <p:txBody>
-          <a:bodyPr wrap="square" lIns="0" tIns="0" rIns="0" bIns="0" rtlCol="0" anchor="ctr"/>
-          <a:lstStyle/>
-          <a:p>
-            <a:pPr indent="0" marL="0">
-              <a:buNone/>
-            </a:pPr>
-            <a:r>
-              <a:rPr lang="en-US" sz="950" b="1" spc="100" kern="0" dirty="0">
-                <a:solidFill>
-                  <a:srgbClr val="5B9BD5"/>
-                </a:solidFill>
-                <a:latin typeface="Calibri" pitchFamily="34" charset="0"/>
-                <a:ea typeface="Calibri" pitchFamily="34" charset="-122"/>
-                <a:cs typeface="Calibri" pitchFamily="34" charset="-120"/>
-              </a:rPr>
-              <a:t>STUDENT NAME</a:t>
-            </a:r>
-            <a:endParaRPr lang="en-US" sz="950" dirty="0"/>
-          </a:p>
-        </p:txBody>
-      </p:sp>
-      <p:sp>
-        <p:nvSpPr>
-          <p:cNvPr id="13" name="Text 9"/>
-          <p:cNvSpPr/>
-          <p:nvPr/>
-        </p:nvSpPr>
-        <p:spPr>
-          <a:xfrm>
-            <a:off x="1481328" y="4325112"/>
-            <a:ext cx="6858000" cy="274320"/>
-          </a:xfrm>
-          <a:prstGeom prst="rect">
-            <a:avLst/>
-          </a:prstGeom>
-          <a:noFill/>
-          <a:ln/>
-        </p:spPr>
-        <p:txBody>
-          <a:bodyPr wrap="square" lIns="0" tIns="0" rIns="0" bIns="0" rtlCol="0" anchor="ctr"/>
-          <a:lstStyle/>
-          <a:p>
-            <a:pPr indent="0" marL="0">
-              <a:buNone/>
-            </a:pPr>
-            <a:r>
-              <a:rPr lang="en-US" sz="1300" dirty="0">
-                <a:solidFill>
-                  <a:srgbClr val="FFFFFF"/>
-                </a:solidFill>
-                <a:latin typeface="Calibri" pitchFamily="34" charset="0"/>
-                <a:ea typeface="Calibri" pitchFamily="34" charset="-122"/>
-                <a:cs typeface="Calibri" pitchFamily="34" charset="-120"/>
-              </a:rPr>
-              <a:t>[Student Name]</a:t>
-            </a:r>
-            <a:endParaRPr lang="en-US" sz="1300" dirty="0"/>
-          </a:p>
-        </p:txBody>
-      </p:sp>
-      <p:sp>
-        <p:nvSpPr>
-          <p:cNvPr id="14" name="Shape 10"/>
-          <p:cNvSpPr/>
-          <p:nvPr/>
-        </p:nvSpPr>
-        <p:spPr>
-          <a:xfrm>
-            <a:off x="932688" y="4654296"/>
-            <a:ext cx="384048" cy="384048"/>
-          </a:xfrm>
-          <a:prstGeom prst="ellipse">
-            <a:avLst/>
-          </a:prstGeom>
-          <a:solidFill>
-            <a:srgbClr val="2E6DA4"/>
-          </a:solidFill>
-          <a:ln/>
-        </p:spPr>
-      </p:sp>
-      <p:pic>
-        <p:nvPicPr>
-          <p:cNvPr id="15" name="Image 2" descr="preencoded.png">    </p:cNvPr>
-          <p:cNvPicPr>
-            <a:picLocks noChangeAspect="1"/>
-          </p:cNvPicPr>
-          <p:nvPr/>
-        </p:nvPicPr>
-        <p:blipFill>
-          <a:blip r:embed="rId3"/>
-          <a:stretch>
-            <a:fillRect/>
-          </a:stretch>
-        </p:blipFill>
-        <p:spPr>
-          <a:xfrm>
-            <a:off x="1033272" y="4754880"/>
-            <a:ext cx="182880" cy="182880"/>
-          </a:xfrm>
-          <a:prstGeom prst="rect">
-            <a:avLst/>
-          </a:prstGeom>
-        </p:spPr>
-      </p:pic>
-      <p:sp>
-        <p:nvSpPr>
-          <p:cNvPr id="16" name="Text 11"/>
-          <p:cNvSpPr/>
-          <p:nvPr/>
-        </p:nvSpPr>
-        <p:spPr>
-          <a:xfrm>
-            <a:off x="1481328" y="4626864"/>
-            <a:ext cx="2743200" cy="228600"/>
-          </a:xfrm>
-          <a:prstGeom prst="rect">
-            <a:avLst/>
-          </a:prstGeom>
-          <a:noFill/>
-          <a:ln/>
-        </p:spPr>
-        <p:txBody>
-          <a:bodyPr wrap="square" lIns="0" tIns="0" rIns="0" bIns="0" rtlCol="0" anchor="ctr"/>
-          <a:lstStyle/>
-          <a:p>
-            <a:pPr indent="0" marL="0">
-              <a:buNone/>
-            </a:pPr>
-            <a:r>
-              <a:rPr lang="en-US" sz="950" b="1" spc="100" kern="0" dirty="0">
-                <a:solidFill>
-                  <a:srgbClr val="5B9BD5"/>
-                </a:solidFill>
-                <a:latin typeface="Calibri" pitchFamily="34" charset="0"/>
-                <a:ea typeface="Calibri" pitchFamily="34" charset="-122"/>
-                <a:cs typeface="Calibri" pitchFamily="34" charset="-120"/>
-              </a:rPr>
-              <a:t>DEPARTMENT</a:t>
-            </a:r>
-            <a:endParaRPr lang="en-US" sz="950" dirty="0"/>
-          </a:p>
-        </p:txBody>
-      </p:sp>
-      <p:sp>
-        <p:nvSpPr>
-          <p:cNvPr id="17" name="Text 12"/>
-          <p:cNvSpPr/>
-          <p:nvPr/>
-        </p:nvSpPr>
-        <p:spPr>
-          <a:xfrm>
-            <a:off x="1481328" y="4800600"/>
-            <a:ext cx="6858000" cy="274320"/>
-          </a:xfrm>
-          <a:prstGeom prst="rect">
-            <a:avLst/>
-          </a:prstGeom>
-          <a:noFill/>
-          <a:ln/>
-        </p:spPr>
-        <p:txBody>
-          <a:bodyPr wrap="square" lIns="0" tIns="0" rIns="0" bIns="0" rtlCol="0" anchor="ctr"/>
-          <a:lstStyle/>
-          <a:p>
-            <a:pPr indent="0" marL="0">
-              <a:buNone/>
-            </a:pPr>
-            <a:r>
-              <a:rPr lang="en-US" sz="1300" dirty="0">
-                <a:solidFill>
-                  <a:srgbClr val="FFFFFF"/>
-                </a:solidFill>
-                <a:latin typeface="Calibri" pitchFamily="34" charset="0"/>
-                <a:ea typeface="Calibri" pitchFamily="34" charset="-122"/>
-                <a:cs typeface="Calibri" pitchFamily="34" charset="-120"/>
-              </a:rPr>
-              <a:t>[Department, e.g. Computer Science Engineering]</a:t>
-            </a:r>
-            <a:endParaRPr lang="en-US" sz="1300" dirty="0"/>
-          </a:p>
-        </p:txBody>
-      </p:sp>
-      <p:sp>
-        <p:nvSpPr>
-          <p:cNvPr id="18" name="Shape 13"/>
-          <p:cNvSpPr/>
-          <p:nvPr/>
-        </p:nvSpPr>
-        <p:spPr>
-          <a:xfrm>
-            <a:off x="932688" y="5129784"/>
-            <a:ext cx="384048" cy="384048"/>
-          </a:xfrm>
-          <a:prstGeom prst="ellipse">
-            <a:avLst/>
-          </a:prstGeom>
-          <a:solidFill>
-            <a:srgbClr val="2E6DA4"/>
-          </a:solidFill>
-          <a:ln/>
-        </p:spPr>
-      </p:sp>
-      <p:pic>
-        <p:nvPicPr>
-          <p:cNvPr id="19" name="Image 3" descr="preencoded.png">    </p:cNvPr>
+          <p:cNvPr id="11" name="Image 1" descr="preencoded.png"/>
           <p:cNvPicPr>
             <a:picLocks noChangeAspect="1"/>
           </p:cNvPicPr>
@@ -2650,7 +2227,7 @@
         </p:blipFill>
         <p:spPr>
           <a:xfrm>
-            <a:off x="1033272" y="5230368"/>
+            <a:off x="1033272" y="4279392"/>
             <a:ext cx="182880" cy="182880"/>
           </a:xfrm>
           <a:prstGeom prst="rect">
@@ -2660,13 +2237,13 @@
       </p:pic>
       <p:sp>
         <p:nvSpPr>
-          <p:cNvPr id="20" name="Text 14"/>
-          <p:cNvSpPr/>
-          <p:nvPr/>
-        </p:nvSpPr>
-        <p:spPr>
-          <a:xfrm>
-            <a:off x="1481328" y="5102352"/>
+          <p:cNvPr id="12" name="Text 8"/>
+          <p:cNvSpPr/>
+          <p:nvPr/>
+        </p:nvSpPr>
+        <p:spPr>
+          <a:xfrm>
+            <a:off x="1481328" y="4151376"/>
             <a:ext cx="2743200" cy="228600"/>
           </a:xfrm>
           <a:prstGeom prst="rect">
@@ -2679,11 +2256,11 @@
           <a:bodyPr wrap="square" lIns="0" tIns="0" rIns="0" bIns="0" rtlCol="0" anchor="ctr"/>
           <a:lstStyle/>
           <a:p>
-            <a:pPr indent="0" marL="0">
-              <a:buNone/>
-            </a:pPr>
-            <a:r>
-              <a:rPr lang="en-US" sz="950" b="1" spc="100" kern="0" dirty="0">
+            <a:pPr marL="0" indent="0">
+              <a:buNone/>
+            </a:pPr>
+            <a:r>
+              <a:rPr lang="en-US" sz="950" b="1" kern="0" spc="100" dirty="0">
                 <a:solidFill>
                   <a:srgbClr val="5B9BD5"/>
                 </a:solidFill>
@@ -2691,7 +2268,7 @@
                 <a:ea typeface="Calibri" pitchFamily="34" charset="-122"/>
                 <a:cs typeface="Calibri" pitchFamily="34" charset="-120"/>
               </a:rPr>
-              <a:t>COLLEGE NAME</a:t>
+              <a:t>STUDENT NAME</a:t>
             </a:r>
             <a:endParaRPr lang="en-US" sz="950" dirty="0"/>
           </a:p>
@@ -2699,13 +2276,13 @@
       </p:sp>
       <p:sp>
         <p:nvSpPr>
-          <p:cNvPr id="21" name="Text 15"/>
-          <p:cNvSpPr/>
-          <p:nvPr/>
-        </p:nvSpPr>
-        <p:spPr>
-          <a:xfrm>
-            <a:off x="1481328" y="5276088"/>
+          <p:cNvPr id="13" name="Text 9"/>
+          <p:cNvSpPr/>
+          <p:nvPr/>
+        </p:nvSpPr>
+        <p:spPr>
+          <a:xfrm>
+            <a:off x="1481328" y="4325112"/>
             <a:ext cx="6858000" cy="274320"/>
           </a:xfrm>
           <a:prstGeom prst="rect">
@@ -2718,33 +2295,34 @@
           <a:bodyPr wrap="square" lIns="0" tIns="0" rIns="0" bIns="0" rtlCol="0" anchor="ctr"/>
           <a:lstStyle/>
           <a:p>
-            <a:pPr indent="0" marL="0">
-              <a:buNone/>
-            </a:pPr>
-            <a:r>
-              <a:rPr lang="en-US" sz="1300" dirty="0">
-                <a:solidFill>
-                  <a:srgbClr val="FFFFFF"/>
-                </a:solidFill>
-                <a:latin typeface="Calibri" pitchFamily="34" charset="0"/>
-                <a:ea typeface="Calibri" pitchFamily="34" charset="-122"/>
-                <a:cs typeface="Calibri" pitchFamily="34" charset="-120"/>
-              </a:rPr>
-              <a:t>[College Name]</a:t>
-            </a:r>
-            <a:endParaRPr lang="en-US" sz="1300" dirty="0"/>
-          </a:p>
-        </p:txBody>
-      </p:sp>
-      <p:sp>
-        <p:nvSpPr>
-          <p:cNvPr id="22" name="Shape 16"/>
-          <p:cNvSpPr/>
-          <p:nvPr/>
-        </p:nvSpPr>
-        <p:spPr>
-          <a:xfrm>
-            <a:off x="932688" y="5605272"/>
+            <a:r>
+              <a:rPr lang="en-US" sz="1200" dirty="0">
+                <a:solidFill>
+                  <a:schemeClr val="bg1"/>
+                </a:solidFill>
+              </a:rPr>
+              <a:t>GIFY SAMUEL A, SRIGANESH S, </a:t>
+            </a:r>
+            <a:r>
+              <a:rPr lang="en-IN" sz="1200" dirty="0">
+                <a:solidFill>
+                  <a:schemeClr val="bg1"/>
+                </a:solidFill>
+              </a:rPr>
+              <a:t>MUHAMMAD SHAAHID S, AJAY ADITYAA SS, JEEVABHARATHI S.</a:t>
+            </a:r>
+          </a:p>
+        </p:txBody>
+      </p:sp>
+      <p:sp>
+        <p:nvSpPr>
+          <p:cNvPr id="14" name="Shape 10"/>
+          <p:cNvSpPr/>
+          <p:nvPr/>
+        </p:nvSpPr>
+        <p:spPr>
+          <a:xfrm>
+            <a:off x="932688" y="4654296"/>
             <a:ext cx="384048" cy="384048"/>
           </a:xfrm>
           <a:prstGeom prst="ellipse">
@@ -2758,7 +2336,7 @@
       </p:sp>
       <p:pic>
         <p:nvPicPr>
-          <p:cNvPr id="23" name="Image 4" descr="preencoded.png">    </p:cNvPr>
+          <p:cNvPr id="15" name="Image 2" descr="preencoded.png"/>
           <p:cNvPicPr>
             <a:picLocks noChangeAspect="1"/>
           </p:cNvPicPr>
@@ -2772,7 +2350,7 @@
         </p:blipFill>
         <p:spPr>
           <a:xfrm>
-            <a:off x="1033272" y="5705856"/>
+            <a:off x="1033272" y="4754880"/>
             <a:ext cx="182880" cy="182880"/>
           </a:xfrm>
           <a:prstGeom prst="rect">
@@ -2782,13 +2360,13 @@
       </p:pic>
       <p:sp>
         <p:nvSpPr>
-          <p:cNvPr id="24" name="Text 17"/>
-          <p:cNvSpPr/>
-          <p:nvPr/>
-        </p:nvSpPr>
-        <p:spPr>
-          <a:xfrm>
-            <a:off x="1481328" y="5577840"/>
+          <p:cNvPr id="16" name="Text 11"/>
+          <p:cNvSpPr/>
+          <p:nvPr/>
+        </p:nvSpPr>
+        <p:spPr>
+          <a:xfrm>
+            <a:off x="1481328" y="4626864"/>
             <a:ext cx="2743200" cy="228600"/>
           </a:xfrm>
           <a:prstGeom prst="rect">
@@ -2801,11 +2379,11 @@
           <a:bodyPr wrap="square" lIns="0" tIns="0" rIns="0" bIns="0" rtlCol="0" anchor="ctr"/>
           <a:lstStyle/>
           <a:p>
-            <a:pPr indent="0" marL="0">
-              <a:buNone/>
-            </a:pPr>
-            <a:r>
-              <a:rPr lang="en-US" sz="950" b="1" spc="100" kern="0" dirty="0">
+            <a:pPr marL="0" indent="0">
+              <a:buNone/>
+            </a:pPr>
+            <a:r>
+              <a:rPr lang="en-US" sz="950" b="1" kern="0" spc="100" dirty="0">
                 <a:solidFill>
                   <a:srgbClr val="5B9BD5"/>
                 </a:solidFill>
@@ -2813,7 +2391,7 @@
                 <a:ea typeface="Calibri" pitchFamily="34" charset="-122"/>
                 <a:cs typeface="Calibri" pitchFamily="34" charset="-120"/>
               </a:rPr>
-              <a:t>ACADEMIC YEAR</a:t>
+              <a:t>DEPARTMENT</a:t>
             </a:r>
             <a:endParaRPr lang="en-US" sz="950" dirty="0"/>
           </a:p>
@@ -2821,13 +2399,13 @@
       </p:sp>
       <p:sp>
         <p:nvSpPr>
-          <p:cNvPr id="25" name="Text 18"/>
-          <p:cNvSpPr/>
-          <p:nvPr/>
-        </p:nvSpPr>
-        <p:spPr>
-          <a:xfrm>
-            <a:off x="1481328" y="5751576"/>
+          <p:cNvPr id="17" name="Text 12"/>
+          <p:cNvSpPr/>
+          <p:nvPr/>
+        </p:nvSpPr>
+        <p:spPr>
+          <a:xfrm>
+            <a:off x="1481328" y="4800600"/>
             <a:ext cx="6858000" cy="274320"/>
           </a:xfrm>
           <a:prstGeom prst="rect">
@@ -2840,7 +2418,7 @@
           <a:bodyPr wrap="square" lIns="0" tIns="0" rIns="0" bIns="0" rtlCol="0" anchor="ctr"/>
           <a:lstStyle/>
           <a:p>
-            <a:pPr indent="0" marL="0">
+            <a:pPr marL="0" indent="0">
               <a:buNone/>
             </a:pPr>
             <a:r>
@@ -2852,7 +2430,251 @@
                 <a:ea typeface="Calibri" pitchFamily="34" charset="-122"/>
                 <a:cs typeface="Calibri" pitchFamily="34" charset="-120"/>
               </a:rPr>
-              <a:t>[Academic Year, e.g. 2025 – 2026]</a:t>
+              <a:t>EEE</a:t>
+            </a:r>
+            <a:endParaRPr lang="en-US" sz="1300" dirty="0"/>
+          </a:p>
+        </p:txBody>
+      </p:sp>
+      <p:sp>
+        <p:nvSpPr>
+          <p:cNvPr id="18" name="Shape 13"/>
+          <p:cNvSpPr/>
+          <p:nvPr/>
+        </p:nvSpPr>
+        <p:spPr>
+          <a:xfrm>
+            <a:off x="932688" y="5129784"/>
+            <a:ext cx="384048" cy="384048"/>
+          </a:xfrm>
+          <a:prstGeom prst="ellipse">
+            <a:avLst/>
+          </a:prstGeom>
+          <a:solidFill>
+            <a:srgbClr val="2E6DA4"/>
+          </a:solidFill>
+          <a:ln/>
+        </p:spPr>
+      </p:sp>
+      <p:pic>
+        <p:nvPicPr>
+          <p:cNvPr id="19" name="Image 3" descr="preencoded.png"/>
+          <p:cNvPicPr>
+            <a:picLocks noChangeAspect="1"/>
+          </p:cNvPicPr>
+          <p:nvPr/>
+        </p:nvPicPr>
+        <p:blipFill>
+          <a:blip r:embed="rId6"/>
+          <a:stretch>
+            <a:fillRect/>
+          </a:stretch>
+        </p:blipFill>
+        <p:spPr>
+          <a:xfrm>
+            <a:off x="1033272" y="5230368"/>
+            <a:ext cx="182880" cy="182880"/>
+          </a:xfrm>
+          <a:prstGeom prst="rect">
+            <a:avLst/>
+          </a:prstGeom>
+        </p:spPr>
+      </p:pic>
+      <p:sp>
+        <p:nvSpPr>
+          <p:cNvPr id="20" name="Text 14"/>
+          <p:cNvSpPr/>
+          <p:nvPr/>
+        </p:nvSpPr>
+        <p:spPr>
+          <a:xfrm>
+            <a:off x="1481328" y="5102352"/>
+            <a:ext cx="2743200" cy="228600"/>
+          </a:xfrm>
+          <a:prstGeom prst="rect">
+            <a:avLst/>
+          </a:prstGeom>
+          <a:noFill/>
+          <a:ln/>
+        </p:spPr>
+        <p:txBody>
+          <a:bodyPr wrap="square" lIns="0" tIns="0" rIns="0" bIns="0" rtlCol="0" anchor="ctr"/>
+          <a:lstStyle/>
+          <a:p>
+            <a:pPr marL="0" indent="0">
+              <a:buNone/>
+            </a:pPr>
+            <a:r>
+              <a:rPr lang="en-US" sz="950" b="1" kern="0" spc="100" dirty="0">
+                <a:solidFill>
+                  <a:srgbClr val="5B9BD5"/>
+                </a:solidFill>
+                <a:latin typeface="Calibri" pitchFamily="34" charset="0"/>
+                <a:ea typeface="Calibri" pitchFamily="34" charset="-122"/>
+                <a:cs typeface="Calibri" pitchFamily="34" charset="-120"/>
+              </a:rPr>
+              <a:t>COLLEGE NAME</a:t>
+            </a:r>
+            <a:endParaRPr lang="en-US" sz="950" dirty="0"/>
+          </a:p>
+        </p:txBody>
+      </p:sp>
+      <p:sp>
+        <p:nvSpPr>
+          <p:cNvPr id="21" name="Text 15"/>
+          <p:cNvSpPr/>
+          <p:nvPr/>
+        </p:nvSpPr>
+        <p:spPr>
+          <a:xfrm>
+            <a:off x="1481328" y="5276088"/>
+            <a:ext cx="6858000" cy="274320"/>
+          </a:xfrm>
+          <a:prstGeom prst="rect">
+            <a:avLst/>
+          </a:prstGeom>
+          <a:noFill/>
+          <a:ln/>
+        </p:spPr>
+        <p:txBody>
+          <a:bodyPr wrap="square" lIns="0" tIns="0" rIns="0" bIns="0" rtlCol="0" anchor="ctr"/>
+          <a:lstStyle/>
+          <a:p>
+            <a:pPr marL="0" indent="0">
+              <a:buNone/>
+            </a:pPr>
+            <a:r>
+              <a:rPr lang="en-US" sz="1300" dirty="0">
+                <a:solidFill>
+                  <a:srgbClr val="FFFFFF"/>
+                </a:solidFill>
+                <a:latin typeface="Calibri" pitchFamily="34" charset="0"/>
+                <a:ea typeface="Calibri" pitchFamily="34" charset="-122"/>
+                <a:cs typeface="Calibri" pitchFamily="34" charset="-120"/>
+              </a:rPr>
+              <a:t>Sri Eshwar College of Engineering </a:t>
+            </a:r>
+            <a:endParaRPr lang="en-US" sz="1300" dirty="0"/>
+          </a:p>
+        </p:txBody>
+      </p:sp>
+      <p:sp>
+        <p:nvSpPr>
+          <p:cNvPr id="22" name="Shape 16"/>
+          <p:cNvSpPr/>
+          <p:nvPr/>
+        </p:nvSpPr>
+        <p:spPr>
+          <a:xfrm>
+            <a:off x="932688" y="5605272"/>
+            <a:ext cx="384048" cy="384048"/>
+          </a:xfrm>
+          <a:prstGeom prst="ellipse">
+            <a:avLst/>
+          </a:prstGeom>
+          <a:solidFill>
+            <a:srgbClr val="2E6DA4"/>
+          </a:solidFill>
+          <a:ln/>
+        </p:spPr>
+      </p:sp>
+      <p:pic>
+        <p:nvPicPr>
+          <p:cNvPr id="23" name="Image 4" descr="preencoded.png"/>
+          <p:cNvPicPr>
+            <a:picLocks noChangeAspect="1"/>
+          </p:cNvPicPr>
+          <p:nvPr/>
+        </p:nvPicPr>
+        <p:blipFill>
+          <a:blip r:embed="rId7"/>
+          <a:stretch>
+            <a:fillRect/>
+          </a:stretch>
+        </p:blipFill>
+        <p:spPr>
+          <a:xfrm>
+            <a:off x="1033272" y="5705856"/>
+            <a:ext cx="182880" cy="182880"/>
+          </a:xfrm>
+          <a:prstGeom prst="rect">
+            <a:avLst/>
+          </a:prstGeom>
+        </p:spPr>
+      </p:pic>
+      <p:sp>
+        <p:nvSpPr>
+          <p:cNvPr id="24" name="Text 17"/>
+          <p:cNvSpPr/>
+          <p:nvPr/>
+        </p:nvSpPr>
+        <p:spPr>
+          <a:xfrm>
+            <a:off x="1481328" y="5577840"/>
+            <a:ext cx="2743200" cy="228600"/>
+          </a:xfrm>
+          <a:prstGeom prst="rect">
+            <a:avLst/>
+          </a:prstGeom>
+          <a:noFill/>
+          <a:ln/>
+        </p:spPr>
+        <p:txBody>
+          <a:bodyPr wrap="square" lIns="0" tIns="0" rIns="0" bIns="0" rtlCol="0" anchor="ctr"/>
+          <a:lstStyle/>
+          <a:p>
+            <a:pPr marL="0" indent="0">
+              <a:buNone/>
+            </a:pPr>
+            <a:r>
+              <a:rPr lang="en-US" sz="950" b="1" kern="0" spc="100" dirty="0">
+                <a:solidFill>
+                  <a:srgbClr val="5B9BD5"/>
+                </a:solidFill>
+                <a:latin typeface="Calibri" pitchFamily="34" charset="0"/>
+                <a:ea typeface="Calibri" pitchFamily="34" charset="-122"/>
+                <a:cs typeface="Calibri" pitchFamily="34" charset="-120"/>
+              </a:rPr>
+              <a:t>ACADEMIC YEAR</a:t>
+            </a:r>
+            <a:endParaRPr lang="en-US" sz="950" dirty="0"/>
+          </a:p>
+        </p:txBody>
+      </p:sp>
+      <p:sp>
+        <p:nvSpPr>
+          <p:cNvPr id="25" name="Text 18"/>
+          <p:cNvSpPr/>
+          <p:nvPr/>
+        </p:nvSpPr>
+        <p:spPr>
+          <a:xfrm>
+            <a:off x="1481328" y="5751576"/>
+            <a:ext cx="6858000" cy="274320"/>
+          </a:xfrm>
+          <a:prstGeom prst="rect">
+            <a:avLst/>
+          </a:prstGeom>
+          <a:noFill/>
+          <a:ln/>
+        </p:spPr>
+        <p:txBody>
+          <a:bodyPr wrap="square" lIns="0" tIns="0" rIns="0" bIns="0" rtlCol="0" anchor="ctr"/>
+          <a:lstStyle/>
+          <a:p>
+            <a:pPr marL="0" indent="0">
+              <a:buNone/>
+            </a:pPr>
+            <a:r>
+              <a:rPr lang="en-US" sz="1300" dirty="0">
+                <a:solidFill>
+                  <a:srgbClr val="FFFFFF"/>
+                </a:solidFill>
+                <a:latin typeface="Calibri" pitchFamily="34" charset="0"/>
+                <a:ea typeface="Calibri" pitchFamily="34" charset="-122"/>
+                <a:cs typeface="Calibri" pitchFamily="34" charset="-120"/>
+              </a:rPr>
+              <a:t>2030</a:t>
             </a:r>
             <a:endParaRPr lang="en-US" sz="1300" dirty="0"/>
           </a:p>
@@ -2874,6 +2696,7 @@
         <a:solidFill>
           <a:srgbClr val="FFFFFF"/>
         </a:solidFill>
+        <a:effectLst/>
       </p:bgPr>
     </p:bg>
     <p:spTree>
@@ -2911,11 +2734,11 @@
           <a:bodyPr wrap="square" lIns="0" tIns="0" rIns="0" bIns="0" rtlCol="0" anchor="ctr"/>
           <a:lstStyle/>
           <a:p>
-            <a:pPr indent="0" marL="0">
-              <a:buNone/>
-            </a:pPr>
-            <a:r>
-              <a:rPr lang="en-US" sz="1200" b="1" spc="200" kern="0" dirty="0">
+            <a:pPr marL="0" indent="0">
+              <a:buNone/>
+            </a:pPr>
+            <a:r>
+              <a:rPr lang="en-US" sz="1200" b="1" kern="0" spc="200" dirty="0">
                 <a:solidFill>
                   <a:srgbClr val="2E6DA4"/>
                 </a:solidFill>
@@ -2950,7 +2773,7 @@
           <a:bodyPr wrap="square" lIns="0" tIns="0" rIns="0" bIns="0" rtlCol="0" anchor="ctr"/>
           <a:lstStyle/>
           <a:p>
-            <a:pPr indent="0" marL="0">
+            <a:pPr marL="0" indent="0">
               <a:buNone/>
             </a:pPr>
             <a:r>
@@ -3012,301 +2835,7 @@
       </p:sp>
       <p:pic>
         <p:nvPicPr>
-          <p:cNvPr id="6" name="Image 0" descr="preencoded.png">    </p:cNvPr>
-          <p:cNvPicPr>
-            <a:picLocks noChangeAspect="1"/>
-          </p:cNvPicPr>
-          <p:nvPr/>
-        </p:nvPicPr>
-        <p:blipFill>
-          <a:blip r:embed="rId1"/>
-          <a:stretch>
-            <a:fillRect/>
-          </a:stretch>
-        </p:blipFill>
-        <p:spPr>
-          <a:xfrm>
-            <a:off x="2112264" y="2295144"/>
-            <a:ext cx="438912" cy="438912"/>
-          </a:xfrm>
-          <a:prstGeom prst="rect">
-            <a:avLst/>
-          </a:prstGeom>
-        </p:spPr>
-      </p:pic>
-      <p:sp>
-        <p:nvSpPr>
-          <p:cNvPr id="7" name="Text 4"/>
-          <p:cNvSpPr/>
-          <p:nvPr/>
-        </p:nvSpPr>
-        <p:spPr>
-          <a:xfrm>
-            <a:off x="914400" y="3200400"/>
-            <a:ext cx="2834640" cy="685800"/>
-          </a:xfrm>
-          <a:prstGeom prst="rect">
-            <a:avLst/>
-          </a:prstGeom>
-          <a:noFill/>
-          <a:ln/>
-        </p:spPr>
-        <p:txBody>
-          <a:bodyPr wrap="square" lIns="0" tIns="0" rIns="0" bIns="0" rtlCol="0" anchor="t"/>
-          <a:lstStyle/>
-          <a:p>
-            <a:pPr algn="ctr" indent="0" marL="0">
-              <a:buNone/>
-            </a:pPr>
-            <a:r>
-              <a:rPr lang="en-US" sz="1600" b="1" dirty="0">
-                <a:solidFill>
-                  <a:srgbClr val="12395C"/>
-                </a:solidFill>
-                <a:latin typeface="Cambria" pitchFamily="34" charset="0"/>
-                <a:ea typeface="Cambria" pitchFamily="34" charset="-122"/>
-                <a:cs typeface="Cambria" pitchFamily="34" charset="-120"/>
-              </a:rPr>
-              <a:t>Why Placement Training Matters</a:t>
-            </a:r>
-            <a:endParaRPr lang="en-US" sz="1600" dirty="0"/>
-          </a:p>
-        </p:txBody>
-      </p:sp>
-      <p:sp>
-        <p:nvSpPr>
-          <p:cNvPr id="8" name="Text 5"/>
-          <p:cNvSpPr/>
-          <p:nvPr/>
-        </p:nvSpPr>
-        <p:spPr>
-          <a:xfrm>
-            <a:off x="960120" y="3977640"/>
-            <a:ext cx="2743200" cy="1554480"/>
-          </a:xfrm>
-          <a:prstGeom prst="rect">
-            <a:avLst/>
-          </a:prstGeom>
-          <a:noFill/>
-          <a:ln/>
-        </p:spPr>
-        <p:txBody>
-          <a:bodyPr wrap="square" lIns="0" tIns="0" rIns="0" bIns="0" rtlCol="0" anchor="ctr"/>
-          <a:lstStyle/>
-          <a:p>
-            <a:pPr algn="ctr" indent="0" marL="0">
-              <a:lnSpc>
-                <a:spcPct val="125000"/>
-              </a:lnSpc>
-              <a:buNone/>
-            </a:pPr>
-            <a:r>
-              <a:rPr lang="en-US" sz="1250" dirty="0">
-                <a:solidFill>
-                  <a:srgbClr val="5A6B7B"/>
-                </a:solidFill>
-                <a:latin typeface="Calibri" pitchFamily="34" charset="0"/>
-                <a:ea typeface="Calibri" pitchFamily="34" charset="-122"/>
-                <a:cs typeface="Calibri" pitchFamily="34" charset="-120"/>
-              </a:rPr>
-              <a:t>Structured training builds the aptitude, technical depth, and confidence recruiters look for in campus hiring.</a:t>
-            </a:r>
-            <a:endParaRPr lang="en-US" sz="1250" dirty="0"/>
-          </a:p>
-        </p:txBody>
-      </p:sp>
-      <p:sp>
-        <p:nvSpPr>
-          <p:cNvPr id="9" name="Shape 6"/>
-          <p:cNvSpPr/>
-          <p:nvPr/>
-        </p:nvSpPr>
-        <p:spPr>
-          <a:xfrm>
-            <a:off x="4343400" y="1691640"/>
-            <a:ext cx="3383280" cy="4023360"/>
-          </a:xfrm>
-          <a:prstGeom prst="roundRect">
-            <a:avLst>
-              <a:gd name="adj" fmla="val 2703"/>
-            </a:avLst>
-          </a:prstGeom>
-          <a:solidFill>
-            <a:srgbClr val="EAF1FB"/>
-          </a:solidFill>
-          <a:ln/>
-        </p:spPr>
-      </p:sp>
-      <p:sp>
-        <p:nvSpPr>
-          <p:cNvPr id="10" name="Shape 7"/>
-          <p:cNvSpPr/>
-          <p:nvPr/>
-        </p:nvSpPr>
-        <p:spPr>
-          <a:xfrm>
-            <a:off x="5577840" y="2057400"/>
-            <a:ext cx="914400" cy="914400"/>
-          </a:xfrm>
-          <a:prstGeom prst="ellipse">
-            <a:avLst/>
-          </a:prstGeom>
-          <a:solidFill>
-            <a:srgbClr val="2E6DA4"/>
-          </a:solidFill>
-          <a:ln/>
-        </p:spPr>
-      </p:sp>
-      <p:pic>
-        <p:nvPicPr>
-          <p:cNvPr id="11" name="Image 1" descr="preencoded.png">    </p:cNvPr>
-          <p:cNvPicPr>
-            <a:picLocks noChangeAspect="1"/>
-          </p:cNvPicPr>
-          <p:nvPr/>
-        </p:nvPicPr>
-        <p:blipFill>
-          <a:blip r:embed="rId2"/>
-          <a:stretch>
-            <a:fillRect/>
-          </a:stretch>
-        </p:blipFill>
-        <p:spPr>
-          <a:xfrm>
-            <a:off x="5815584" y="2295144"/>
-            <a:ext cx="438912" cy="438912"/>
-          </a:xfrm>
-          <a:prstGeom prst="rect">
-            <a:avLst/>
-          </a:prstGeom>
-        </p:spPr>
-      </p:pic>
-      <p:sp>
-        <p:nvSpPr>
-          <p:cNvPr id="12" name="Text 8"/>
-          <p:cNvSpPr/>
-          <p:nvPr/>
-        </p:nvSpPr>
-        <p:spPr>
-          <a:xfrm>
-            <a:off x="4617720" y="3200400"/>
-            <a:ext cx="2834640" cy="685800"/>
-          </a:xfrm>
-          <a:prstGeom prst="rect">
-            <a:avLst/>
-          </a:prstGeom>
-          <a:noFill/>
-          <a:ln/>
-        </p:spPr>
-        <p:txBody>
-          <a:bodyPr wrap="square" lIns="0" tIns="0" rIns="0" bIns="0" rtlCol="0" anchor="t"/>
-          <a:lstStyle/>
-          <a:p>
-            <a:pPr algn="ctr" indent="0" marL="0">
-              <a:buNone/>
-            </a:pPr>
-            <a:r>
-              <a:rPr lang="en-US" sz="1600" b="1" dirty="0">
-                <a:solidFill>
-                  <a:srgbClr val="12395C"/>
-                </a:solidFill>
-                <a:latin typeface="Cambria" pitchFamily="34" charset="0"/>
-                <a:ea typeface="Cambria" pitchFamily="34" charset="-122"/>
-                <a:cs typeface="Cambria" pitchFamily="34" charset="-120"/>
-              </a:rPr>
-              <a:t>Challenges Students Face</a:t>
-            </a:r>
-            <a:endParaRPr lang="en-US" sz="1600" dirty="0"/>
-          </a:p>
-        </p:txBody>
-      </p:sp>
-      <p:sp>
-        <p:nvSpPr>
-          <p:cNvPr id="13" name="Text 9"/>
-          <p:cNvSpPr/>
-          <p:nvPr/>
-        </p:nvSpPr>
-        <p:spPr>
-          <a:xfrm>
-            <a:off x="4663440" y="3977640"/>
-            <a:ext cx="2743200" cy="1554480"/>
-          </a:xfrm>
-          <a:prstGeom prst="rect">
-            <a:avLst/>
-          </a:prstGeom>
-          <a:noFill/>
-          <a:ln/>
-        </p:spPr>
-        <p:txBody>
-          <a:bodyPr wrap="square" lIns="0" tIns="0" rIns="0" bIns="0" rtlCol="0" anchor="ctr"/>
-          <a:lstStyle/>
-          <a:p>
-            <a:pPr algn="ctr" indent="0" marL="0">
-              <a:lnSpc>
-                <a:spcPct val="125000"/>
-              </a:lnSpc>
-              <a:buNone/>
-            </a:pPr>
-            <a:r>
-              <a:rPr lang="en-US" sz="1250" dirty="0">
-                <a:solidFill>
-                  <a:srgbClr val="5A6B7B"/>
-                </a:solidFill>
-                <a:latin typeface="Calibri" pitchFamily="34" charset="0"/>
-                <a:ea typeface="Calibri" pitchFamily="34" charset="-122"/>
-                <a:cs typeface="Calibri" pitchFamily="34" charset="-120"/>
-              </a:rPr>
-              <a:t>Inconsistent practice, unclear weak areas, and limited feedback often slow down placement preparation.</a:t>
-            </a:r>
-            <a:endParaRPr lang="en-US" sz="1250" dirty="0"/>
-          </a:p>
-        </p:txBody>
-      </p:sp>
-      <p:sp>
-        <p:nvSpPr>
-          <p:cNvPr id="14" name="Shape 10"/>
-          <p:cNvSpPr/>
-          <p:nvPr/>
-        </p:nvSpPr>
-        <p:spPr>
-          <a:xfrm>
-            <a:off x="8046720" y="1691640"/>
-            <a:ext cx="3383280" cy="4023360"/>
-          </a:xfrm>
-          <a:prstGeom prst="roundRect">
-            <a:avLst>
-              <a:gd name="adj" fmla="val 2703"/>
-            </a:avLst>
-          </a:prstGeom>
-          <a:solidFill>
-            <a:srgbClr val="EAF1FB"/>
-          </a:solidFill>
-          <a:ln/>
-        </p:spPr>
-      </p:sp>
-      <p:sp>
-        <p:nvSpPr>
-          <p:cNvPr id="15" name="Shape 11"/>
-          <p:cNvSpPr/>
-          <p:nvPr/>
-        </p:nvSpPr>
-        <p:spPr>
-          <a:xfrm>
-            <a:off x="9281160" y="2057400"/>
-            <a:ext cx="914400" cy="914400"/>
-          </a:xfrm>
-          <a:prstGeom prst="ellipse">
-            <a:avLst/>
-          </a:prstGeom>
-          <a:solidFill>
-            <a:srgbClr val="2E6DA4"/>
-          </a:solidFill>
-          <a:ln/>
-        </p:spPr>
-      </p:sp>
-      <p:pic>
-        <p:nvPicPr>
-          <p:cNvPr id="16" name="Image 2" descr="preencoded.png">    </p:cNvPr>
+          <p:cNvPr id="6" name="Image 0" descr="preencoded.png"/>
           <p:cNvPicPr>
             <a:picLocks noChangeAspect="1"/>
           </p:cNvPicPr>
@@ -3320,7 +2849,7 @@
         </p:blipFill>
         <p:spPr>
           <a:xfrm>
-            <a:off x="9518904" y="2295144"/>
+            <a:off x="2112264" y="2295144"/>
             <a:ext cx="438912" cy="438912"/>
           </a:xfrm>
           <a:prstGeom prst="rect">
@@ -3330,13 +2859,13 @@
       </p:pic>
       <p:sp>
         <p:nvSpPr>
-          <p:cNvPr id="17" name="Text 12"/>
-          <p:cNvSpPr/>
-          <p:nvPr/>
-        </p:nvSpPr>
-        <p:spPr>
-          <a:xfrm>
-            <a:off x="8321040" y="3200400"/>
+          <p:cNvPr id="7" name="Text 4"/>
+          <p:cNvSpPr/>
+          <p:nvPr/>
+        </p:nvSpPr>
+        <p:spPr>
+          <a:xfrm>
+            <a:off x="914400" y="3200400"/>
             <a:ext cx="2834640" cy="685800"/>
           </a:xfrm>
           <a:prstGeom prst="rect">
@@ -3349,7 +2878,7 @@
           <a:bodyPr wrap="square" lIns="0" tIns="0" rIns="0" bIns="0" rtlCol="0" anchor="t"/>
           <a:lstStyle/>
           <a:p>
-            <a:pPr algn="ctr" indent="0" marL="0">
+            <a:pPr marL="0" indent="0" algn="ctr">
               <a:buNone/>
             </a:pPr>
             <a:r>
@@ -3361,7 +2890,7 @@
                 <a:ea typeface="Cambria" pitchFamily="34" charset="-122"/>
                 <a:cs typeface="Cambria" pitchFamily="34" charset="-120"/>
               </a:rPr>
-              <a:t>Why Tracking Is Needed</a:t>
+              <a:t>Why Placement Training Matters</a:t>
             </a:r>
             <a:endParaRPr lang="en-US" sz="1600" dirty="0"/>
           </a:p>
@@ -3369,13 +2898,13 @@
       </p:sp>
       <p:sp>
         <p:nvSpPr>
-          <p:cNvPr id="18" name="Text 13"/>
-          <p:cNvSpPr/>
-          <p:nvPr/>
-        </p:nvSpPr>
-        <p:spPr>
-          <a:xfrm>
-            <a:off x="8366760" y="3977640"/>
+          <p:cNvPr id="8" name="Text 5"/>
+          <p:cNvSpPr/>
+          <p:nvPr/>
+        </p:nvSpPr>
+        <p:spPr>
+          <a:xfrm>
+            <a:off x="960120" y="3977640"/>
             <a:ext cx="2743200" cy="1554480"/>
           </a:xfrm>
           <a:prstGeom prst="rect">
@@ -3388,7 +2917,7 @@
           <a:bodyPr wrap="square" lIns="0" tIns="0" rIns="0" bIns="0" rtlCol="0" anchor="ctr"/>
           <a:lstStyle/>
           <a:p>
-            <a:pPr algn="ctr" indent="0" marL="0">
+            <a:pPr marL="0" indent="0" algn="ctr">
               <a:lnSpc>
                 <a:spcPct val="125000"/>
               </a:lnSpc>
@@ -3403,7 +2932,7 @@
                 <a:ea typeface="Calibri" pitchFamily="34" charset="-122"/>
                 <a:cs typeface="Calibri" pitchFamily="34" charset="-120"/>
               </a:rPr>
-              <a:t>A simple tracker turns scattered effort into visible, measurable progress toward placement readiness.</a:t>
+              <a:t>Structured training builds the aptitude, technical depth, and confidence recruiters look for in campus hiring.</a:t>
             </a:r>
             <a:endParaRPr lang="en-US" sz="1250" dirty="0"/>
           </a:p>
@@ -3411,14 +2940,119 @@
       </p:sp>
       <p:sp>
         <p:nvSpPr>
-          <p:cNvPr id="19" name="Text 14"/>
-          <p:cNvSpPr/>
-          <p:nvPr/>
-        </p:nvSpPr>
-        <p:spPr>
-          <a:xfrm>
-            <a:off x="457200" y="6473952"/>
-            <a:ext cx="6400800" cy="274320"/>
+          <p:cNvPr id="9" name="Shape 6"/>
+          <p:cNvSpPr/>
+          <p:nvPr/>
+        </p:nvSpPr>
+        <p:spPr>
+          <a:xfrm>
+            <a:off x="4343400" y="1691640"/>
+            <a:ext cx="3383280" cy="4023360"/>
+          </a:xfrm>
+          <a:prstGeom prst="roundRect">
+            <a:avLst>
+              <a:gd name="adj" fmla="val 2703"/>
+            </a:avLst>
+          </a:prstGeom>
+          <a:solidFill>
+            <a:srgbClr val="EAF1FB"/>
+          </a:solidFill>
+          <a:ln/>
+        </p:spPr>
+      </p:sp>
+      <p:sp>
+        <p:nvSpPr>
+          <p:cNvPr id="10" name="Shape 7"/>
+          <p:cNvSpPr/>
+          <p:nvPr/>
+        </p:nvSpPr>
+        <p:spPr>
+          <a:xfrm>
+            <a:off x="5577840" y="2057400"/>
+            <a:ext cx="914400" cy="914400"/>
+          </a:xfrm>
+          <a:prstGeom prst="ellipse">
+            <a:avLst/>
+          </a:prstGeom>
+          <a:solidFill>
+            <a:srgbClr val="2E6DA4"/>
+          </a:solidFill>
+          <a:ln/>
+        </p:spPr>
+      </p:sp>
+      <p:pic>
+        <p:nvPicPr>
+          <p:cNvPr id="11" name="Image 1" descr="preencoded.png"/>
+          <p:cNvPicPr>
+            <a:picLocks noChangeAspect="1"/>
+          </p:cNvPicPr>
+          <p:nvPr/>
+        </p:nvPicPr>
+        <p:blipFill>
+          <a:blip r:embed="rId4"/>
+          <a:stretch>
+            <a:fillRect/>
+          </a:stretch>
+        </p:blipFill>
+        <p:spPr>
+          <a:xfrm>
+            <a:off x="5815584" y="2295144"/>
+            <a:ext cx="438912" cy="438912"/>
+          </a:xfrm>
+          <a:prstGeom prst="rect">
+            <a:avLst/>
+          </a:prstGeom>
+        </p:spPr>
+      </p:pic>
+      <p:sp>
+        <p:nvSpPr>
+          <p:cNvPr id="12" name="Text 8"/>
+          <p:cNvSpPr/>
+          <p:nvPr/>
+        </p:nvSpPr>
+        <p:spPr>
+          <a:xfrm>
+            <a:off x="4617720" y="3200400"/>
+            <a:ext cx="2834640" cy="685800"/>
+          </a:xfrm>
+          <a:prstGeom prst="rect">
+            <a:avLst/>
+          </a:prstGeom>
+          <a:noFill/>
+          <a:ln/>
+        </p:spPr>
+        <p:txBody>
+          <a:bodyPr wrap="square" lIns="0" tIns="0" rIns="0" bIns="0" rtlCol="0" anchor="t"/>
+          <a:lstStyle/>
+          <a:p>
+            <a:pPr marL="0" indent="0" algn="ctr">
+              <a:buNone/>
+            </a:pPr>
+            <a:r>
+              <a:rPr lang="en-US" sz="1600" b="1" dirty="0">
+                <a:solidFill>
+                  <a:srgbClr val="12395C"/>
+                </a:solidFill>
+                <a:latin typeface="Cambria" pitchFamily="34" charset="0"/>
+                <a:ea typeface="Cambria" pitchFamily="34" charset="-122"/>
+                <a:cs typeface="Cambria" pitchFamily="34" charset="-120"/>
+              </a:rPr>
+              <a:t>Challenges Students Face</a:t>
+            </a:r>
+            <a:endParaRPr lang="en-US" sz="1600" dirty="0"/>
+          </a:p>
+        </p:txBody>
+      </p:sp>
+      <p:sp>
+        <p:nvSpPr>
+          <p:cNvPr id="13" name="Text 9"/>
+          <p:cNvSpPr/>
+          <p:nvPr/>
+        </p:nvSpPr>
+        <p:spPr>
+          <a:xfrm>
+            <a:off x="4663440" y="3977640"/>
+            <a:ext cx="2743200" cy="1554480"/>
           </a:xfrm>
           <a:prstGeom prst="rect">
             <a:avLst/>
@@ -3430,11 +3064,14 @@
           <a:bodyPr wrap="square" lIns="0" tIns="0" rIns="0" bIns="0" rtlCol="0" anchor="ctr"/>
           <a:lstStyle/>
           <a:p>
-            <a:pPr algn="l" indent="0" marL="0">
-              <a:buNone/>
-            </a:pPr>
-            <a:r>
-              <a:rPr lang="en-US" sz="900" dirty="0">
+            <a:pPr marL="0" indent="0" algn="ctr">
+              <a:lnSpc>
+                <a:spcPct val="125000"/>
+              </a:lnSpc>
+              <a:buNone/>
+            </a:pPr>
+            <a:r>
+              <a:rPr lang="en-US" sz="1250" dirty="0">
                 <a:solidFill>
                   <a:srgbClr val="5A6B7B"/>
                 </a:solidFill>
@@ -3442,6 +3079,192 @@
                 <a:ea typeface="Calibri" pitchFamily="34" charset="-122"/>
                 <a:cs typeface="Calibri" pitchFamily="34" charset="-120"/>
               </a:rPr>
+              <a:t>Inconsistent practice, unclear weak areas, and limited feedback often slow down placement preparation.</a:t>
+            </a:r>
+            <a:endParaRPr lang="en-US" sz="1250" dirty="0"/>
+          </a:p>
+        </p:txBody>
+      </p:sp>
+      <p:sp>
+        <p:nvSpPr>
+          <p:cNvPr id="14" name="Shape 10"/>
+          <p:cNvSpPr/>
+          <p:nvPr/>
+        </p:nvSpPr>
+        <p:spPr>
+          <a:xfrm>
+            <a:off x="8046720" y="1691640"/>
+            <a:ext cx="3383280" cy="4023360"/>
+          </a:xfrm>
+          <a:prstGeom prst="roundRect">
+            <a:avLst>
+              <a:gd name="adj" fmla="val 2703"/>
+            </a:avLst>
+          </a:prstGeom>
+          <a:solidFill>
+            <a:srgbClr val="EAF1FB"/>
+          </a:solidFill>
+          <a:ln/>
+        </p:spPr>
+      </p:sp>
+      <p:sp>
+        <p:nvSpPr>
+          <p:cNvPr id="15" name="Shape 11"/>
+          <p:cNvSpPr/>
+          <p:nvPr/>
+        </p:nvSpPr>
+        <p:spPr>
+          <a:xfrm>
+            <a:off x="9281160" y="2057400"/>
+            <a:ext cx="914400" cy="914400"/>
+          </a:xfrm>
+          <a:prstGeom prst="ellipse">
+            <a:avLst/>
+          </a:prstGeom>
+          <a:solidFill>
+            <a:srgbClr val="2E6DA4"/>
+          </a:solidFill>
+          <a:ln/>
+        </p:spPr>
+      </p:sp>
+      <p:pic>
+        <p:nvPicPr>
+          <p:cNvPr id="16" name="Image 2" descr="preencoded.png"/>
+          <p:cNvPicPr>
+            <a:picLocks noChangeAspect="1"/>
+          </p:cNvPicPr>
+          <p:nvPr/>
+        </p:nvPicPr>
+        <p:blipFill>
+          <a:blip r:embed="rId5"/>
+          <a:stretch>
+            <a:fillRect/>
+          </a:stretch>
+        </p:blipFill>
+        <p:spPr>
+          <a:xfrm>
+            <a:off x="9518904" y="2295144"/>
+            <a:ext cx="438912" cy="438912"/>
+          </a:xfrm>
+          <a:prstGeom prst="rect">
+            <a:avLst/>
+          </a:prstGeom>
+        </p:spPr>
+      </p:pic>
+      <p:sp>
+        <p:nvSpPr>
+          <p:cNvPr id="17" name="Text 12"/>
+          <p:cNvSpPr/>
+          <p:nvPr/>
+        </p:nvSpPr>
+        <p:spPr>
+          <a:xfrm>
+            <a:off x="8321040" y="3200400"/>
+            <a:ext cx="2834640" cy="685800"/>
+          </a:xfrm>
+          <a:prstGeom prst="rect">
+            <a:avLst/>
+          </a:prstGeom>
+          <a:noFill/>
+          <a:ln/>
+        </p:spPr>
+        <p:txBody>
+          <a:bodyPr wrap="square" lIns="0" tIns="0" rIns="0" bIns="0" rtlCol="0" anchor="t"/>
+          <a:lstStyle/>
+          <a:p>
+            <a:pPr marL="0" indent="0" algn="ctr">
+              <a:buNone/>
+            </a:pPr>
+            <a:r>
+              <a:rPr lang="en-US" sz="1600" b="1" dirty="0">
+                <a:solidFill>
+                  <a:srgbClr val="12395C"/>
+                </a:solidFill>
+                <a:latin typeface="Cambria" pitchFamily="34" charset="0"/>
+                <a:ea typeface="Cambria" pitchFamily="34" charset="-122"/>
+                <a:cs typeface="Cambria" pitchFamily="34" charset="-120"/>
+              </a:rPr>
+              <a:t>Why Tracking Is Needed</a:t>
+            </a:r>
+            <a:endParaRPr lang="en-US" sz="1600" dirty="0"/>
+          </a:p>
+        </p:txBody>
+      </p:sp>
+      <p:sp>
+        <p:nvSpPr>
+          <p:cNvPr id="18" name="Text 13"/>
+          <p:cNvSpPr/>
+          <p:nvPr/>
+        </p:nvSpPr>
+        <p:spPr>
+          <a:xfrm>
+            <a:off x="8366760" y="3977640"/>
+            <a:ext cx="2743200" cy="1554480"/>
+          </a:xfrm>
+          <a:prstGeom prst="rect">
+            <a:avLst/>
+          </a:prstGeom>
+          <a:noFill/>
+          <a:ln/>
+        </p:spPr>
+        <p:txBody>
+          <a:bodyPr wrap="square" lIns="0" tIns="0" rIns="0" bIns="0" rtlCol="0" anchor="ctr"/>
+          <a:lstStyle/>
+          <a:p>
+            <a:pPr marL="0" indent="0" algn="ctr">
+              <a:lnSpc>
+                <a:spcPct val="125000"/>
+              </a:lnSpc>
+              <a:buNone/>
+            </a:pPr>
+            <a:r>
+              <a:rPr lang="en-US" sz="1250" dirty="0">
+                <a:solidFill>
+                  <a:srgbClr val="5A6B7B"/>
+                </a:solidFill>
+                <a:latin typeface="Calibri" pitchFamily="34" charset="0"/>
+                <a:ea typeface="Calibri" pitchFamily="34" charset="-122"/>
+                <a:cs typeface="Calibri" pitchFamily="34" charset="-120"/>
+              </a:rPr>
+              <a:t>A simple tracker turns scattered effort into visible, measurable progress toward placement readiness.</a:t>
+            </a:r>
+            <a:endParaRPr lang="en-US" sz="1250" dirty="0"/>
+          </a:p>
+        </p:txBody>
+      </p:sp>
+      <p:sp>
+        <p:nvSpPr>
+          <p:cNvPr id="19" name="Text 14"/>
+          <p:cNvSpPr/>
+          <p:nvPr/>
+        </p:nvSpPr>
+        <p:spPr>
+          <a:xfrm>
+            <a:off x="457200" y="6473952"/>
+            <a:ext cx="6400800" cy="274320"/>
+          </a:xfrm>
+          <a:prstGeom prst="rect">
+            <a:avLst/>
+          </a:prstGeom>
+          <a:noFill/>
+          <a:ln/>
+        </p:spPr>
+        <p:txBody>
+          <a:bodyPr wrap="square" lIns="0" tIns="0" rIns="0" bIns="0" rtlCol="0" anchor="ctr"/>
+          <a:lstStyle/>
+          <a:p>
+            <a:pPr marL="0" indent="0" algn="l">
+              <a:buNone/>
+            </a:pPr>
+            <a:r>
+              <a:rPr lang="en-US" sz="900" dirty="0">
+                <a:solidFill>
+                  <a:srgbClr val="5A6B7B"/>
+                </a:solidFill>
+                <a:latin typeface="Calibri" pitchFamily="34" charset="0"/>
+                <a:ea typeface="Calibri" pitchFamily="34" charset="-122"/>
+                <a:cs typeface="Calibri" pitchFamily="34" charset="-120"/>
+              </a:rPr>
               <a:t>Placement Training Progress Tracker</a:t>
             </a:r>
             <a:endParaRPr lang="en-US" sz="900" dirty="0"/>
@@ -3469,7 +3292,7 @@
           <a:bodyPr wrap="square" lIns="0" tIns="0" rIns="0" bIns="0" rtlCol="0" anchor="ctr"/>
           <a:lstStyle/>
           <a:p>
-            <a:pPr algn="r" indent="0" marL="0">
+            <a:pPr marL="0" indent="0" algn="r">
               <a:buNone/>
             </a:pPr>
             <a:r>
@@ -3503,6 +3326,7 @@
         <a:solidFill>
           <a:srgbClr val="FFFFFF"/>
         </a:solidFill>
+        <a:effectLst/>
       </p:bgPr>
     </p:bg>
     <p:spTree>
@@ -3540,11 +3364,11 @@
           <a:bodyPr wrap="square" lIns="0" tIns="0" rIns="0" bIns="0" rtlCol="0" anchor="ctr"/>
           <a:lstStyle/>
           <a:p>
-            <a:pPr indent="0" marL="0">
-              <a:buNone/>
-            </a:pPr>
-            <a:r>
-              <a:rPr lang="en-US" sz="1200" b="1" spc="200" kern="0" dirty="0">
+            <a:pPr marL="0" indent="0">
+              <a:buNone/>
+            </a:pPr>
+            <a:r>
+              <a:rPr lang="en-US" sz="1200" b="1" kern="0" spc="200" dirty="0">
                 <a:solidFill>
                   <a:srgbClr val="2E6DA4"/>
                 </a:solidFill>
@@ -3579,7 +3403,7 @@
           <a:bodyPr wrap="square" lIns="0" tIns="0" rIns="0" bIns="0" rtlCol="0" anchor="ctr"/>
           <a:lstStyle/>
           <a:p>
-            <a:pPr indent="0" marL="0">
+            <a:pPr marL="0" indent="0">
               <a:buNone/>
             </a:pPr>
             <a:r>
@@ -3641,301 +3465,7 @@
       </p:sp>
       <p:pic>
         <p:nvPicPr>
-          <p:cNvPr id="6" name="Image 0" descr="preencoded.png">    </p:cNvPr>
-          <p:cNvPicPr>
-            <a:picLocks noChangeAspect="1"/>
-          </p:cNvPicPr>
-          <p:nvPr/>
-        </p:nvPicPr>
-        <p:blipFill>
-          <a:blip r:embed="rId1"/>
-          <a:stretch>
-            <a:fillRect/>
-          </a:stretch>
-        </p:blipFill>
-        <p:spPr>
-          <a:xfrm>
-            <a:off x="1128370" y="2568550"/>
-            <a:ext cx="395021" cy="395021"/>
-          </a:xfrm>
-          <a:prstGeom prst="rect">
-            <a:avLst/>
-          </a:prstGeom>
-        </p:spPr>
-      </p:pic>
-      <p:sp>
-        <p:nvSpPr>
-          <p:cNvPr id="7" name="Text 4"/>
-          <p:cNvSpPr/>
-          <p:nvPr/>
-        </p:nvSpPr>
-        <p:spPr>
-          <a:xfrm>
-            <a:off x="1920240" y="2039112"/>
-            <a:ext cx="3520440" cy="365760"/>
-          </a:xfrm>
-          <a:prstGeom prst="rect">
-            <a:avLst/>
-          </a:prstGeom>
-          <a:noFill/>
-          <a:ln/>
-        </p:spPr>
-        <p:txBody>
-          <a:bodyPr wrap="square" lIns="0" tIns="0" rIns="0" bIns="0" rtlCol="0" anchor="ctr"/>
-          <a:lstStyle/>
-          <a:p>
-            <a:pPr indent="0" marL="0">
-              <a:buNone/>
-            </a:pPr>
-            <a:r>
-              <a:rPr lang="en-US" sz="1600" b="1" dirty="0">
-                <a:solidFill>
-                  <a:srgbClr val="12395C"/>
-                </a:solidFill>
-                <a:latin typeface="Cambria" pitchFamily="34" charset="0"/>
-                <a:ea typeface="Cambria" pitchFamily="34" charset="-122"/>
-                <a:cs typeface="Cambria" pitchFamily="34" charset="-120"/>
-              </a:rPr>
-              <a:t>Monitor Attendance</a:t>
-            </a:r>
-            <a:endParaRPr lang="en-US" sz="1600" dirty="0"/>
-          </a:p>
-        </p:txBody>
-      </p:sp>
-      <p:sp>
-        <p:nvSpPr>
-          <p:cNvPr id="8" name="Text 5"/>
-          <p:cNvSpPr/>
-          <p:nvPr/>
-        </p:nvSpPr>
-        <p:spPr>
-          <a:xfrm>
-            <a:off x="1920240" y="2441448"/>
-            <a:ext cx="3520440" cy="1097280"/>
-          </a:xfrm>
-          <a:prstGeom prst="rect">
-            <a:avLst/>
-          </a:prstGeom>
-          <a:noFill/>
-          <a:ln/>
-        </p:spPr>
-        <p:txBody>
-          <a:bodyPr wrap="square" lIns="0" tIns="0" rIns="0" bIns="0" rtlCol="0" anchor="ctr"/>
-          <a:lstStyle/>
-          <a:p>
-            <a:pPr indent="0" marL="0">
-              <a:lnSpc>
-                <a:spcPct val="120000"/>
-              </a:lnSpc>
-              <a:buNone/>
-            </a:pPr>
-            <a:r>
-              <a:rPr lang="en-US" sz="1250" dirty="0">
-                <a:solidFill>
-                  <a:srgbClr val="5A6B7B"/>
-                </a:solidFill>
-                <a:latin typeface="Calibri" pitchFamily="34" charset="0"/>
-                <a:ea typeface="Calibri" pitchFamily="34" charset="-122"/>
-                <a:cs typeface="Calibri" pitchFamily="34" charset="-120"/>
-              </a:rPr>
-              <a:t>Track student attendance across every training session consistently.</a:t>
-            </a:r>
-            <a:endParaRPr lang="en-US" sz="1250" dirty="0"/>
-          </a:p>
-        </p:txBody>
-      </p:sp>
-      <p:sp>
-        <p:nvSpPr>
-          <p:cNvPr id="9" name="Shape 6"/>
-          <p:cNvSpPr/>
-          <p:nvPr/>
-        </p:nvSpPr>
-        <p:spPr>
-          <a:xfrm>
-            <a:off x="6172200" y="1783080"/>
-            <a:ext cx="5074920" cy="1965960"/>
-          </a:xfrm>
-          <a:prstGeom prst="roundRect">
-            <a:avLst>
-              <a:gd name="adj" fmla="val 4651"/>
-            </a:avLst>
-          </a:prstGeom>
-          <a:solidFill>
-            <a:srgbClr val="EAF1FB"/>
-          </a:solidFill>
-          <a:ln/>
-        </p:spPr>
-      </p:sp>
-      <p:sp>
-        <p:nvSpPr>
-          <p:cNvPr id="10" name="Shape 7"/>
-          <p:cNvSpPr/>
-          <p:nvPr/>
-        </p:nvSpPr>
-        <p:spPr>
-          <a:xfrm>
-            <a:off x="6446520" y="2354580"/>
-            <a:ext cx="822960" cy="822960"/>
-          </a:xfrm>
-          <a:prstGeom prst="ellipse">
-            <a:avLst/>
-          </a:prstGeom>
-          <a:solidFill>
-            <a:srgbClr val="12395C"/>
-          </a:solidFill>
-          <a:ln/>
-        </p:spPr>
-      </p:sp>
-      <p:pic>
-        <p:nvPicPr>
-          <p:cNvPr id="11" name="Image 1" descr="preencoded.png">    </p:cNvPr>
-          <p:cNvPicPr>
-            <a:picLocks noChangeAspect="1"/>
-          </p:cNvPicPr>
-          <p:nvPr/>
-        </p:nvPicPr>
-        <p:blipFill>
-          <a:blip r:embed="rId2"/>
-          <a:stretch>
-            <a:fillRect/>
-          </a:stretch>
-        </p:blipFill>
-        <p:spPr>
-          <a:xfrm>
-            <a:off x="6660490" y="2568550"/>
-            <a:ext cx="395021" cy="395021"/>
-          </a:xfrm>
-          <a:prstGeom prst="rect">
-            <a:avLst/>
-          </a:prstGeom>
-        </p:spPr>
-      </p:pic>
-      <p:sp>
-        <p:nvSpPr>
-          <p:cNvPr id="12" name="Text 8"/>
-          <p:cNvSpPr/>
-          <p:nvPr/>
-        </p:nvSpPr>
-        <p:spPr>
-          <a:xfrm>
-            <a:off x="7452360" y="2039112"/>
-            <a:ext cx="3520440" cy="365760"/>
-          </a:xfrm>
-          <a:prstGeom prst="rect">
-            <a:avLst/>
-          </a:prstGeom>
-          <a:noFill/>
-          <a:ln/>
-        </p:spPr>
-        <p:txBody>
-          <a:bodyPr wrap="square" lIns="0" tIns="0" rIns="0" bIns="0" rtlCol="0" anchor="ctr"/>
-          <a:lstStyle/>
-          <a:p>
-            <a:pPr indent="0" marL="0">
-              <a:buNone/>
-            </a:pPr>
-            <a:r>
-              <a:rPr lang="en-US" sz="1600" b="1" dirty="0">
-                <a:solidFill>
-                  <a:srgbClr val="12395C"/>
-                </a:solidFill>
-                <a:latin typeface="Cambria" pitchFamily="34" charset="0"/>
-                <a:ea typeface="Cambria" pitchFamily="34" charset="-122"/>
-                <a:cs typeface="Cambria" pitchFamily="34" charset="-120"/>
-              </a:rPr>
-              <a:t>Track Performance</a:t>
-            </a:r>
-            <a:endParaRPr lang="en-US" sz="1600" dirty="0"/>
-          </a:p>
-        </p:txBody>
-      </p:sp>
-      <p:sp>
-        <p:nvSpPr>
-          <p:cNvPr id="13" name="Text 9"/>
-          <p:cNvSpPr/>
-          <p:nvPr/>
-        </p:nvSpPr>
-        <p:spPr>
-          <a:xfrm>
-            <a:off x="7452360" y="2441448"/>
-            <a:ext cx="3520440" cy="1097280"/>
-          </a:xfrm>
-          <a:prstGeom prst="rect">
-            <a:avLst/>
-          </a:prstGeom>
-          <a:noFill/>
-          <a:ln/>
-        </p:spPr>
-        <p:txBody>
-          <a:bodyPr wrap="square" lIns="0" tIns="0" rIns="0" bIns="0" rtlCol="0" anchor="ctr"/>
-          <a:lstStyle/>
-          <a:p>
-            <a:pPr indent="0" marL="0">
-              <a:lnSpc>
-                <a:spcPct val="120000"/>
-              </a:lnSpc>
-              <a:buNone/>
-            </a:pPr>
-            <a:r>
-              <a:rPr lang="en-US" sz="1250" dirty="0">
-                <a:solidFill>
-                  <a:srgbClr val="5A6B7B"/>
-                </a:solidFill>
-                <a:latin typeface="Calibri" pitchFamily="34" charset="0"/>
-                <a:ea typeface="Calibri" pitchFamily="34" charset="-122"/>
-                <a:cs typeface="Calibri" pitchFamily="34" charset="-120"/>
-              </a:rPr>
-              <a:t>Record aptitude and technical scores to reveal real progress over time.</a:t>
-            </a:r>
-            <a:endParaRPr lang="en-US" sz="1250" dirty="0"/>
-          </a:p>
-        </p:txBody>
-      </p:sp>
-      <p:sp>
-        <p:nvSpPr>
-          <p:cNvPr id="14" name="Shape 10"/>
-          <p:cNvSpPr/>
-          <p:nvPr/>
-        </p:nvSpPr>
-        <p:spPr>
-          <a:xfrm>
-            <a:off x="640080" y="4069080"/>
-            <a:ext cx="5074920" cy="1965960"/>
-          </a:xfrm>
-          <a:prstGeom prst="roundRect">
-            <a:avLst>
-              <a:gd name="adj" fmla="val 4651"/>
-            </a:avLst>
-          </a:prstGeom>
-          <a:solidFill>
-            <a:srgbClr val="EAF1FB"/>
-          </a:solidFill>
-          <a:ln/>
-        </p:spPr>
-      </p:sp>
-      <p:sp>
-        <p:nvSpPr>
-          <p:cNvPr id="15" name="Shape 11"/>
-          <p:cNvSpPr/>
-          <p:nvPr/>
-        </p:nvSpPr>
-        <p:spPr>
-          <a:xfrm>
-            <a:off x="914400" y="4640580"/>
-            <a:ext cx="822960" cy="822960"/>
-          </a:xfrm>
-          <a:prstGeom prst="ellipse">
-            <a:avLst/>
-          </a:prstGeom>
-          <a:solidFill>
-            <a:srgbClr val="12395C"/>
-          </a:solidFill>
-          <a:ln/>
-        </p:spPr>
-      </p:sp>
-      <p:pic>
-        <p:nvPicPr>
-          <p:cNvPr id="16" name="Image 2" descr="preencoded.png">    </p:cNvPr>
+          <p:cNvPr id="6" name="Image 0" descr="preencoded.png"/>
           <p:cNvPicPr>
             <a:picLocks noChangeAspect="1"/>
           </p:cNvPicPr>
@@ -3949,7 +3479,7 @@
         </p:blipFill>
         <p:spPr>
           <a:xfrm>
-            <a:off x="1128370" y="4854550"/>
+            <a:off x="1128370" y="2568550"/>
             <a:ext cx="395021" cy="395021"/>
           </a:xfrm>
           <a:prstGeom prst="rect">
@@ -3959,13 +3489,13 @@
       </p:pic>
       <p:sp>
         <p:nvSpPr>
-          <p:cNvPr id="17" name="Text 12"/>
-          <p:cNvSpPr/>
-          <p:nvPr/>
-        </p:nvSpPr>
-        <p:spPr>
-          <a:xfrm>
-            <a:off x="1920240" y="4325112"/>
+          <p:cNvPr id="7" name="Text 4"/>
+          <p:cNvSpPr/>
+          <p:nvPr/>
+        </p:nvSpPr>
+        <p:spPr>
+          <a:xfrm>
+            <a:off x="1920240" y="2039112"/>
             <a:ext cx="3520440" cy="365760"/>
           </a:xfrm>
           <a:prstGeom prst="rect">
@@ -3978,7 +3508,7 @@
           <a:bodyPr wrap="square" lIns="0" tIns="0" rIns="0" bIns="0" rtlCol="0" anchor="ctr"/>
           <a:lstStyle/>
           <a:p>
-            <a:pPr indent="0" marL="0">
+            <a:pPr marL="0" indent="0">
               <a:buNone/>
             </a:pPr>
             <a:r>
@@ -3990,7 +3520,7 @@
                 <a:ea typeface="Cambria" pitchFamily="34" charset="-122"/>
                 <a:cs typeface="Cambria" pitchFamily="34" charset="-120"/>
               </a:rPr>
-              <a:t>Improve Soft Skills</a:t>
+              <a:t>Monitor Attendance</a:t>
             </a:r>
             <a:endParaRPr lang="en-US" sz="1600" dirty="0"/>
           </a:p>
@@ -3998,13 +3528,13 @@
       </p:sp>
       <p:sp>
         <p:nvSpPr>
-          <p:cNvPr id="18" name="Text 13"/>
-          <p:cNvSpPr/>
-          <p:nvPr/>
-        </p:nvSpPr>
-        <p:spPr>
-          <a:xfrm>
-            <a:off x="1920240" y="4727448"/>
+          <p:cNvPr id="8" name="Text 5"/>
+          <p:cNvSpPr/>
+          <p:nvPr/>
+        </p:nvSpPr>
+        <p:spPr>
+          <a:xfrm>
+            <a:off x="1920240" y="2441448"/>
             <a:ext cx="3520440" cy="1097280"/>
           </a:xfrm>
           <a:prstGeom prst="rect">
@@ -4017,7 +3547,7 @@
           <a:bodyPr wrap="square" lIns="0" tIns="0" rIns="0" bIns="0" rtlCol="0" anchor="ctr"/>
           <a:lstStyle/>
           <a:p>
-            <a:pPr indent="0" marL="0">
+            <a:pPr marL="0" indent="0">
               <a:lnSpc>
                 <a:spcPct val="120000"/>
               </a:lnSpc>
@@ -4032,7 +3562,7 @@
                 <a:ea typeface="Calibri" pitchFamily="34" charset="-122"/>
                 <a:cs typeface="Calibri" pitchFamily="34" charset="-120"/>
               </a:rPr>
-              <a:t>Strengthen communication and interview skills through regular evaluation.</a:t>
+              <a:t>Track student attendance across every training session consistently.</a:t>
             </a:r>
             <a:endParaRPr lang="en-US" sz="1250" dirty="0"/>
           </a:p>
@@ -4040,13 +3570,13 @@
       </p:sp>
       <p:sp>
         <p:nvSpPr>
-          <p:cNvPr id="19" name="Shape 14"/>
-          <p:cNvSpPr/>
-          <p:nvPr/>
-        </p:nvSpPr>
-        <p:spPr>
-          <a:xfrm>
-            <a:off x="6172200" y="4069080"/>
+          <p:cNvPr id="9" name="Shape 6"/>
+          <p:cNvSpPr/>
+          <p:nvPr/>
+        </p:nvSpPr>
+        <p:spPr>
+          <a:xfrm>
+            <a:off x="6172200" y="1783080"/>
             <a:ext cx="5074920" cy="1965960"/>
           </a:xfrm>
           <a:prstGeom prst="roundRect">
@@ -4062,13 +3592,13 @@
       </p:sp>
       <p:sp>
         <p:nvSpPr>
-          <p:cNvPr id="20" name="Shape 15"/>
-          <p:cNvSpPr/>
-          <p:nvPr/>
-        </p:nvSpPr>
-        <p:spPr>
-          <a:xfrm>
-            <a:off x="6446520" y="4640580"/>
+          <p:cNvPr id="10" name="Shape 7"/>
+          <p:cNvSpPr/>
+          <p:nvPr/>
+        </p:nvSpPr>
+        <p:spPr>
+          <a:xfrm>
+            <a:off x="6446520" y="2354580"/>
             <a:ext cx="822960" cy="822960"/>
           </a:xfrm>
           <a:prstGeom prst="ellipse">
@@ -4082,7 +3612,7 @@
       </p:sp>
       <p:pic>
         <p:nvPicPr>
-          <p:cNvPr id="21" name="Image 3" descr="preencoded.png">    </p:cNvPr>
+          <p:cNvPr id="11" name="Image 1" descr="preencoded.png"/>
           <p:cNvPicPr>
             <a:picLocks noChangeAspect="1"/>
           </p:cNvPicPr>
@@ -4096,7 +3626,7 @@
         </p:blipFill>
         <p:spPr>
           <a:xfrm>
-            <a:off x="6660490" y="4854550"/>
+            <a:off x="6660490" y="2568550"/>
             <a:ext cx="395021" cy="395021"/>
           </a:xfrm>
           <a:prstGeom prst="rect">
@@ -4106,13 +3636,13 @@
       </p:pic>
       <p:sp>
         <p:nvSpPr>
-          <p:cNvPr id="22" name="Text 16"/>
-          <p:cNvSpPr/>
-          <p:nvPr/>
-        </p:nvSpPr>
-        <p:spPr>
-          <a:xfrm>
-            <a:off x="7452360" y="4325112"/>
+          <p:cNvPr id="12" name="Text 8"/>
+          <p:cNvSpPr/>
+          <p:nvPr/>
+        </p:nvSpPr>
+        <p:spPr>
+          <a:xfrm>
+            <a:off x="7452360" y="2039112"/>
             <a:ext cx="3520440" cy="365760"/>
           </a:xfrm>
           <a:prstGeom prst="rect">
@@ -4125,7 +3655,7 @@
           <a:bodyPr wrap="square" lIns="0" tIns="0" rIns="0" bIns="0" rtlCol="0" anchor="ctr"/>
           <a:lstStyle/>
           <a:p>
-            <a:pPr indent="0" marL="0">
+            <a:pPr marL="0" indent="0">
               <a:buNone/>
             </a:pPr>
             <a:r>
@@ -4137,7 +3667,7 @@
                 <a:ea typeface="Cambria" pitchFamily="34" charset="-122"/>
                 <a:cs typeface="Cambria" pitchFamily="34" charset="-120"/>
               </a:rPr>
-              <a:t>Enhance Readiness</a:t>
+              <a:t>Track Performance</a:t>
             </a:r>
             <a:endParaRPr lang="en-US" sz="1600" dirty="0"/>
           </a:p>
@@ -4145,13 +3675,13 @@
       </p:sp>
       <p:sp>
         <p:nvSpPr>
-          <p:cNvPr id="23" name="Text 17"/>
-          <p:cNvSpPr/>
-          <p:nvPr/>
-        </p:nvSpPr>
-        <p:spPr>
-          <a:xfrm>
-            <a:off x="7452360" y="4727448"/>
+          <p:cNvPr id="13" name="Text 9"/>
+          <p:cNvSpPr/>
+          <p:nvPr/>
+        </p:nvSpPr>
+        <p:spPr>
+          <a:xfrm>
+            <a:off x="7452360" y="2441448"/>
             <a:ext cx="3520440" cy="1097280"/>
           </a:xfrm>
           <a:prstGeom prst="rect">
@@ -4164,7 +3694,7 @@
           <a:bodyPr wrap="square" lIns="0" tIns="0" rIns="0" bIns="0" rtlCol="0" anchor="ctr"/>
           <a:lstStyle/>
           <a:p>
-            <a:pPr indent="0" marL="0">
+            <a:pPr marL="0" indent="0">
               <a:lnSpc>
                 <a:spcPct val="120000"/>
               </a:lnSpc>
@@ -4179,7 +3709,7 @@
                 <a:ea typeface="Calibri" pitchFamily="34" charset="-122"/>
                 <a:cs typeface="Calibri" pitchFamily="34" charset="-120"/>
               </a:rPr>
-              <a:t>Bring every student closer to full placement readiness, step by step.</a:t>
+              <a:t>Record aptitude and technical scores to reveal real progress over time.</a:t>
             </a:r>
             <a:endParaRPr lang="en-US" sz="1250" dirty="0"/>
           </a:p>
@@ -4187,14 +3717,80 @@
       </p:sp>
       <p:sp>
         <p:nvSpPr>
-          <p:cNvPr id="24" name="Text 18"/>
-          <p:cNvSpPr/>
-          <p:nvPr/>
-        </p:nvSpPr>
-        <p:spPr>
-          <a:xfrm>
-            <a:off x="457200" y="6473952"/>
-            <a:ext cx="6400800" cy="274320"/>
+          <p:cNvPr id="14" name="Shape 10"/>
+          <p:cNvSpPr/>
+          <p:nvPr/>
+        </p:nvSpPr>
+        <p:spPr>
+          <a:xfrm>
+            <a:off x="640080" y="4069080"/>
+            <a:ext cx="5074920" cy="1965960"/>
+          </a:xfrm>
+          <a:prstGeom prst="roundRect">
+            <a:avLst>
+              <a:gd name="adj" fmla="val 4651"/>
+            </a:avLst>
+          </a:prstGeom>
+          <a:solidFill>
+            <a:srgbClr val="EAF1FB"/>
+          </a:solidFill>
+          <a:ln/>
+        </p:spPr>
+      </p:sp>
+      <p:sp>
+        <p:nvSpPr>
+          <p:cNvPr id="15" name="Shape 11"/>
+          <p:cNvSpPr/>
+          <p:nvPr/>
+        </p:nvSpPr>
+        <p:spPr>
+          <a:xfrm>
+            <a:off x="914400" y="4640580"/>
+            <a:ext cx="822960" cy="822960"/>
+          </a:xfrm>
+          <a:prstGeom prst="ellipse">
+            <a:avLst/>
+          </a:prstGeom>
+          <a:solidFill>
+            <a:srgbClr val="12395C"/>
+          </a:solidFill>
+          <a:ln/>
+        </p:spPr>
+      </p:sp>
+      <p:pic>
+        <p:nvPicPr>
+          <p:cNvPr id="16" name="Image 2" descr="preencoded.png"/>
+          <p:cNvPicPr>
+            <a:picLocks noChangeAspect="1"/>
+          </p:cNvPicPr>
+          <p:nvPr/>
+        </p:nvPicPr>
+        <p:blipFill>
+          <a:blip r:embed="rId5"/>
+          <a:stretch>
+            <a:fillRect/>
+          </a:stretch>
+        </p:blipFill>
+        <p:spPr>
+          <a:xfrm>
+            <a:off x="1128370" y="4854550"/>
+            <a:ext cx="395021" cy="395021"/>
+          </a:xfrm>
+          <a:prstGeom prst="rect">
+            <a:avLst/>
+          </a:prstGeom>
+        </p:spPr>
+      </p:pic>
+      <p:sp>
+        <p:nvSpPr>
+          <p:cNvPr id="17" name="Text 12"/>
+          <p:cNvSpPr/>
+          <p:nvPr/>
+        </p:nvSpPr>
+        <p:spPr>
+          <a:xfrm>
+            <a:off x="1920240" y="4325112"/>
+            <a:ext cx="3520440" cy="365760"/>
           </a:xfrm>
           <a:prstGeom prst="rect">
             <a:avLst/>
@@ -4206,11 +3802,53 @@
           <a:bodyPr wrap="square" lIns="0" tIns="0" rIns="0" bIns="0" rtlCol="0" anchor="ctr"/>
           <a:lstStyle/>
           <a:p>
-            <a:pPr algn="l" indent="0" marL="0">
-              <a:buNone/>
-            </a:pPr>
-            <a:r>
-              <a:rPr lang="en-US" sz="900" dirty="0">
+            <a:pPr marL="0" indent="0">
+              <a:buNone/>
+            </a:pPr>
+            <a:r>
+              <a:rPr lang="en-US" sz="1600" b="1" dirty="0">
+                <a:solidFill>
+                  <a:srgbClr val="12395C"/>
+                </a:solidFill>
+                <a:latin typeface="Cambria" pitchFamily="34" charset="0"/>
+                <a:ea typeface="Cambria" pitchFamily="34" charset="-122"/>
+                <a:cs typeface="Cambria" pitchFamily="34" charset="-120"/>
+              </a:rPr>
+              <a:t>Improve Soft Skills</a:t>
+            </a:r>
+            <a:endParaRPr lang="en-US" sz="1600" dirty="0"/>
+          </a:p>
+        </p:txBody>
+      </p:sp>
+      <p:sp>
+        <p:nvSpPr>
+          <p:cNvPr id="18" name="Text 13"/>
+          <p:cNvSpPr/>
+          <p:nvPr/>
+        </p:nvSpPr>
+        <p:spPr>
+          <a:xfrm>
+            <a:off x="1920240" y="4727448"/>
+            <a:ext cx="3520440" cy="1097280"/>
+          </a:xfrm>
+          <a:prstGeom prst="rect">
+            <a:avLst/>
+          </a:prstGeom>
+          <a:noFill/>
+          <a:ln/>
+        </p:spPr>
+        <p:txBody>
+          <a:bodyPr wrap="square" lIns="0" tIns="0" rIns="0" bIns="0" rtlCol="0" anchor="ctr"/>
+          <a:lstStyle/>
+          <a:p>
+            <a:pPr marL="0" indent="0">
+              <a:lnSpc>
+                <a:spcPct val="120000"/>
+              </a:lnSpc>
+              <a:buNone/>
+            </a:pPr>
+            <a:r>
+              <a:rPr lang="en-US" sz="1250" dirty="0">
                 <a:solidFill>
                   <a:srgbClr val="5A6B7B"/>
                 </a:solidFill>
@@ -4218,6 +3856,192 @@
                 <a:ea typeface="Calibri" pitchFamily="34" charset="-122"/>
                 <a:cs typeface="Calibri" pitchFamily="34" charset="-120"/>
               </a:rPr>
+              <a:t>Strengthen communication and interview skills through regular evaluation.</a:t>
+            </a:r>
+            <a:endParaRPr lang="en-US" sz="1250" dirty="0"/>
+          </a:p>
+        </p:txBody>
+      </p:sp>
+      <p:sp>
+        <p:nvSpPr>
+          <p:cNvPr id="19" name="Shape 14"/>
+          <p:cNvSpPr/>
+          <p:nvPr/>
+        </p:nvSpPr>
+        <p:spPr>
+          <a:xfrm>
+            <a:off x="6172200" y="4069080"/>
+            <a:ext cx="5074920" cy="1965960"/>
+          </a:xfrm>
+          <a:prstGeom prst="roundRect">
+            <a:avLst>
+              <a:gd name="adj" fmla="val 4651"/>
+            </a:avLst>
+          </a:prstGeom>
+          <a:solidFill>
+            <a:srgbClr val="EAF1FB"/>
+          </a:solidFill>
+          <a:ln/>
+        </p:spPr>
+      </p:sp>
+      <p:sp>
+        <p:nvSpPr>
+          <p:cNvPr id="20" name="Shape 15"/>
+          <p:cNvSpPr/>
+          <p:nvPr/>
+        </p:nvSpPr>
+        <p:spPr>
+          <a:xfrm>
+            <a:off x="6446520" y="4640580"/>
+            <a:ext cx="822960" cy="822960"/>
+          </a:xfrm>
+          <a:prstGeom prst="ellipse">
+            <a:avLst/>
+          </a:prstGeom>
+          <a:solidFill>
+            <a:srgbClr val="12395C"/>
+          </a:solidFill>
+          <a:ln/>
+        </p:spPr>
+      </p:sp>
+      <p:pic>
+        <p:nvPicPr>
+          <p:cNvPr id="21" name="Image 3" descr="preencoded.png"/>
+          <p:cNvPicPr>
+            <a:picLocks noChangeAspect="1"/>
+          </p:cNvPicPr>
+          <p:nvPr/>
+        </p:nvPicPr>
+        <p:blipFill>
+          <a:blip r:embed="rId6"/>
+          <a:stretch>
+            <a:fillRect/>
+          </a:stretch>
+        </p:blipFill>
+        <p:spPr>
+          <a:xfrm>
+            <a:off x="6660490" y="4854550"/>
+            <a:ext cx="395021" cy="395021"/>
+          </a:xfrm>
+          <a:prstGeom prst="rect">
+            <a:avLst/>
+          </a:prstGeom>
+        </p:spPr>
+      </p:pic>
+      <p:sp>
+        <p:nvSpPr>
+          <p:cNvPr id="22" name="Text 16"/>
+          <p:cNvSpPr/>
+          <p:nvPr/>
+        </p:nvSpPr>
+        <p:spPr>
+          <a:xfrm>
+            <a:off x="7452360" y="4325112"/>
+            <a:ext cx="3520440" cy="365760"/>
+          </a:xfrm>
+          <a:prstGeom prst="rect">
+            <a:avLst/>
+          </a:prstGeom>
+          <a:noFill/>
+          <a:ln/>
+        </p:spPr>
+        <p:txBody>
+          <a:bodyPr wrap="square" lIns="0" tIns="0" rIns="0" bIns="0" rtlCol="0" anchor="ctr"/>
+          <a:lstStyle/>
+          <a:p>
+            <a:pPr marL="0" indent="0">
+              <a:buNone/>
+            </a:pPr>
+            <a:r>
+              <a:rPr lang="en-US" sz="1600" b="1" dirty="0">
+                <a:solidFill>
+                  <a:srgbClr val="12395C"/>
+                </a:solidFill>
+                <a:latin typeface="Cambria" pitchFamily="34" charset="0"/>
+                <a:ea typeface="Cambria" pitchFamily="34" charset="-122"/>
+                <a:cs typeface="Cambria" pitchFamily="34" charset="-120"/>
+              </a:rPr>
+              <a:t>Enhance Readiness</a:t>
+            </a:r>
+            <a:endParaRPr lang="en-US" sz="1600" dirty="0"/>
+          </a:p>
+        </p:txBody>
+      </p:sp>
+      <p:sp>
+        <p:nvSpPr>
+          <p:cNvPr id="23" name="Text 17"/>
+          <p:cNvSpPr/>
+          <p:nvPr/>
+        </p:nvSpPr>
+        <p:spPr>
+          <a:xfrm>
+            <a:off x="7452360" y="4727448"/>
+            <a:ext cx="3520440" cy="1097280"/>
+          </a:xfrm>
+          <a:prstGeom prst="rect">
+            <a:avLst/>
+          </a:prstGeom>
+          <a:noFill/>
+          <a:ln/>
+        </p:spPr>
+        <p:txBody>
+          <a:bodyPr wrap="square" lIns="0" tIns="0" rIns="0" bIns="0" rtlCol="0" anchor="ctr"/>
+          <a:lstStyle/>
+          <a:p>
+            <a:pPr marL="0" indent="0">
+              <a:lnSpc>
+                <a:spcPct val="120000"/>
+              </a:lnSpc>
+              <a:buNone/>
+            </a:pPr>
+            <a:r>
+              <a:rPr lang="en-US" sz="1250" dirty="0">
+                <a:solidFill>
+                  <a:srgbClr val="5A6B7B"/>
+                </a:solidFill>
+                <a:latin typeface="Calibri" pitchFamily="34" charset="0"/>
+                <a:ea typeface="Calibri" pitchFamily="34" charset="-122"/>
+                <a:cs typeface="Calibri" pitchFamily="34" charset="-120"/>
+              </a:rPr>
+              <a:t>Bring every student closer to full placement readiness, step by step.</a:t>
+            </a:r>
+            <a:endParaRPr lang="en-US" sz="1250" dirty="0"/>
+          </a:p>
+        </p:txBody>
+      </p:sp>
+      <p:sp>
+        <p:nvSpPr>
+          <p:cNvPr id="24" name="Text 18"/>
+          <p:cNvSpPr/>
+          <p:nvPr/>
+        </p:nvSpPr>
+        <p:spPr>
+          <a:xfrm>
+            <a:off x="457200" y="6473952"/>
+            <a:ext cx="6400800" cy="274320"/>
+          </a:xfrm>
+          <a:prstGeom prst="rect">
+            <a:avLst/>
+          </a:prstGeom>
+          <a:noFill/>
+          <a:ln/>
+        </p:spPr>
+        <p:txBody>
+          <a:bodyPr wrap="square" lIns="0" tIns="0" rIns="0" bIns="0" rtlCol="0" anchor="ctr"/>
+          <a:lstStyle/>
+          <a:p>
+            <a:pPr marL="0" indent="0" algn="l">
+              <a:buNone/>
+            </a:pPr>
+            <a:r>
+              <a:rPr lang="en-US" sz="900" dirty="0">
+                <a:solidFill>
+                  <a:srgbClr val="5A6B7B"/>
+                </a:solidFill>
+                <a:latin typeface="Calibri" pitchFamily="34" charset="0"/>
+                <a:ea typeface="Calibri" pitchFamily="34" charset="-122"/>
+                <a:cs typeface="Calibri" pitchFamily="34" charset="-120"/>
+              </a:rPr>
               <a:t>Placement Training Progress Tracker</a:t>
             </a:r>
             <a:endParaRPr lang="en-US" sz="900" dirty="0"/>
@@ -4245,7 +4069,7 @@
           <a:bodyPr wrap="square" lIns="0" tIns="0" rIns="0" bIns="0" rtlCol="0" anchor="ctr"/>
           <a:lstStyle/>
           <a:p>
-            <a:pPr algn="r" indent="0" marL="0">
+            <a:pPr marL="0" indent="0" algn="r">
               <a:buNone/>
             </a:pPr>
             <a:r>
@@ -4279,6 +4103,7 @@
         <a:solidFill>
           <a:srgbClr val="FFFFFF"/>
         </a:solidFill>
+        <a:effectLst/>
       </p:bgPr>
     </p:bg>
     <p:spTree>
@@ -4316,11 +4141,11 @@
           <a:bodyPr wrap="square" lIns="0" tIns="0" rIns="0" bIns="0" rtlCol="0" anchor="ctr"/>
           <a:lstStyle/>
           <a:p>
-            <a:pPr indent="0" marL="0">
-              <a:buNone/>
-            </a:pPr>
-            <a:r>
-              <a:rPr lang="en-US" sz="1200" b="1" spc="200" kern="0" dirty="0">
+            <a:pPr marL="0" indent="0">
+              <a:buNone/>
+            </a:pPr>
+            <a:r>
+              <a:rPr lang="en-US" sz="1200" b="1" kern="0" spc="200" dirty="0">
                 <a:solidFill>
                   <a:srgbClr val="2E6DA4"/>
                 </a:solidFill>
@@ -4355,7 +4180,7 @@
           <a:bodyPr wrap="square" lIns="0" tIns="0" rIns="0" bIns="0" rtlCol="0" anchor="ctr"/>
           <a:lstStyle/>
           <a:p>
-            <a:pPr indent="0" marL="0">
+            <a:pPr marL="0" indent="0">
               <a:buNone/>
             </a:pPr>
             <a:r>
@@ -4442,7 +4267,7 @@
           <a:bodyPr wrap="square" lIns="0" tIns="0" rIns="0" bIns="0" rtlCol="0" anchor="ctr"/>
           <a:lstStyle/>
           <a:p>
-            <a:pPr algn="ctr" indent="0" marL="0">
+            <a:pPr marL="0" indent="0" algn="ctr">
               <a:buNone/>
             </a:pPr>
             <a:r>
@@ -4482,14 +4307,14 @@
       </p:sp>
       <p:pic>
         <p:nvPicPr>
-          <p:cNvPr id="8" name="Image 0" descr="preencoded.png">    </p:cNvPr>
+          <p:cNvPr id="8" name="Image 0" descr="preencoded.png"/>
           <p:cNvPicPr>
             <a:picLocks noChangeAspect="1"/>
           </p:cNvPicPr>
           <p:nvPr/>
         </p:nvPicPr>
         <p:blipFill>
-          <a:blip r:embed="rId1"/>
+          <a:blip r:embed="rId3"/>
           <a:stretch>
             <a:fillRect/>
           </a:stretch>
@@ -4525,7 +4350,7 @@
           <a:bodyPr wrap="square" lIns="0" tIns="0" rIns="0" bIns="0" rtlCol="0" anchor="ctr"/>
           <a:lstStyle/>
           <a:p>
-            <a:pPr algn="ctr" indent="0" marL="0">
+            <a:pPr marL="0" indent="0" algn="ctr">
               <a:lnSpc>
                 <a:spcPct val="115000"/>
               </a:lnSpc>
@@ -4545,7 +4370,7 @@
             <a:endParaRPr lang="en-US" sz="1250" dirty="0"/>
           </a:p>
           <a:p>
-            <a:pPr algn="ctr" indent="0" marL="0">
+            <a:pPr marL="0" indent="0" algn="ctr">
               <a:lnSpc>
                 <a:spcPct val="115000"/>
               </a:lnSpc>
@@ -4612,7 +4437,7 @@
           <a:bodyPr wrap="square" lIns="0" tIns="0" rIns="0" bIns="0" rtlCol="0" anchor="ctr"/>
           <a:lstStyle/>
           <a:p>
-            <a:pPr algn="ctr" indent="0" marL="0">
+            <a:pPr marL="0" indent="0" algn="ctr">
               <a:buNone/>
             </a:pPr>
             <a:r>
@@ -4652,14 +4477,14 @@
       </p:sp>
       <p:pic>
         <p:nvPicPr>
-          <p:cNvPr id="13" name="Image 1" descr="preencoded.png">    </p:cNvPr>
+          <p:cNvPr id="13" name="Image 1" descr="preencoded.png"/>
           <p:cNvPicPr>
             <a:picLocks noChangeAspect="1"/>
           </p:cNvPicPr>
           <p:nvPr/>
         </p:nvPicPr>
         <p:blipFill>
-          <a:blip r:embed="rId2"/>
+          <a:blip r:embed="rId4"/>
           <a:stretch>
             <a:fillRect/>
           </a:stretch>
@@ -4695,7 +4520,7 @@
           <a:bodyPr wrap="square" lIns="0" tIns="0" rIns="0" bIns="0" rtlCol="0" anchor="ctr"/>
           <a:lstStyle/>
           <a:p>
-            <a:pPr algn="ctr" indent="0" marL="0">
+            <a:pPr marL="0" indent="0" algn="ctr">
               <a:lnSpc>
                 <a:spcPct val="115000"/>
               </a:lnSpc>
@@ -4715,7 +4540,7 @@
             <a:endParaRPr lang="en-US" sz="1250" dirty="0"/>
           </a:p>
           <a:p>
-            <a:pPr algn="ctr" indent="0" marL="0">
+            <a:pPr marL="0" indent="0" algn="ctr">
               <a:lnSpc>
                 <a:spcPct val="115000"/>
               </a:lnSpc>
@@ -4782,7 +4607,7 @@
           <a:bodyPr wrap="square" lIns="0" tIns="0" rIns="0" bIns="0" rtlCol="0" anchor="ctr"/>
           <a:lstStyle/>
           <a:p>
-            <a:pPr algn="ctr" indent="0" marL="0">
+            <a:pPr marL="0" indent="0" algn="ctr">
               <a:buNone/>
             </a:pPr>
             <a:r>
@@ -4822,14 +4647,14 @@
       </p:sp>
       <p:pic>
         <p:nvPicPr>
-          <p:cNvPr id="18" name="Image 2" descr="preencoded.png">    </p:cNvPr>
+          <p:cNvPr id="18" name="Image 2" descr="preencoded.png"/>
           <p:cNvPicPr>
             <a:picLocks noChangeAspect="1"/>
           </p:cNvPicPr>
           <p:nvPr/>
         </p:nvPicPr>
         <p:blipFill>
-          <a:blip r:embed="rId3"/>
+          <a:blip r:embed="rId5"/>
           <a:stretch>
             <a:fillRect/>
           </a:stretch>
@@ -4865,7 +4690,7 @@
           <a:bodyPr wrap="square" lIns="0" tIns="0" rIns="0" bIns="0" rtlCol="0" anchor="ctr"/>
           <a:lstStyle/>
           <a:p>
-            <a:pPr algn="ctr" indent="0" marL="0">
+            <a:pPr marL="0" indent="0" algn="ctr">
               <a:lnSpc>
                 <a:spcPct val="115000"/>
               </a:lnSpc>
@@ -4885,7 +4710,7 @@
             <a:endParaRPr lang="en-US" sz="1250" dirty="0"/>
           </a:p>
           <a:p>
-            <a:pPr algn="ctr" indent="0" marL="0">
+            <a:pPr marL="0" indent="0" algn="ctr">
               <a:lnSpc>
                 <a:spcPct val="115000"/>
               </a:lnSpc>
@@ -4952,7 +4777,7 @@
           <a:bodyPr wrap="square" lIns="0" tIns="0" rIns="0" bIns="0" rtlCol="0" anchor="ctr"/>
           <a:lstStyle/>
           <a:p>
-            <a:pPr algn="ctr" indent="0" marL="0">
+            <a:pPr marL="0" indent="0" algn="ctr">
               <a:buNone/>
             </a:pPr>
             <a:r>
@@ -4992,14 +4817,14 @@
       </p:sp>
       <p:pic>
         <p:nvPicPr>
-          <p:cNvPr id="23" name="Image 3" descr="preencoded.png">    </p:cNvPr>
+          <p:cNvPr id="23" name="Image 3" descr="preencoded.png"/>
           <p:cNvPicPr>
             <a:picLocks noChangeAspect="1"/>
           </p:cNvPicPr>
           <p:nvPr/>
         </p:nvPicPr>
         <p:blipFill>
-          <a:blip r:embed="rId4"/>
+          <a:blip r:embed="rId6"/>
           <a:stretch>
             <a:fillRect/>
           </a:stretch>
@@ -5035,7 +4860,7 @@
           <a:bodyPr wrap="square" lIns="0" tIns="0" rIns="0" bIns="0" rtlCol="0" anchor="ctr"/>
           <a:lstStyle/>
           <a:p>
-            <a:pPr algn="ctr" indent="0" marL="0">
+            <a:pPr marL="0" indent="0" algn="ctr">
               <a:lnSpc>
                 <a:spcPct val="115000"/>
               </a:lnSpc>
@@ -5055,7 +4880,7 @@
             <a:endParaRPr lang="en-US" sz="1250" dirty="0"/>
           </a:p>
           <a:p>
-            <a:pPr algn="ctr" indent="0" marL="0">
+            <a:pPr marL="0" indent="0" algn="ctr">
               <a:lnSpc>
                 <a:spcPct val="115000"/>
               </a:lnSpc>
@@ -5122,7 +4947,7 @@
           <a:bodyPr wrap="square" lIns="0" tIns="0" rIns="0" bIns="0" rtlCol="0" anchor="ctr"/>
           <a:lstStyle/>
           <a:p>
-            <a:pPr algn="ctr" indent="0" marL="0">
+            <a:pPr marL="0" indent="0" algn="ctr">
               <a:buNone/>
             </a:pPr>
             <a:r>
@@ -5162,14 +4987,14 @@
       </p:sp>
       <p:pic>
         <p:nvPicPr>
-          <p:cNvPr id="28" name="Image 4" descr="preencoded.png">    </p:cNvPr>
+          <p:cNvPr id="28" name="Image 4" descr="preencoded.png"/>
           <p:cNvPicPr>
             <a:picLocks noChangeAspect="1"/>
           </p:cNvPicPr>
           <p:nvPr/>
         </p:nvPicPr>
         <p:blipFill>
-          <a:blip r:embed="rId5"/>
+          <a:blip r:embed="rId7"/>
           <a:stretch>
             <a:fillRect/>
           </a:stretch>
@@ -5205,7 +5030,7 @@
           <a:bodyPr wrap="square" lIns="0" tIns="0" rIns="0" bIns="0" rtlCol="0" anchor="ctr"/>
           <a:lstStyle/>
           <a:p>
-            <a:pPr algn="ctr" indent="0" marL="0">
+            <a:pPr marL="0" indent="0" algn="ctr">
               <a:lnSpc>
                 <a:spcPct val="115000"/>
               </a:lnSpc>
@@ -5225,7 +5050,7 @@
             <a:endParaRPr lang="en-US" sz="1250" dirty="0"/>
           </a:p>
           <a:p>
-            <a:pPr algn="ctr" indent="0" marL="0">
+            <a:pPr marL="0" indent="0" algn="ctr">
               <a:lnSpc>
                 <a:spcPct val="115000"/>
               </a:lnSpc>
@@ -5289,7 +5114,7 @@
           <a:bodyPr wrap="square" lIns="0" tIns="0" rIns="0" bIns="0" rtlCol="0" anchor="ctr"/>
           <a:lstStyle/>
           <a:p>
-            <a:pPr algn="ctr" indent="0" marL="0">
+            <a:pPr marL="0" indent="0" algn="ctr">
               <a:lnSpc>
                 <a:spcPct val="120000"/>
               </a:lnSpc>
@@ -5331,7 +5156,7 @@
           <a:bodyPr wrap="square" lIns="0" tIns="0" rIns="0" bIns="0" rtlCol="0" anchor="ctr"/>
           <a:lstStyle/>
           <a:p>
-            <a:pPr algn="l" indent="0" marL="0">
+            <a:pPr marL="0" indent="0" algn="l">
               <a:buNone/>
             </a:pPr>
             <a:r>
@@ -5370,7 +5195,7 @@
           <a:bodyPr wrap="square" lIns="0" tIns="0" rIns="0" bIns="0" rtlCol="0" anchor="ctr"/>
           <a:lstStyle/>
           <a:p>
-            <a:pPr algn="r" indent="0" marL="0">
+            <a:pPr marL="0" indent="0" algn="r">
               <a:buNone/>
             </a:pPr>
             <a:r>
@@ -5404,6 +5229,7 @@
         <a:solidFill>
           <a:srgbClr val="FFFFFF"/>
         </a:solidFill>
+        <a:effectLst/>
       </p:bgPr>
     </p:bg>
     <p:spTree>
@@ -5441,11 +5267,11 @@
           <a:bodyPr wrap="square" lIns="0" tIns="0" rIns="0" bIns="0" rtlCol="0" anchor="ctr"/>
           <a:lstStyle/>
           <a:p>
-            <a:pPr indent="0" marL="0">
-              <a:buNone/>
-            </a:pPr>
-            <a:r>
-              <a:rPr lang="en-US" sz="1200" b="1" spc="200" kern="0" dirty="0">
+            <a:pPr marL="0" indent="0">
+              <a:buNone/>
+            </a:pPr>
+            <a:r>
+              <a:rPr lang="en-US" sz="1200" b="1" kern="0" spc="200" dirty="0">
                 <a:solidFill>
                   <a:srgbClr val="2E6DA4"/>
                 </a:solidFill>
@@ -5480,7 +5306,7 @@
           <a:bodyPr wrap="square" lIns="0" tIns="0" rIns="0" bIns="0" rtlCol="0" anchor="ctr"/>
           <a:lstStyle/>
           <a:p>
-            <a:pPr indent="0" marL="0">
+            <a:pPr marL="0" indent="0">
               <a:buNone/>
             </a:pPr>
             <a:r>
@@ -5500,7 +5326,7 @@
       </p:sp>
       <p:graphicFrame>
         <p:nvGraphicFramePr>
-          <p:cNvPr id="4" name="Chart 0" descr=""/>
+          <p:cNvPr id="4" name="Chart 0"/>
           <p:cNvGraphicFramePr/>
           <p:nvPr/>
         </p:nvGraphicFramePr>
@@ -5508,15 +5334,15 @@
           <a:off x="640080" y="1691640"/>
           <a:ext cx="5943600" cy="2834640"/>
         </p:xfrm>
-        <a:graphic xmlns:a="http://schemas.openxmlformats.org/drawingml/2006/main">
+        <a:graphic>
           <a:graphicData uri="http://schemas.openxmlformats.org/drawingml/2006/chart">
-            <c:chart xmlns:c="http://schemas.openxmlformats.org/drawingml/2006/chart" r:id="rId1"/>
+            <c:chart xmlns:c="http://schemas.openxmlformats.org/drawingml/2006/chart" xmlns:r="http://schemas.openxmlformats.org/officeDocument/2006/relationships" r:id="rId3"/>
           </a:graphicData>
         </a:graphic>
       </p:graphicFrame>
       <p:graphicFrame>
         <p:nvGraphicFramePr>
-          <p:cNvPr id="5" name="Chart 1" descr=""/>
+          <p:cNvPr id="5" name="Chart 1"/>
           <p:cNvGraphicFramePr/>
           <p:nvPr/>
         </p:nvGraphicFramePr>
@@ -5524,9 +5350,9 @@
           <a:off x="6766560" y="1691640"/>
           <a:ext cx="4800600" cy="2834640"/>
         </p:xfrm>
-        <a:graphic xmlns:a="http://schemas.openxmlformats.org/drawingml/2006/main">
+        <a:graphic>
           <a:graphicData uri="http://schemas.openxmlformats.org/drawingml/2006/chart">
-            <c:chart xmlns:c="http://schemas.openxmlformats.org/drawingml/2006/chart" r:id="rId2"/>
+            <c:chart xmlns:c="http://schemas.openxmlformats.org/drawingml/2006/chart" xmlns:r="http://schemas.openxmlformats.org/officeDocument/2006/relationships" r:id="rId4"/>
           </a:graphicData>
         </a:graphic>
       </p:graphicFrame>
@@ -5573,7 +5399,7 @@
           <a:bodyPr wrap="square" lIns="0" tIns="0" rIns="0" bIns="0" rtlCol="0" anchor="ctr"/>
           <a:lstStyle/>
           <a:p>
-            <a:pPr algn="ctr" indent="0" marL="0">
+            <a:pPr marL="0" indent="0" algn="ctr">
               <a:buNone/>
             </a:pPr>
             <a:r>
@@ -5612,11 +5438,11 @@
           <a:bodyPr wrap="square" lIns="0" tIns="0" rIns="0" bIns="0" rtlCol="0" anchor="ctr"/>
           <a:lstStyle/>
           <a:p>
-            <a:pPr algn="ctr" indent="0" marL="0">
-              <a:buNone/>
-            </a:pPr>
-            <a:r>
-              <a:rPr lang="en-US" sz="1000" b="1" spc="100" kern="0" dirty="0">
+            <a:pPr marL="0" indent="0" algn="ctr">
+              <a:buNone/>
+            </a:pPr>
+            <a:r>
+              <a:rPr lang="en-US" sz="1000" b="1" kern="0" spc="100" dirty="0">
                 <a:solidFill>
                   <a:srgbClr val="5B9BD5"/>
                 </a:solidFill>
@@ -5673,7 +5499,7 @@
           <a:bodyPr wrap="square" lIns="0" tIns="0" rIns="0" bIns="0" rtlCol="0" anchor="ctr"/>
           <a:lstStyle/>
           <a:p>
-            <a:pPr algn="ctr" indent="0" marL="0">
+            <a:pPr marL="0" indent="0" algn="ctr">
               <a:buNone/>
             </a:pPr>
             <a:r>
@@ -5712,11 +5538,11 @@
           <a:bodyPr wrap="square" lIns="0" tIns="0" rIns="0" bIns="0" rtlCol="0" anchor="ctr"/>
           <a:lstStyle/>
           <a:p>
-            <a:pPr algn="ctr" indent="0" marL="0">
-              <a:buNone/>
-            </a:pPr>
-            <a:r>
-              <a:rPr lang="en-US" sz="1000" b="1" spc="100" kern="0" dirty="0">
+            <a:pPr marL="0" indent="0" algn="ctr">
+              <a:buNone/>
+            </a:pPr>
+            <a:r>
+              <a:rPr lang="en-US" sz="1000" b="1" kern="0" spc="100" dirty="0">
                 <a:solidFill>
                   <a:srgbClr val="5B9BD5"/>
                 </a:solidFill>
@@ -5773,7 +5599,7 @@
           <a:bodyPr wrap="square" lIns="0" tIns="0" rIns="0" bIns="0" rtlCol="0" anchor="ctr"/>
           <a:lstStyle/>
           <a:p>
-            <a:pPr algn="ctr" indent="0" marL="0">
+            <a:pPr marL="0" indent="0" algn="ctr">
               <a:buNone/>
             </a:pPr>
             <a:r>
@@ -5812,11 +5638,11 @@
           <a:bodyPr wrap="square" lIns="0" tIns="0" rIns="0" bIns="0" rtlCol="0" anchor="ctr"/>
           <a:lstStyle/>
           <a:p>
-            <a:pPr algn="ctr" indent="0" marL="0">
-              <a:buNone/>
-            </a:pPr>
-            <a:r>
-              <a:rPr lang="en-US" sz="1000" b="1" spc="100" kern="0" dirty="0">
+            <a:pPr marL="0" indent="0" algn="ctr">
+              <a:buNone/>
+            </a:pPr>
+            <a:r>
+              <a:rPr lang="en-US" sz="1000" b="1" kern="0" spc="100" dirty="0">
                 <a:solidFill>
                   <a:srgbClr val="5B9BD5"/>
                 </a:solidFill>
@@ -5873,7 +5699,7 @@
           <a:bodyPr wrap="square" lIns="0" tIns="0" rIns="0" bIns="0" rtlCol="0" anchor="ctr"/>
           <a:lstStyle/>
           <a:p>
-            <a:pPr algn="ctr" indent="0" marL="0">
+            <a:pPr marL="0" indent="0" algn="ctr">
               <a:buNone/>
             </a:pPr>
             <a:r>
@@ -5912,11 +5738,11 @@
           <a:bodyPr wrap="square" lIns="0" tIns="0" rIns="0" bIns="0" rtlCol="0" anchor="ctr"/>
           <a:lstStyle/>
           <a:p>
-            <a:pPr algn="ctr" indent="0" marL="0">
-              <a:buNone/>
-            </a:pPr>
-            <a:r>
-              <a:rPr lang="en-US" sz="1000" b="1" spc="100" kern="0" dirty="0">
+            <a:pPr marL="0" indent="0" algn="ctr">
+              <a:buNone/>
+            </a:pPr>
+            <a:r>
+              <a:rPr lang="en-US" sz="1000" b="1" kern="0" spc="100" dirty="0">
                 <a:solidFill>
                   <a:srgbClr val="5B9BD5"/>
                 </a:solidFill>
@@ -5951,7 +5777,7 @@
           <a:bodyPr wrap="square" lIns="0" tIns="0" rIns="0" bIns="0" rtlCol="0" anchor="ctr"/>
           <a:lstStyle/>
           <a:p>
-            <a:pPr algn="l" indent="0" marL="0">
+            <a:pPr marL="0" indent="0" algn="l">
               <a:buNone/>
             </a:pPr>
             <a:r>
@@ -5990,7 +5816,7 @@
           <a:bodyPr wrap="square" lIns="0" tIns="0" rIns="0" bIns="0" rtlCol="0" anchor="ctr"/>
           <a:lstStyle/>
           <a:p>
-            <a:pPr algn="r" indent="0" marL="0">
+            <a:pPr marL="0" indent="0" algn="r">
               <a:buNone/>
             </a:pPr>
             <a:r>
@@ -6024,6 +5850,7 @@
         <a:solidFill>
           <a:srgbClr val="EAF1FB"/>
         </a:solidFill>
+        <a:effectLst/>
       </p:bgPr>
     </p:bg>
     <p:spTree>
@@ -6061,11 +5888,11 @@
           <a:bodyPr wrap="square" lIns="0" tIns="0" rIns="0" bIns="0" rtlCol="0" anchor="ctr"/>
           <a:lstStyle/>
           <a:p>
-            <a:pPr indent="0" marL="0">
-              <a:buNone/>
-            </a:pPr>
-            <a:r>
-              <a:rPr lang="en-US" sz="1200" b="1" spc="200" kern="0" dirty="0">
+            <a:pPr marL="0" indent="0">
+              <a:buNone/>
+            </a:pPr>
+            <a:r>
+              <a:rPr lang="en-US" sz="1200" b="1" kern="0" spc="200" dirty="0">
                 <a:solidFill>
                   <a:srgbClr val="2E6DA4"/>
                 </a:solidFill>
@@ -6100,7 +5927,7 @@
           <a:bodyPr wrap="square" lIns="0" tIns="0" rIns="0" bIns="0" rtlCol="0" anchor="ctr"/>
           <a:lstStyle/>
           <a:p>
-            <a:pPr indent="0" marL="0">
+            <a:pPr marL="0" indent="0">
               <a:buNone/>
             </a:pPr>
             <a:r>
@@ -6139,7 +5966,7 @@
           </a:solidFill>
           <a:ln/>
           <a:effectLst>
-            <a:outerShdw sx="100000" sy="100000" kx="0" ky="0" algn="bl" rotWithShape="0" blurRad="76200" dist="25400" dir="5400000">
+            <a:outerShdw blurRad="76200" dist="25400" dir="5400000" algn="bl" rotWithShape="0">
               <a:srgbClr val="9DB8D4">
                 <a:alpha val="25000"/>
               </a:srgbClr>
@@ -6169,315 +5996,7 @@
       </p:sp>
       <p:pic>
         <p:nvPicPr>
-          <p:cNvPr id="6" name="Image 0" descr="preencoded.png">    </p:cNvPr>
-          <p:cNvPicPr>
-            <a:picLocks noChangeAspect="1"/>
-          </p:cNvPicPr>
-          <p:nvPr/>
-        </p:nvPicPr>
-        <p:blipFill>
-          <a:blip r:embed="rId1"/>
-          <a:stretch>
-            <a:fillRect/>
-          </a:stretch>
-        </p:blipFill>
-        <p:spPr>
-          <a:xfrm>
-            <a:off x="1128370" y="2568550"/>
-            <a:ext cx="395021" cy="395021"/>
-          </a:xfrm>
-          <a:prstGeom prst="rect">
-            <a:avLst/>
-          </a:prstGeom>
-        </p:spPr>
-      </p:pic>
-      <p:sp>
-        <p:nvSpPr>
-          <p:cNvPr id="7" name="Text 4"/>
-          <p:cNvSpPr/>
-          <p:nvPr/>
-        </p:nvSpPr>
-        <p:spPr>
-          <a:xfrm>
-            <a:off x="1920240" y="2039112"/>
-            <a:ext cx="3520440" cy="365760"/>
-          </a:xfrm>
-          <a:prstGeom prst="rect">
-            <a:avLst/>
-          </a:prstGeom>
-          <a:noFill/>
-          <a:ln/>
-        </p:spPr>
-        <p:txBody>
-          <a:bodyPr wrap="square" lIns="0" tIns="0" rIns="0" bIns="0" rtlCol="0" anchor="ctr"/>
-          <a:lstStyle/>
-          <a:p>
-            <a:pPr indent="0" marL="0">
-              <a:buNone/>
-            </a:pPr>
-            <a:r>
-              <a:rPr lang="en-US" sz="1600" b="1" dirty="0">
-                <a:solidFill>
-                  <a:srgbClr val="12395C"/>
-                </a:solidFill>
-                <a:latin typeface="Cambria" pitchFamily="34" charset="0"/>
-                <a:ea typeface="Cambria" pitchFamily="34" charset="-122"/>
-                <a:cs typeface="Cambria" pitchFamily="34" charset="-120"/>
-              </a:rPr>
-              <a:t>Identify Weak Areas</a:t>
-            </a:r>
-            <a:endParaRPr lang="en-US" sz="1600" dirty="0"/>
-          </a:p>
-        </p:txBody>
-      </p:sp>
-      <p:sp>
-        <p:nvSpPr>
-          <p:cNvPr id="8" name="Text 5"/>
-          <p:cNvSpPr/>
-          <p:nvPr/>
-        </p:nvSpPr>
-        <p:spPr>
-          <a:xfrm>
-            <a:off x="1920240" y="2441448"/>
-            <a:ext cx="3520440" cy="1097280"/>
-          </a:xfrm>
-          <a:prstGeom prst="rect">
-            <a:avLst/>
-          </a:prstGeom>
-          <a:noFill/>
-          <a:ln/>
-        </p:spPr>
-        <p:txBody>
-          <a:bodyPr wrap="square" lIns="0" tIns="0" rIns="0" bIns="0" rtlCol="0" anchor="ctr"/>
-          <a:lstStyle/>
-          <a:p>
-            <a:pPr indent="0" marL="0">
-              <a:lnSpc>
-                <a:spcPct val="120000"/>
-              </a:lnSpc>
-              <a:buNone/>
-            </a:pPr>
-            <a:r>
-              <a:rPr lang="en-US" sz="1250" dirty="0">
-                <a:solidFill>
-                  <a:srgbClr val="5A6B7B"/>
-                </a:solidFill>
-                <a:latin typeface="Calibri" pitchFamily="34" charset="0"/>
-                <a:ea typeface="Calibri" pitchFamily="34" charset="-122"/>
-                <a:cs typeface="Calibri" pitchFamily="34" charset="-120"/>
-              </a:rPr>
-              <a:t>Pinpoints exactly where each student needs more focused practice.</a:t>
-            </a:r>
-            <a:endParaRPr lang="en-US" sz="1250" dirty="0"/>
-          </a:p>
-        </p:txBody>
-      </p:sp>
-      <p:sp>
-        <p:nvSpPr>
-          <p:cNvPr id="9" name="Shape 6"/>
-          <p:cNvSpPr/>
-          <p:nvPr/>
-        </p:nvSpPr>
-        <p:spPr>
-          <a:xfrm>
-            <a:off x="6172200" y="1783080"/>
-            <a:ext cx="5074920" cy="1965960"/>
-          </a:xfrm>
-          <a:prstGeom prst="roundRect">
-            <a:avLst>
-              <a:gd name="adj" fmla="val 4651"/>
-            </a:avLst>
-          </a:prstGeom>
-          <a:solidFill>
-            <a:srgbClr val="FFFFFF"/>
-          </a:solidFill>
-          <a:ln/>
-          <a:effectLst>
-            <a:outerShdw sx="100000" sy="100000" kx="0" ky="0" algn="bl" rotWithShape="0" blurRad="76200" dist="25400" dir="5400000">
-              <a:srgbClr val="9DB8D4">
-                <a:alpha val="25000"/>
-              </a:srgbClr>
-            </a:outerShdw>
-          </a:effectLst>
-        </p:spPr>
-      </p:sp>
-      <p:sp>
-        <p:nvSpPr>
-          <p:cNvPr id="10" name="Shape 7"/>
-          <p:cNvSpPr/>
-          <p:nvPr/>
-        </p:nvSpPr>
-        <p:spPr>
-          <a:xfrm>
-            <a:off x="6446520" y="2354580"/>
-            <a:ext cx="822960" cy="822960"/>
-          </a:xfrm>
-          <a:prstGeom prst="ellipse">
-            <a:avLst/>
-          </a:prstGeom>
-          <a:solidFill>
-            <a:srgbClr val="2E6DA4"/>
-          </a:solidFill>
-          <a:ln/>
-        </p:spPr>
-      </p:sp>
-      <p:pic>
-        <p:nvPicPr>
-          <p:cNvPr id="11" name="Image 1" descr="preencoded.png">    </p:cNvPr>
-          <p:cNvPicPr>
-            <a:picLocks noChangeAspect="1"/>
-          </p:cNvPicPr>
-          <p:nvPr/>
-        </p:nvPicPr>
-        <p:blipFill>
-          <a:blip r:embed="rId2"/>
-          <a:stretch>
-            <a:fillRect/>
-          </a:stretch>
-        </p:blipFill>
-        <p:spPr>
-          <a:xfrm>
-            <a:off x="6660490" y="2568550"/>
-            <a:ext cx="395021" cy="395021"/>
-          </a:xfrm>
-          <a:prstGeom prst="rect">
-            <a:avLst/>
-          </a:prstGeom>
-        </p:spPr>
-      </p:pic>
-      <p:sp>
-        <p:nvSpPr>
-          <p:cNvPr id="12" name="Text 8"/>
-          <p:cNvSpPr/>
-          <p:nvPr/>
-        </p:nvSpPr>
-        <p:spPr>
-          <a:xfrm>
-            <a:off x="7452360" y="2039112"/>
-            <a:ext cx="3520440" cy="365760"/>
-          </a:xfrm>
-          <a:prstGeom prst="rect">
-            <a:avLst/>
-          </a:prstGeom>
-          <a:noFill/>
-          <a:ln/>
-        </p:spPr>
-        <p:txBody>
-          <a:bodyPr wrap="square" lIns="0" tIns="0" rIns="0" bIns="0" rtlCol="0" anchor="ctr"/>
-          <a:lstStyle/>
-          <a:p>
-            <a:pPr indent="0" marL="0">
-              <a:buNone/>
-            </a:pPr>
-            <a:r>
-              <a:rPr lang="en-US" sz="1600" b="1" dirty="0">
-                <a:solidFill>
-                  <a:srgbClr val="12395C"/>
-                </a:solidFill>
-                <a:latin typeface="Cambria" pitchFamily="34" charset="0"/>
-                <a:ea typeface="Cambria" pitchFamily="34" charset="-122"/>
-                <a:cs typeface="Cambria" pitchFamily="34" charset="-120"/>
-              </a:rPr>
-              <a:t>Sharper Preparation</a:t>
-            </a:r>
-            <a:endParaRPr lang="en-US" sz="1600" dirty="0"/>
-          </a:p>
-        </p:txBody>
-      </p:sp>
-      <p:sp>
-        <p:nvSpPr>
-          <p:cNvPr id="13" name="Text 9"/>
-          <p:cNvSpPr/>
-          <p:nvPr/>
-        </p:nvSpPr>
-        <p:spPr>
-          <a:xfrm>
-            <a:off x="7452360" y="2441448"/>
-            <a:ext cx="3520440" cy="1097280"/>
-          </a:xfrm>
-          <a:prstGeom prst="rect">
-            <a:avLst/>
-          </a:prstGeom>
-          <a:noFill/>
-          <a:ln/>
-        </p:spPr>
-        <p:txBody>
-          <a:bodyPr wrap="square" lIns="0" tIns="0" rIns="0" bIns="0" rtlCol="0" anchor="ctr"/>
-          <a:lstStyle/>
-          <a:p>
-            <a:pPr indent="0" marL="0">
-              <a:lnSpc>
-                <a:spcPct val="120000"/>
-              </a:lnSpc>
-              <a:buNone/>
-            </a:pPr>
-            <a:r>
-              <a:rPr lang="en-US" sz="1250" dirty="0">
-                <a:solidFill>
-                  <a:srgbClr val="5A6B7B"/>
-                </a:solidFill>
-                <a:latin typeface="Calibri" pitchFamily="34" charset="0"/>
-                <a:ea typeface="Calibri" pitchFamily="34" charset="-122"/>
-                <a:cs typeface="Calibri" pitchFamily="34" charset="-120"/>
-              </a:rPr>
-              <a:t>Turns raw scores into a clear, actionable preparation strategy.</a:t>
-            </a:r>
-            <a:endParaRPr lang="en-US" sz="1250" dirty="0"/>
-          </a:p>
-        </p:txBody>
-      </p:sp>
-      <p:sp>
-        <p:nvSpPr>
-          <p:cNvPr id="14" name="Shape 10"/>
-          <p:cNvSpPr/>
-          <p:nvPr/>
-        </p:nvSpPr>
-        <p:spPr>
-          <a:xfrm>
-            <a:off x="640080" y="4069080"/>
-            <a:ext cx="5074920" cy="1965960"/>
-          </a:xfrm>
-          <a:prstGeom prst="roundRect">
-            <a:avLst>
-              <a:gd name="adj" fmla="val 4651"/>
-            </a:avLst>
-          </a:prstGeom>
-          <a:solidFill>
-            <a:srgbClr val="FFFFFF"/>
-          </a:solidFill>
-          <a:ln/>
-          <a:effectLst>
-            <a:outerShdw sx="100000" sy="100000" kx="0" ky="0" algn="bl" rotWithShape="0" blurRad="76200" dist="25400" dir="5400000">
-              <a:srgbClr val="9DB8D4">
-                <a:alpha val="25000"/>
-              </a:srgbClr>
-            </a:outerShdw>
-          </a:effectLst>
-        </p:spPr>
-      </p:sp>
-      <p:sp>
-        <p:nvSpPr>
-          <p:cNvPr id="15" name="Shape 11"/>
-          <p:cNvSpPr/>
-          <p:nvPr/>
-        </p:nvSpPr>
-        <p:spPr>
-          <a:xfrm>
-            <a:off x="914400" y="4640580"/>
-            <a:ext cx="822960" cy="822960"/>
-          </a:xfrm>
-          <a:prstGeom prst="ellipse">
-            <a:avLst/>
-          </a:prstGeom>
-          <a:solidFill>
-            <a:srgbClr val="2E6DA4"/>
-          </a:solidFill>
-          <a:ln/>
-        </p:spPr>
-      </p:sp>
-      <p:pic>
-        <p:nvPicPr>
-          <p:cNvPr id="16" name="Image 2" descr="preencoded.png">    </p:cNvPr>
+          <p:cNvPr id="6" name="Image 0" descr="preencoded.png"/>
           <p:cNvPicPr>
             <a:picLocks noChangeAspect="1"/>
           </p:cNvPicPr>
@@ -6491,7 +6010,7 @@
         </p:blipFill>
         <p:spPr>
           <a:xfrm>
-            <a:off x="1128370" y="4854550"/>
+            <a:off x="1128370" y="2568550"/>
             <a:ext cx="395021" cy="395021"/>
           </a:xfrm>
           <a:prstGeom prst="rect">
@@ -6501,13 +6020,13 @@
       </p:pic>
       <p:sp>
         <p:nvSpPr>
-          <p:cNvPr id="17" name="Text 12"/>
-          <p:cNvSpPr/>
-          <p:nvPr/>
-        </p:nvSpPr>
-        <p:spPr>
-          <a:xfrm>
-            <a:off x="1920240" y="4325112"/>
+          <p:cNvPr id="7" name="Text 4"/>
+          <p:cNvSpPr/>
+          <p:nvPr/>
+        </p:nvSpPr>
+        <p:spPr>
+          <a:xfrm>
+            <a:off x="1920240" y="2039112"/>
             <a:ext cx="3520440" cy="365760"/>
           </a:xfrm>
           <a:prstGeom prst="rect">
@@ -6520,7 +6039,7 @@
           <a:bodyPr wrap="square" lIns="0" tIns="0" rIns="0" bIns="0" rtlCol="0" anchor="ctr"/>
           <a:lstStyle/>
           <a:p>
-            <a:pPr indent="0" marL="0">
+            <a:pPr marL="0" indent="0">
               <a:buNone/>
             </a:pPr>
             <a:r>
@@ -6532,7 +6051,7 @@
                 <a:ea typeface="Cambria" pitchFamily="34" charset="-122"/>
                 <a:cs typeface="Cambria" pitchFamily="34" charset="-120"/>
               </a:rPr>
-              <a:t>Supports Trainers</a:t>
+              <a:t>Identify Weak Areas</a:t>
             </a:r>
             <a:endParaRPr lang="en-US" sz="1600" dirty="0"/>
           </a:p>
@@ -6540,13 +6059,13 @@
       </p:sp>
       <p:sp>
         <p:nvSpPr>
-          <p:cNvPr id="18" name="Text 13"/>
-          <p:cNvSpPr/>
-          <p:nvPr/>
-        </p:nvSpPr>
-        <p:spPr>
-          <a:xfrm>
-            <a:off x="1920240" y="4727448"/>
+          <p:cNvPr id="8" name="Text 5"/>
+          <p:cNvSpPr/>
+          <p:nvPr/>
+        </p:nvSpPr>
+        <p:spPr>
+          <a:xfrm>
+            <a:off x="1920240" y="2441448"/>
             <a:ext cx="3520440" cy="1097280"/>
           </a:xfrm>
           <a:prstGeom prst="rect">
@@ -6559,7 +6078,7 @@
           <a:bodyPr wrap="square" lIns="0" tIns="0" rIns="0" bIns="0" rtlCol="0" anchor="ctr"/>
           <a:lstStyle/>
           <a:p>
-            <a:pPr indent="0" marL="0">
+            <a:pPr marL="0" indent="0">
               <a:lnSpc>
                 <a:spcPct val="120000"/>
               </a:lnSpc>
@@ -6574,7 +6093,7 @@
                 <a:ea typeface="Calibri" pitchFamily="34" charset="-122"/>
                 <a:cs typeface="Calibri" pitchFamily="34" charset="-120"/>
               </a:rPr>
-              <a:t>Gives trainers an at-a-glance view to guide every student better.</a:t>
+              <a:t>Pinpoints exactly where each student needs more focused practice.</a:t>
             </a:r>
             <a:endParaRPr lang="en-US" sz="1250" dirty="0"/>
           </a:p>
@@ -6582,13 +6101,13 @@
       </p:sp>
       <p:sp>
         <p:nvSpPr>
-          <p:cNvPr id="19" name="Shape 14"/>
-          <p:cNvSpPr/>
-          <p:nvPr/>
-        </p:nvSpPr>
-        <p:spPr>
-          <a:xfrm>
-            <a:off x="6172200" y="4069080"/>
+          <p:cNvPr id="9" name="Shape 6"/>
+          <p:cNvSpPr/>
+          <p:nvPr/>
+        </p:nvSpPr>
+        <p:spPr>
+          <a:xfrm>
+            <a:off x="6172200" y="1783080"/>
             <a:ext cx="5074920" cy="1965960"/>
           </a:xfrm>
           <a:prstGeom prst="roundRect">
@@ -6601,7 +6120,7 @@
           </a:solidFill>
           <a:ln/>
           <a:effectLst>
-            <a:outerShdw sx="100000" sy="100000" kx="0" ky="0" algn="bl" rotWithShape="0" blurRad="76200" dist="25400" dir="5400000">
+            <a:outerShdw blurRad="76200" dist="25400" dir="5400000" algn="bl" rotWithShape="0">
               <a:srgbClr val="9DB8D4">
                 <a:alpha val="25000"/>
               </a:srgbClr>
@@ -6611,13 +6130,13 @@
       </p:sp>
       <p:sp>
         <p:nvSpPr>
-          <p:cNvPr id="20" name="Shape 15"/>
-          <p:cNvSpPr/>
-          <p:nvPr/>
-        </p:nvSpPr>
-        <p:spPr>
-          <a:xfrm>
-            <a:off x="6446520" y="4640580"/>
+          <p:cNvPr id="10" name="Shape 7"/>
+          <p:cNvSpPr/>
+          <p:nvPr/>
+        </p:nvSpPr>
+        <p:spPr>
+          <a:xfrm>
+            <a:off x="6446520" y="2354580"/>
             <a:ext cx="822960" cy="822960"/>
           </a:xfrm>
           <a:prstGeom prst="ellipse">
@@ -6631,7 +6150,7 @@
       </p:sp>
       <p:pic>
         <p:nvPicPr>
-          <p:cNvPr id="21" name="Image 3" descr="preencoded.png">    </p:cNvPr>
+          <p:cNvPr id="11" name="Image 1" descr="preencoded.png"/>
           <p:cNvPicPr>
             <a:picLocks noChangeAspect="1"/>
           </p:cNvPicPr>
@@ -6645,7 +6164,7 @@
         </p:blipFill>
         <p:spPr>
           <a:xfrm>
-            <a:off x="6660490" y="4854550"/>
+            <a:off x="6660490" y="2568550"/>
             <a:ext cx="395021" cy="395021"/>
           </a:xfrm>
           <a:prstGeom prst="rect">
@@ -6655,13 +6174,13 @@
       </p:pic>
       <p:sp>
         <p:nvSpPr>
-          <p:cNvPr id="22" name="Text 16"/>
-          <p:cNvSpPr/>
-          <p:nvPr/>
-        </p:nvSpPr>
-        <p:spPr>
-          <a:xfrm>
-            <a:off x="7452360" y="4325112"/>
+          <p:cNvPr id="12" name="Text 8"/>
+          <p:cNvSpPr/>
+          <p:nvPr/>
+        </p:nvSpPr>
+        <p:spPr>
+          <a:xfrm>
+            <a:off x="7452360" y="2039112"/>
             <a:ext cx="3520440" cy="365760"/>
           </a:xfrm>
           <a:prstGeom prst="rect">
@@ -6674,7 +6193,7 @@
           <a:bodyPr wrap="square" lIns="0" tIns="0" rIns="0" bIns="0" rtlCol="0" anchor="ctr"/>
           <a:lstStyle/>
           <a:p>
-            <a:pPr indent="0" marL="0">
+            <a:pPr marL="0" indent="0">
               <a:buNone/>
             </a:pPr>
             <a:r>
@@ -6686,7 +6205,7 @@
                 <a:ea typeface="Cambria" pitchFamily="34" charset="-122"/>
                 <a:cs typeface="Cambria" pitchFamily="34" charset="-120"/>
               </a:rPr>
-              <a:t>Higher Success Rate</a:t>
+              <a:t>Sharper Preparation</a:t>
             </a:r>
             <a:endParaRPr lang="en-US" sz="1600" dirty="0"/>
           </a:p>
@@ -6694,13 +6213,13 @@
       </p:sp>
       <p:sp>
         <p:nvSpPr>
-          <p:cNvPr id="23" name="Text 17"/>
-          <p:cNvSpPr/>
-          <p:nvPr/>
-        </p:nvSpPr>
-        <p:spPr>
-          <a:xfrm>
-            <a:off x="7452360" y="4727448"/>
+          <p:cNvPr id="13" name="Text 9"/>
+          <p:cNvSpPr/>
+          <p:nvPr/>
+        </p:nvSpPr>
+        <p:spPr>
+          <a:xfrm>
+            <a:off x="7452360" y="2441448"/>
             <a:ext cx="3520440" cy="1097280"/>
           </a:xfrm>
           <a:prstGeom prst="rect">
@@ -6713,7 +6232,7 @@
           <a:bodyPr wrap="square" lIns="0" tIns="0" rIns="0" bIns="0" rtlCol="0" anchor="ctr"/>
           <a:lstStyle/>
           <a:p>
-            <a:pPr indent="0" marL="0">
+            <a:pPr marL="0" indent="0">
               <a:lnSpc>
                 <a:spcPct val="120000"/>
               </a:lnSpc>
@@ -6728,7 +6247,7 @@
                 <a:ea typeface="Calibri" pitchFamily="34" charset="-122"/>
                 <a:cs typeface="Calibri" pitchFamily="34" charset="-120"/>
               </a:rPr>
-              <a:t>Consistent tracking translates into stronger placement outcomes.</a:t>
+              <a:t>Turns raw scores into a clear, actionable preparation strategy.</a:t>
             </a:r>
             <a:endParaRPr lang="en-US" sz="1250" dirty="0"/>
           </a:p>
@@ -6736,14 +6255,87 @@
       </p:sp>
       <p:sp>
         <p:nvSpPr>
-          <p:cNvPr id="24" name="Text 18"/>
-          <p:cNvSpPr/>
-          <p:nvPr/>
-        </p:nvSpPr>
-        <p:spPr>
-          <a:xfrm>
-            <a:off x="457200" y="6473952"/>
-            <a:ext cx="6400800" cy="274320"/>
+          <p:cNvPr id="14" name="Shape 10"/>
+          <p:cNvSpPr/>
+          <p:nvPr/>
+        </p:nvSpPr>
+        <p:spPr>
+          <a:xfrm>
+            <a:off x="640080" y="4069080"/>
+            <a:ext cx="5074920" cy="1965960"/>
+          </a:xfrm>
+          <a:prstGeom prst="roundRect">
+            <a:avLst>
+              <a:gd name="adj" fmla="val 4651"/>
+            </a:avLst>
+          </a:prstGeom>
+          <a:solidFill>
+            <a:srgbClr val="FFFFFF"/>
+          </a:solidFill>
+          <a:ln/>
+          <a:effectLst>
+            <a:outerShdw blurRad="76200" dist="25400" dir="5400000" algn="bl" rotWithShape="0">
+              <a:srgbClr val="9DB8D4">
+                <a:alpha val="25000"/>
+              </a:srgbClr>
+            </a:outerShdw>
+          </a:effectLst>
+        </p:spPr>
+      </p:sp>
+      <p:sp>
+        <p:nvSpPr>
+          <p:cNvPr id="15" name="Shape 11"/>
+          <p:cNvSpPr/>
+          <p:nvPr/>
+        </p:nvSpPr>
+        <p:spPr>
+          <a:xfrm>
+            <a:off x="914400" y="4640580"/>
+            <a:ext cx="822960" cy="822960"/>
+          </a:xfrm>
+          <a:prstGeom prst="ellipse">
+            <a:avLst/>
+          </a:prstGeom>
+          <a:solidFill>
+            <a:srgbClr val="2E6DA4"/>
+          </a:solidFill>
+          <a:ln/>
+        </p:spPr>
+      </p:sp>
+      <p:pic>
+        <p:nvPicPr>
+          <p:cNvPr id="16" name="Image 2" descr="preencoded.png"/>
+          <p:cNvPicPr>
+            <a:picLocks noChangeAspect="1"/>
+          </p:cNvPicPr>
+          <p:nvPr/>
+        </p:nvPicPr>
+        <p:blipFill>
+          <a:blip r:embed="rId5"/>
+          <a:stretch>
+            <a:fillRect/>
+          </a:stretch>
+        </p:blipFill>
+        <p:spPr>
+          <a:xfrm>
+            <a:off x="1128370" y="4854550"/>
+            <a:ext cx="395021" cy="395021"/>
+          </a:xfrm>
+          <a:prstGeom prst="rect">
+            <a:avLst/>
+          </a:prstGeom>
+        </p:spPr>
+      </p:pic>
+      <p:sp>
+        <p:nvSpPr>
+          <p:cNvPr id="17" name="Text 12"/>
+          <p:cNvSpPr/>
+          <p:nvPr/>
+        </p:nvSpPr>
+        <p:spPr>
+          <a:xfrm>
+            <a:off x="1920240" y="4325112"/>
+            <a:ext cx="3520440" cy="365760"/>
           </a:xfrm>
           <a:prstGeom prst="rect">
             <a:avLst/>
@@ -6755,11 +6347,53 @@
           <a:bodyPr wrap="square" lIns="0" tIns="0" rIns="0" bIns="0" rtlCol="0" anchor="ctr"/>
           <a:lstStyle/>
           <a:p>
-            <a:pPr algn="l" indent="0" marL="0">
-              <a:buNone/>
-            </a:pPr>
-            <a:r>
-              <a:rPr lang="en-US" sz="900" dirty="0">
+            <a:pPr marL="0" indent="0">
+              <a:buNone/>
+            </a:pPr>
+            <a:r>
+              <a:rPr lang="en-US" sz="1600" b="1" dirty="0">
+                <a:solidFill>
+                  <a:srgbClr val="12395C"/>
+                </a:solidFill>
+                <a:latin typeface="Cambria" pitchFamily="34" charset="0"/>
+                <a:ea typeface="Cambria" pitchFamily="34" charset="-122"/>
+                <a:cs typeface="Cambria" pitchFamily="34" charset="-120"/>
+              </a:rPr>
+              <a:t>Supports Trainers</a:t>
+            </a:r>
+            <a:endParaRPr lang="en-US" sz="1600" dirty="0"/>
+          </a:p>
+        </p:txBody>
+      </p:sp>
+      <p:sp>
+        <p:nvSpPr>
+          <p:cNvPr id="18" name="Text 13"/>
+          <p:cNvSpPr/>
+          <p:nvPr/>
+        </p:nvSpPr>
+        <p:spPr>
+          <a:xfrm>
+            <a:off x="1920240" y="4727448"/>
+            <a:ext cx="3520440" cy="1097280"/>
+          </a:xfrm>
+          <a:prstGeom prst="rect">
+            <a:avLst/>
+          </a:prstGeom>
+          <a:noFill/>
+          <a:ln/>
+        </p:spPr>
+        <p:txBody>
+          <a:bodyPr wrap="square" lIns="0" tIns="0" rIns="0" bIns="0" rtlCol="0" anchor="ctr"/>
+          <a:lstStyle/>
+          <a:p>
+            <a:pPr marL="0" indent="0">
+              <a:lnSpc>
+                <a:spcPct val="120000"/>
+              </a:lnSpc>
+              <a:buNone/>
+            </a:pPr>
+            <a:r>
+              <a:rPr lang="en-US" sz="1250" dirty="0">
                 <a:solidFill>
                   <a:srgbClr val="5A6B7B"/>
                 </a:solidFill>
@@ -6767,6 +6401,199 @@
                 <a:ea typeface="Calibri" pitchFamily="34" charset="-122"/>
                 <a:cs typeface="Calibri" pitchFamily="34" charset="-120"/>
               </a:rPr>
+              <a:t>Gives trainers an at-a-glance view to guide every student better.</a:t>
+            </a:r>
+            <a:endParaRPr lang="en-US" sz="1250" dirty="0"/>
+          </a:p>
+        </p:txBody>
+      </p:sp>
+      <p:sp>
+        <p:nvSpPr>
+          <p:cNvPr id="19" name="Shape 14"/>
+          <p:cNvSpPr/>
+          <p:nvPr/>
+        </p:nvSpPr>
+        <p:spPr>
+          <a:xfrm>
+            <a:off x="6172200" y="4069080"/>
+            <a:ext cx="5074920" cy="1965960"/>
+          </a:xfrm>
+          <a:prstGeom prst="roundRect">
+            <a:avLst>
+              <a:gd name="adj" fmla="val 4651"/>
+            </a:avLst>
+          </a:prstGeom>
+          <a:solidFill>
+            <a:srgbClr val="FFFFFF"/>
+          </a:solidFill>
+          <a:ln/>
+          <a:effectLst>
+            <a:outerShdw blurRad="76200" dist="25400" dir="5400000" algn="bl" rotWithShape="0">
+              <a:srgbClr val="9DB8D4">
+                <a:alpha val="25000"/>
+              </a:srgbClr>
+            </a:outerShdw>
+          </a:effectLst>
+        </p:spPr>
+      </p:sp>
+      <p:sp>
+        <p:nvSpPr>
+          <p:cNvPr id="20" name="Shape 15"/>
+          <p:cNvSpPr/>
+          <p:nvPr/>
+        </p:nvSpPr>
+        <p:spPr>
+          <a:xfrm>
+            <a:off x="6446520" y="4640580"/>
+            <a:ext cx="822960" cy="822960"/>
+          </a:xfrm>
+          <a:prstGeom prst="ellipse">
+            <a:avLst/>
+          </a:prstGeom>
+          <a:solidFill>
+            <a:srgbClr val="2E6DA4"/>
+          </a:solidFill>
+          <a:ln/>
+        </p:spPr>
+      </p:sp>
+      <p:pic>
+        <p:nvPicPr>
+          <p:cNvPr id="21" name="Image 3" descr="preencoded.png"/>
+          <p:cNvPicPr>
+            <a:picLocks noChangeAspect="1"/>
+          </p:cNvPicPr>
+          <p:nvPr/>
+        </p:nvPicPr>
+        <p:blipFill>
+          <a:blip r:embed="rId6"/>
+          <a:stretch>
+            <a:fillRect/>
+          </a:stretch>
+        </p:blipFill>
+        <p:spPr>
+          <a:xfrm>
+            <a:off x="6660490" y="4854550"/>
+            <a:ext cx="395021" cy="395021"/>
+          </a:xfrm>
+          <a:prstGeom prst="rect">
+            <a:avLst/>
+          </a:prstGeom>
+        </p:spPr>
+      </p:pic>
+      <p:sp>
+        <p:nvSpPr>
+          <p:cNvPr id="22" name="Text 16"/>
+          <p:cNvSpPr/>
+          <p:nvPr/>
+        </p:nvSpPr>
+        <p:spPr>
+          <a:xfrm>
+            <a:off x="7452360" y="4325112"/>
+            <a:ext cx="3520440" cy="365760"/>
+          </a:xfrm>
+          <a:prstGeom prst="rect">
+            <a:avLst/>
+          </a:prstGeom>
+          <a:noFill/>
+          <a:ln/>
+        </p:spPr>
+        <p:txBody>
+          <a:bodyPr wrap="square" lIns="0" tIns="0" rIns="0" bIns="0" rtlCol="0" anchor="ctr"/>
+          <a:lstStyle/>
+          <a:p>
+            <a:pPr marL="0" indent="0">
+              <a:buNone/>
+            </a:pPr>
+            <a:r>
+              <a:rPr lang="en-US" sz="1600" b="1" dirty="0">
+                <a:solidFill>
+                  <a:srgbClr val="12395C"/>
+                </a:solidFill>
+                <a:latin typeface="Cambria" pitchFamily="34" charset="0"/>
+                <a:ea typeface="Cambria" pitchFamily="34" charset="-122"/>
+                <a:cs typeface="Cambria" pitchFamily="34" charset="-120"/>
+              </a:rPr>
+              <a:t>Higher Success Rate</a:t>
+            </a:r>
+            <a:endParaRPr lang="en-US" sz="1600" dirty="0"/>
+          </a:p>
+        </p:txBody>
+      </p:sp>
+      <p:sp>
+        <p:nvSpPr>
+          <p:cNvPr id="23" name="Text 17"/>
+          <p:cNvSpPr/>
+          <p:nvPr/>
+        </p:nvSpPr>
+        <p:spPr>
+          <a:xfrm>
+            <a:off x="7452360" y="4727448"/>
+            <a:ext cx="3520440" cy="1097280"/>
+          </a:xfrm>
+          <a:prstGeom prst="rect">
+            <a:avLst/>
+          </a:prstGeom>
+          <a:noFill/>
+          <a:ln/>
+        </p:spPr>
+        <p:txBody>
+          <a:bodyPr wrap="square" lIns="0" tIns="0" rIns="0" bIns="0" rtlCol="0" anchor="ctr"/>
+          <a:lstStyle/>
+          <a:p>
+            <a:pPr marL="0" indent="0">
+              <a:lnSpc>
+                <a:spcPct val="120000"/>
+              </a:lnSpc>
+              <a:buNone/>
+            </a:pPr>
+            <a:r>
+              <a:rPr lang="en-US" sz="1250" dirty="0">
+                <a:solidFill>
+                  <a:srgbClr val="5A6B7B"/>
+                </a:solidFill>
+                <a:latin typeface="Calibri" pitchFamily="34" charset="0"/>
+                <a:ea typeface="Calibri" pitchFamily="34" charset="-122"/>
+                <a:cs typeface="Calibri" pitchFamily="34" charset="-120"/>
+              </a:rPr>
+              <a:t>Consistent tracking translates into stronger placement outcomes.</a:t>
+            </a:r>
+            <a:endParaRPr lang="en-US" sz="1250" dirty="0"/>
+          </a:p>
+        </p:txBody>
+      </p:sp>
+      <p:sp>
+        <p:nvSpPr>
+          <p:cNvPr id="24" name="Text 18"/>
+          <p:cNvSpPr/>
+          <p:nvPr/>
+        </p:nvSpPr>
+        <p:spPr>
+          <a:xfrm>
+            <a:off x="457200" y="6473952"/>
+            <a:ext cx="6400800" cy="274320"/>
+          </a:xfrm>
+          <a:prstGeom prst="rect">
+            <a:avLst/>
+          </a:prstGeom>
+          <a:noFill/>
+          <a:ln/>
+        </p:spPr>
+        <p:txBody>
+          <a:bodyPr wrap="square" lIns="0" tIns="0" rIns="0" bIns="0" rtlCol="0" anchor="ctr"/>
+          <a:lstStyle/>
+          <a:p>
+            <a:pPr marL="0" indent="0" algn="l">
+              <a:buNone/>
+            </a:pPr>
+            <a:r>
+              <a:rPr lang="en-US" sz="900" dirty="0">
+                <a:solidFill>
+                  <a:srgbClr val="5A6B7B"/>
+                </a:solidFill>
+                <a:latin typeface="Calibri" pitchFamily="34" charset="0"/>
+                <a:ea typeface="Calibri" pitchFamily="34" charset="-122"/>
+                <a:cs typeface="Calibri" pitchFamily="34" charset="-120"/>
+              </a:rPr>
               <a:t>Placement Training Progress Tracker</a:t>
             </a:r>
             <a:endParaRPr lang="en-US" sz="900" dirty="0"/>
@@ -6794,7 +6621,7 @@
           <a:bodyPr wrap="square" lIns="0" tIns="0" rIns="0" bIns="0" rtlCol="0" anchor="ctr"/>
           <a:lstStyle/>
           <a:p>
-            <a:pPr algn="r" indent="0" marL="0">
+            <a:pPr marL="0" indent="0" algn="r">
               <a:buNone/>
             </a:pPr>
             <a:r>
@@ -6828,6 +6655,7 @@
         <a:solidFill>
           <a:srgbClr val="FFFFFF"/>
         </a:solidFill>
+        <a:effectLst/>
       </p:bgPr>
     </p:bg>
     <p:spTree>
@@ -6865,11 +6693,11 @@
           <a:bodyPr wrap="square" lIns="0" tIns="0" rIns="0" bIns="0" rtlCol="0" anchor="ctr"/>
           <a:lstStyle/>
           <a:p>
-            <a:pPr indent="0" marL="0">
-              <a:buNone/>
-            </a:pPr>
-            <a:r>
-              <a:rPr lang="en-US" sz="1200" b="1" spc="200" kern="0" dirty="0">
+            <a:pPr marL="0" indent="0">
+              <a:buNone/>
+            </a:pPr>
+            <a:r>
+              <a:rPr lang="en-US" sz="1200" b="1" kern="0" spc="200" dirty="0">
                 <a:solidFill>
                   <a:srgbClr val="2E6DA4"/>
                 </a:solidFill>
@@ -6904,7 +6732,7 @@
           <a:bodyPr wrap="square" lIns="0" tIns="0" rIns="0" bIns="0" rtlCol="0" anchor="ctr"/>
           <a:lstStyle/>
           <a:p>
-            <a:pPr indent="0" marL="0">
+            <a:pPr marL="0" indent="0">
               <a:buNone/>
             </a:pPr>
             <a:r>
@@ -6966,178 +6794,7 @@
       </p:sp>
       <p:pic>
         <p:nvPicPr>
-          <p:cNvPr id="6" name="Image 0" descr="preencoded.png">    </p:cNvPr>
-          <p:cNvPicPr>
-            <a:picLocks noChangeAspect="1"/>
-          </p:cNvPicPr>
-          <p:nvPr/>
-        </p:nvPicPr>
-        <p:blipFill>
-          <a:blip r:embed="rId1"/>
-          <a:stretch>
-            <a:fillRect/>
-          </a:stretch>
-        </p:blipFill>
-        <p:spPr>
-          <a:xfrm>
-            <a:off x="1644091" y="2535631"/>
-            <a:ext cx="460858" cy="460858"/>
-          </a:xfrm>
-          <a:prstGeom prst="rect">
-            <a:avLst/>
-          </a:prstGeom>
-        </p:spPr>
-      </p:pic>
-      <p:sp>
-        <p:nvSpPr>
-          <p:cNvPr id="7" name="Text 4"/>
-          <p:cNvSpPr/>
-          <p:nvPr/>
-        </p:nvSpPr>
-        <p:spPr>
-          <a:xfrm>
-            <a:off x="777240" y="3429000"/>
-            <a:ext cx="2194560" cy="548640"/>
-          </a:xfrm>
-          <a:prstGeom prst="rect">
-            <a:avLst/>
-          </a:prstGeom>
-          <a:noFill/>
-          <a:ln/>
-        </p:spPr>
-        <p:txBody>
-          <a:bodyPr wrap="square" lIns="0" tIns="0" rIns="0" bIns="0" rtlCol="0" anchor="ctr"/>
-          <a:lstStyle/>
-          <a:p>
-            <a:pPr algn="ctr" indent="0" marL="0">
-              <a:buNone/>
-            </a:pPr>
-            <a:r>
-              <a:rPr lang="en-US" sz="1500" b="1" dirty="0">
-                <a:solidFill>
-                  <a:srgbClr val="12395C"/>
-                </a:solidFill>
-                <a:latin typeface="Cambria" pitchFamily="34" charset="0"/>
-                <a:ea typeface="Cambria" pitchFamily="34" charset="-122"/>
-                <a:cs typeface="Cambria" pitchFamily="34" charset="-120"/>
-              </a:rPr>
-              <a:t>Online Dashboard</a:t>
-            </a:r>
-            <a:endParaRPr lang="en-US" sz="1500" dirty="0"/>
-          </a:p>
-        </p:txBody>
-      </p:sp>
-      <p:sp>
-        <p:nvSpPr>
-          <p:cNvPr id="8" name="Text 5"/>
-          <p:cNvSpPr/>
-          <p:nvPr/>
-        </p:nvSpPr>
-        <p:spPr>
-          <a:xfrm>
-            <a:off x="822960" y="4023360"/>
-            <a:ext cx="2103120" cy="1371600"/>
-          </a:xfrm>
-          <a:prstGeom prst="rect">
-            <a:avLst/>
-          </a:prstGeom>
-          <a:noFill/>
-          <a:ln/>
-        </p:spPr>
-        <p:txBody>
-          <a:bodyPr wrap="square" lIns="0" tIns="0" rIns="0" bIns="0" rtlCol="0" anchor="ctr"/>
-          <a:lstStyle/>
-          <a:p>
-            <a:pPr algn="ctr" indent="0" marL="0">
-              <a:lnSpc>
-                <a:spcPct val="120000"/>
-              </a:lnSpc>
-              <a:buNone/>
-            </a:pPr>
-            <a:r>
-              <a:rPr lang="en-US" sz="1150" dirty="0">
-                <a:solidFill>
-                  <a:srgbClr val="5A6B7B"/>
-                </a:solidFill>
-                <a:latin typeface="Calibri" pitchFamily="34" charset="0"/>
-                <a:ea typeface="Calibri" pitchFamily="34" charset="-122"/>
-                <a:cs typeface="Calibri" pitchFamily="34" charset="-120"/>
-              </a:rPr>
-              <a:t>A live web dashboard for real-time progress visibility.</a:t>
-            </a:r>
-            <a:endParaRPr lang="en-US" sz="1150" dirty="0"/>
-          </a:p>
-        </p:txBody>
-      </p:sp>
-      <p:pic>
-        <p:nvPicPr>
-          <p:cNvPr id="9" name="Image 1" descr="preencoded.png">    </p:cNvPr>
-          <p:cNvPicPr>
-            <a:picLocks noChangeAspect="1"/>
-          </p:cNvPicPr>
-          <p:nvPr/>
-        </p:nvPicPr>
-        <p:blipFill>
-          <a:blip r:embed="rId2"/>
-          <a:stretch>
-            <a:fillRect/>
-          </a:stretch>
-        </p:blipFill>
-        <p:spPr>
-          <a:xfrm>
-            <a:off x="3153613" y="3520440"/>
-            <a:ext cx="256032" cy="256032"/>
-          </a:xfrm>
-          <a:prstGeom prst="rect">
-            <a:avLst/>
-          </a:prstGeom>
-        </p:spPr>
-      </p:pic>
-      <p:sp>
-        <p:nvSpPr>
-          <p:cNvPr id="10" name="Shape 6"/>
-          <p:cNvSpPr/>
-          <p:nvPr/>
-        </p:nvSpPr>
-        <p:spPr>
-          <a:xfrm>
-            <a:off x="3454298" y="1965960"/>
-            <a:ext cx="2468880" cy="3566160"/>
-          </a:xfrm>
-          <a:prstGeom prst="roundRect">
-            <a:avLst>
-              <a:gd name="adj" fmla="val 4444"/>
-            </a:avLst>
-          </a:prstGeom>
-          <a:solidFill>
-            <a:srgbClr val="EAF1FB"/>
-          </a:solidFill>
-          <a:ln/>
-        </p:spPr>
-      </p:sp>
-      <p:sp>
-        <p:nvSpPr>
-          <p:cNvPr id="11" name="Shape 7"/>
-          <p:cNvSpPr/>
-          <p:nvPr/>
-        </p:nvSpPr>
-        <p:spPr>
-          <a:xfrm>
-            <a:off x="4208678" y="2286000"/>
-            <a:ext cx="960120" cy="960120"/>
-          </a:xfrm>
-          <a:prstGeom prst="ellipse">
-            <a:avLst/>
-          </a:prstGeom>
-          <a:solidFill>
-            <a:srgbClr val="12395C"/>
-          </a:solidFill>
-          <a:ln/>
-        </p:spPr>
-      </p:sp>
-      <p:pic>
-        <p:nvPicPr>
-          <p:cNvPr id="12" name="Image 2" descr="preencoded.png">    </p:cNvPr>
+          <p:cNvPr id="6" name="Image 0" descr="preencoded.png"/>
           <p:cNvPicPr>
             <a:picLocks noChangeAspect="1"/>
           </p:cNvPicPr>
@@ -7151,7 +6808,7 @@
         </p:blipFill>
         <p:spPr>
           <a:xfrm>
-            <a:off x="4458310" y="2535631"/>
+            <a:off x="1644091" y="2535631"/>
             <a:ext cx="460858" cy="460858"/>
           </a:xfrm>
           <a:prstGeom prst="rect">
@@ -7161,13 +6818,13 @@
       </p:pic>
       <p:sp>
         <p:nvSpPr>
-          <p:cNvPr id="13" name="Text 8"/>
-          <p:cNvSpPr/>
-          <p:nvPr/>
-        </p:nvSpPr>
-        <p:spPr>
-          <a:xfrm>
-            <a:off x="3591458" y="3429000"/>
+          <p:cNvPr id="7" name="Text 4"/>
+          <p:cNvSpPr/>
+          <p:nvPr/>
+        </p:nvSpPr>
+        <p:spPr>
+          <a:xfrm>
+            <a:off x="777240" y="3429000"/>
             <a:ext cx="2194560" cy="548640"/>
           </a:xfrm>
           <a:prstGeom prst="rect">
@@ -7180,7 +6837,7 @@
           <a:bodyPr wrap="square" lIns="0" tIns="0" rIns="0" bIns="0" rtlCol="0" anchor="ctr"/>
           <a:lstStyle/>
           <a:p>
-            <a:pPr algn="ctr" indent="0" marL="0">
+            <a:pPr marL="0" indent="0" algn="ctr">
               <a:buNone/>
             </a:pPr>
             <a:r>
@@ -7192,7 +6849,7 @@
                 <a:ea typeface="Cambria" pitchFamily="34" charset="-122"/>
                 <a:cs typeface="Cambria" pitchFamily="34" charset="-120"/>
               </a:rPr>
-              <a:t>Mobile App</a:t>
+              <a:t>Online Dashboard</a:t>
             </a:r>
             <a:endParaRPr lang="en-US" sz="1500" dirty="0"/>
           </a:p>
@@ -7200,13 +6857,13 @@
       </p:sp>
       <p:sp>
         <p:nvSpPr>
-          <p:cNvPr id="14" name="Text 9"/>
-          <p:cNvSpPr/>
-          <p:nvPr/>
-        </p:nvSpPr>
-        <p:spPr>
-          <a:xfrm>
-            <a:off x="3637178" y="4023360"/>
+          <p:cNvPr id="8" name="Text 5"/>
+          <p:cNvSpPr/>
+          <p:nvPr/>
+        </p:nvSpPr>
+        <p:spPr>
+          <a:xfrm>
+            <a:off x="822960" y="4023360"/>
             <a:ext cx="2103120" cy="1371600"/>
           </a:xfrm>
           <a:prstGeom prst="rect">
@@ -7219,7 +6876,7 @@
           <a:bodyPr wrap="square" lIns="0" tIns="0" rIns="0" bIns="0" rtlCol="0" anchor="ctr"/>
           <a:lstStyle/>
           <a:p>
-            <a:pPr algn="ctr" indent="0" marL="0">
+            <a:pPr marL="0" indent="0" algn="ctr">
               <a:lnSpc>
                 <a:spcPct val="120000"/>
               </a:lnSpc>
@@ -7234,7 +6891,7 @@
                 <a:ea typeface="Calibri" pitchFamily="34" charset="-122"/>
                 <a:cs typeface="Calibri" pitchFamily="34" charset="-120"/>
               </a:rPr>
-              <a:t>On-the-go access for students and trainers alike.</a:t>
+              <a:t>A live web dashboard for real-time progress visibility.</a:t>
             </a:r>
             <a:endParaRPr lang="en-US" sz="1150" dirty="0"/>
           </a:p>
@@ -7242,7 +6899,7 @@
       </p:sp>
       <p:pic>
         <p:nvPicPr>
-          <p:cNvPr id="15" name="Image 3" descr="preencoded.png">    </p:cNvPr>
+          <p:cNvPr id="9" name="Image 1" descr="preencoded.png"/>
           <p:cNvPicPr>
             <a:picLocks noChangeAspect="1"/>
           </p:cNvPicPr>
@@ -7256,7 +6913,7 @@
         </p:blipFill>
         <p:spPr>
           <a:xfrm>
-            <a:off x="5967832" y="3520440"/>
+            <a:off x="3153613" y="3520440"/>
             <a:ext cx="256032" cy="256032"/>
           </a:xfrm>
           <a:prstGeom prst="rect">
@@ -7266,13 +6923,13 @@
       </p:pic>
       <p:sp>
         <p:nvSpPr>
-          <p:cNvPr id="16" name="Shape 10"/>
-          <p:cNvSpPr/>
-          <p:nvPr/>
-        </p:nvSpPr>
-        <p:spPr>
-          <a:xfrm>
-            <a:off x="6268517" y="1965960"/>
+          <p:cNvPr id="10" name="Shape 6"/>
+          <p:cNvSpPr/>
+          <p:nvPr/>
+        </p:nvSpPr>
+        <p:spPr>
+          <a:xfrm>
+            <a:off x="3454298" y="1965960"/>
             <a:ext cx="2468880" cy="3566160"/>
           </a:xfrm>
           <a:prstGeom prst="roundRect">
@@ -7288,13 +6945,13 @@
       </p:sp>
       <p:sp>
         <p:nvSpPr>
-          <p:cNvPr id="17" name="Shape 11"/>
-          <p:cNvSpPr/>
-          <p:nvPr/>
-        </p:nvSpPr>
-        <p:spPr>
-          <a:xfrm>
-            <a:off x="7022897" y="2286000"/>
+          <p:cNvPr id="11" name="Shape 7"/>
+          <p:cNvSpPr/>
+          <p:nvPr/>
+        </p:nvSpPr>
+        <p:spPr>
+          <a:xfrm>
+            <a:off x="4208678" y="2286000"/>
             <a:ext cx="960120" cy="960120"/>
           </a:xfrm>
           <a:prstGeom prst="ellipse">
@@ -7308,7 +6965,7 @@
       </p:sp>
       <p:pic>
         <p:nvPicPr>
-          <p:cNvPr id="18" name="Image 4" descr="preencoded.png">    </p:cNvPr>
+          <p:cNvPr id="12" name="Image 2" descr="preencoded.png"/>
           <p:cNvPicPr>
             <a:picLocks noChangeAspect="1"/>
           </p:cNvPicPr>
@@ -7322,7 +6979,7 @@
         </p:blipFill>
         <p:spPr>
           <a:xfrm>
-            <a:off x="7272528" y="2535631"/>
+            <a:off x="4458310" y="2535631"/>
             <a:ext cx="460858" cy="460858"/>
           </a:xfrm>
           <a:prstGeom prst="rect">
@@ -7332,13 +6989,13 @@
       </p:pic>
       <p:sp>
         <p:nvSpPr>
-          <p:cNvPr id="19" name="Text 12"/>
-          <p:cNvSpPr/>
-          <p:nvPr/>
-        </p:nvSpPr>
-        <p:spPr>
-          <a:xfrm>
-            <a:off x="6405677" y="3429000"/>
+          <p:cNvPr id="13" name="Text 8"/>
+          <p:cNvSpPr/>
+          <p:nvPr/>
+        </p:nvSpPr>
+        <p:spPr>
+          <a:xfrm>
+            <a:off x="3591458" y="3429000"/>
             <a:ext cx="2194560" cy="548640"/>
           </a:xfrm>
           <a:prstGeom prst="rect">
@@ -7351,7 +7008,7 @@
           <a:bodyPr wrap="square" lIns="0" tIns="0" rIns="0" bIns="0" rtlCol="0" anchor="ctr"/>
           <a:lstStyle/>
           <a:p>
-            <a:pPr algn="ctr" indent="0" marL="0">
+            <a:pPr marL="0" indent="0" algn="ctr">
               <a:buNone/>
             </a:pPr>
             <a:r>
@@ -7363,7 +7020,7 @@
                 <a:ea typeface="Cambria" pitchFamily="34" charset="-122"/>
                 <a:cs typeface="Cambria" pitchFamily="34" charset="-120"/>
               </a:rPr>
-              <a:t>AI Prediction</a:t>
+              <a:t>Mobile App</a:t>
             </a:r>
             <a:endParaRPr lang="en-US" sz="1500" dirty="0"/>
           </a:p>
@@ -7371,13 +7028,13 @@
       </p:sp>
       <p:sp>
         <p:nvSpPr>
-          <p:cNvPr id="20" name="Text 13"/>
-          <p:cNvSpPr/>
-          <p:nvPr/>
-        </p:nvSpPr>
-        <p:spPr>
-          <a:xfrm>
-            <a:off x="6451397" y="4023360"/>
+          <p:cNvPr id="14" name="Text 9"/>
+          <p:cNvSpPr/>
+          <p:nvPr/>
+        </p:nvSpPr>
+        <p:spPr>
+          <a:xfrm>
+            <a:off x="3637178" y="4023360"/>
             <a:ext cx="2103120" cy="1371600"/>
           </a:xfrm>
           <a:prstGeom prst="rect">
@@ -7390,7 +7047,7 @@
           <a:bodyPr wrap="square" lIns="0" tIns="0" rIns="0" bIns="0" rtlCol="0" anchor="ctr"/>
           <a:lstStyle/>
           <a:p>
-            <a:pPr algn="ctr" indent="0" marL="0">
+            <a:pPr marL="0" indent="0" algn="ctr">
               <a:lnSpc>
                 <a:spcPct val="120000"/>
               </a:lnSpc>
@@ -7405,7 +7062,7 @@
                 <a:ea typeface="Calibri" pitchFamily="34" charset="-122"/>
                 <a:cs typeface="Calibri" pitchFamily="34" charset="-120"/>
               </a:rPr>
-              <a:t>AI-based models to predict placement outcomes early.</a:t>
+              <a:t>On-the-go access for students and trainers alike.</a:t>
             </a:r>
             <a:endParaRPr lang="en-US" sz="1150" dirty="0"/>
           </a:p>
@@ -7413,7 +7070,73 @@
       </p:sp>
       <p:pic>
         <p:nvPicPr>
-          <p:cNvPr id="21" name="Image 5" descr="preencoded.png">    </p:cNvPr>
+          <p:cNvPr id="15" name="Image 3" descr="preencoded.png"/>
+          <p:cNvPicPr>
+            <a:picLocks noChangeAspect="1"/>
+          </p:cNvPicPr>
+          <p:nvPr/>
+        </p:nvPicPr>
+        <p:blipFill>
+          <a:blip r:embed="rId4"/>
+          <a:stretch>
+            <a:fillRect/>
+          </a:stretch>
+        </p:blipFill>
+        <p:spPr>
+          <a:xfrm>
+            <a:off x="5967832" y="3520440"/>
+            <a:ext cx="256032" cy="256032"/>
+          </a:xfrm>
+          <a:prstGeom prst="rect">
+            <a:avLst/>
+          </a:prstGeom>
+        </p:spPr>
+      </p:pic>
+      <p:sp>
+        <p:nvSpPr>
+          <p:cNvPr id="16" name="Shape 10"/>
+          <p:cNvSpPr/>
+          <p:nvPr/>
+        </p:nvSpPr>
+        <p:spPr>
+          <a:xfrm>
+            <a:off x="6268517" y="1965960"/>
+            <a:ext cx="2468880" cy="3566160"/>
+          </a:xfrm>
+          <a:prstGeom prst="roundRect">
+            <a:avLst>
+              <a:gd name="adj" fmla="val 4444"/>
+            </a:avLst>
+          </a:prstGeom>
+          <a:solidFill>
+            <a:srgbClr val="EAF1FB"/>
+          </a:solidFill>
+          <a:ln/>
+        </p:spPr>
+      </p:sp>
+      <p:sp>
+        <p:nvSpPr>
+          <p:cNvPr id="17" name="Shape 11"/>
+          <p:cNvSpPr/>
+          <p:nvPr/>
+        </p:nvSpPr>
+        <p:spPr>
+          <a:xfrm>
+            <a:off x="7022897" y="2286000"/>
+            <a:ext cx="960120" cy="960120"/>
+          </a:xfrm>
+          <a:prstGeom prst="ellipse">
+            <a:avLst/>
+          </a:prstGeom>
+          <a:solidFill>
+            <a:srgbClr val="12395C"/>
+          </a:solidFill>
+          <a:ln/>
+        </p:spPr>
+      </p:sp>
+      <p:pic>
+        <p:nvPicPr>
+          <p:cNvPr id="18" name="Image 4" descr="preencoded.png"/>
           <p:cNvPicPr>
             <a:picLocks noChangeAspect="1"/>
           </p:cNvPicPr>
@@ -7427,6 +7150,111 @@
         </p:blipFill>
         <p:spPr>
           <a:xfrm>
+            <a:off x="7272528" y="2535631"/>
+            <a:ext cx="460858" cy="460858"/>
+          </a:xfrm>
+          <a:prstGeom prst="rect">
+            <a:avLst/>
+          </a:prstGeom>
+        </p:spPr>
+      </p:pic>
+      <p:sp>
+        <p:nvSpPr>
+          <p:cNvPr id="19" name="Text 12"/>
+          <p:cNvSpPr/>
+          <p:nvPr/>
+        </p:nvSpPr>
+        <p:spPr>
+          <a:xfrm>
+            <a:off x="6405677" y="3429000"/>
+            <a:ext cx="2194560" cy="548640"/>
+          </a:xfrm>
+          <a:prstGeom prst="rect">
+            <a:avLst/>
+          </a:prstGeom>
+          <a:noFill/>
+          <a:ln/>
+        </p:spPr>
+        <p:txBody>
+          <a:bodyPr wrap="square" lIns="0" tIns="0" rIns="0" bIns="0" rtlCol="0" anchor="ctr"/>
+          <a:lstStyle/>
+          <a:p>
+            <a:pPr marL="0" indent="0" algn="ctr">
+              <a:buNone/>
+            </a:pPr>
+            <a:r>
+              <a:rPr lang="en-US" sz="1500" b="1" dirty="0">
+                <a:solidFill>
+                  <a:srgbClr val="12395C"/>
+                </a:solidFill>
+                <a:latin typeface="Cambria" pitchFamily="34" charset="0"/>
+                <a:ea typeface="Cambria" pitchFamily="34" charset="-122"/>
+                <a:cs typeface="Cambria" pitchFamily="34" charset="-120"/>
+              </a:rPr>
+              <a:t>AI Prediction</a:t>
+            </a:r>
+            <a:endParaRPr lang="en-US" sz="1500" dirty="0"/>
+          </a:p>
+        </p:txBody>
+      </p:sp>
+      <p:sp>
+        <p:nvSpPr>
+          <p:cNvPr id="20" name="Text 13"/>
+          <p:cNvSpPr/>
+          <p:nvPr/>
+        </p:nvSpPr>
+        <p:spPr>
+          <a:xfrm>
+            <a:off x="6451397" y="4023360"/>
+            <a:ext cx="2103120" cy="1371600"/>
+          </a:xfrm>
+          <a:prstGeom prst="rect">
+            <a:avLst/>
+          </a:prstGeom>
+          <a:noFill/>
+          <a:ln/>
+        </p:spPr>
+        <p:txBody>
+          <a:bodyPr wrap="square" lIns="0" tIns="0" rIns="0" bIns="0" rtlCol="0" anchor="ctr"/>
+          <a:lstStyle/>
+          <a:p>
+            <a:pPr marL="0" indent="0" algn="ctr">
+              <a:lnSpc>
+                <a:spcPct val="120000"/>
+              </a:lnSpc>
+              <a:buNone/>
+            </a:pPr>
+            <a:r>
+              <a:rPr lang="en-US" sz="1150" dirty="0">
+                <a:solidFill>
+                  <a:srgbClr val="5A6B7B"/>
+                </a:solidFill>
+                <a:latin typeface="Calibri" pitchFamily="34" charset="0"/>
+                <a:ea typeface="Calibri" pitchFamily="34" charset="-122"/>
+                <a:cs typeface="Calibri" pitchFamily="34" charset="-120"/>
+              </a:rPr>
+              <a:t>AI-based models to predict placement outcomes early.</a:t>
+            </a:r>
+            <a:endParaRPr lang="en-US" sz="1150" dirty="0"/>
+          </a:p>
+        </p:txBody>
+      </p:sp>
+      <p:pic>
+        <p:nvPicPr>
+          <p:cNvPr id="21" name="Image 5" descr="preencoded.png"/>
+          <p:cNvPicPr>
+            <a:picLocks noChangeAspect="1"/>
+          </p:cNvPicPr>
+          <p:nvPr/>
+        </p:nvPicPr>
+        <p:blipFill>
+          <a:blip r:embed="rId4"/>
+          <a:stretch>
+            <a:fillRect/>
+          </a:stretch>
+        </p:blipFill>
+        <p:spPr>
+          <a:xfrm>
             <a:off x="8782050" y="3520440"/>
             <a:ext cx="256032" cy="256032"/>
           </a:xfrm>
@@ -7479,7 +7307,7 @@
       </p:sp>
       <p:pic>
         <p:nvPicPr>
-          <p:cNvPr id="24" name="Image 6" descr="preencoded.png">    </p:cNvPr>
+          <p:cNvPr id="24" name="Image 6" descr="preencoded.png"/>
           <p:cNvPicPr>
             <a:picLocks noChangeAspect="1"/>
           </p:cNvPicPr>
@@ -7522,7 +7350,7 @@
           <a:bodyPr wrap="square" lIns="0" tIns="0" rIns="0" bIns="0" rtlCol="0" anchor="ctr"/>
           <a:lstStyle/>
           <a:p>
-            <a:pPr algn="ctr" indent="0" marL="0">
+            <a:pPr marL="0" indent="0" algn="ctr">
               <a:buNone/>
             </a:pPr>
             <a:r>
@@ -7561,7 +7389,7 @@
           <a:bodyPr wrap="square" lIns="0" tIns="0" rIns="0" bIns="0" rtlCol="0" anchor="ctr"/>
           <a:lstStyle/>
           <a:p>
-            <a:pPr algn="ctr" indent="0" marL="0">
+            <a:pPr marL="0" indent="0" algn="ctr">
               <a:lnSpc>
                 <a:spcPct val="120000"/>
               </a:lnSpc>
@@ -7603,7 +7431,7 @@
           <a:bodyPr wrap="square" lIns="0" tIns="0" rIns="0" bIns="0" rtlCol="0" anchor="ctr"/>
           <a:lstStyle/>
           <a:p>
-            <a:pPr algn="l" indent="0" marL="0">
+            <a:pPr marL="0" indent="0" algn="l">
               <a:buNone/>
             </a:pPr>
             <a:r>
@@ -7642,7 +7470,7 @@
           <a:bodyPr wrap="square" lIns="0" tIns="0" rIns="0" bIns="0" rtlCol="0" anchor="ctr"/>
           <a:lstStyle/>
           <a:p>
-            <a:pPr algn="r" indent="0" marL="0">
+            <a:pPr marL="0" indent="0" algn="r">
               <a:buNone/>
             </a:pPr>
             <a:r>
@@ -7676,6 +7504,7 @@
         <a:solidFill>
           <a:srgbClr val="12395C"/>
         </a:solidFill>
+        <a:effectLst/>
       </p:bgPr>
     </p:bg>
     <p:spTree>
@@ -7757,11 +7586,11 @@
           <a:bodyPr wrap="square" lIns="0" tIns="0" rIns="0" bIns="0" rtlCol="0" anchor="ctr"/>
           <a:lstStyle/>
           <a:p>
-            <a:pPr indent="0" marL="0">
-              <a:buNone/>
-            </a:pPr>
-            <a:r>
-              <a:rPr lang="en-US" sz="1300" b="1" spc="300" kern="0" dirty="0">
+            <a:pPr marL="0" indent="0">
+              <a:buNone/>
+            </a:pPr>
+            <a:r>
+              <a:rPr lang="en-US" sz="1300" b="1" kern="0" spc="300" dirty="0">
                 <a:solidFill>
                   <a:srgbClr val="5B9BD5"/>
                 </a:solidFill>
@@ -7796,7 +7625,7 @@
           <a:bodyPr wrap="square" lIns="0" tIns="0" rIns="0" bIns="0" rtlCol="0" anchor="ctr"/>
           <a:lstStyle/>
           <a:p>
-            <a:pPr indent="0" marL="0">
+            <a:pPr marL="0" indent="0">
               <a:buNone/>
             </a:pPr>
             <a:r>
@@ -7836,179 +7665,7 @@
       </p:sp>
       <p:pic>
         <p:nvPicPr>
-          <p:cNvPr id="7" name="Image 0" descr="preencoded.png">    </p:cNvPr>
-          <p:cNvPicPr>
-            <a:picLocks noChangeAspect="1"/>
-          </p:cNvPicPr>
-          <p:nvPr/>
-        </p:nvPicPr>
-        <p:blipFill>
-          <a:blip r:embed="rId1"/>
-          <a:stretch>
-            <a:fillRect/>
-          </a:stretch>
-        </p:blipFill>
-        <p:spPr>
-          <a:xfrm>
-            <a:off x="886054" y="2120494"/>
-            <a:ext cx="285293" cy="285293"/>
-          </a:xfrm>
-          <a:prstGeom prst="rect">
-            <a:avLst/>
-          </a:prstGeom>
-        </p:spPr>
-      </p:pic>
-      <p:sp>
-        <p:nvSpPr>
-          <p:cNvPr id="8" name="Text 5"/>
-          <p:cNvSpPr/>
-          <p:nvPr/>
-        </p:nvSpPr>
-        <p:spPr>
-          <a:xfrm>
-            <a:off x="1554480" y="1947672"/>
-            <a:ext cx="8961120" cy="685800"/>
-          </a:xfrm>
-          <a:prstGeom prst="rect">
-            <a:avLst/>
-          </a:prstGeom>
-          <a:noFill/>
-          <a:ln/>
-        </p:spPr>
-        <p:txBody>
-          <a:bodyPr wrap="square" lIns="0" tIns="0" rIns="0" bIns="0" rtlCol="0" anchor="ctr"/>
-          <a:lstStyle/>
-          <a:p>
-            <a:pPr indent="0" marL="0">
-              <a:lnSpc>
-                <a:spcPct val="115000"/>
-              </a:lnSpc>
-              <a:buNone/>
-            </a:pPr>
-            <a:r>
-              <a:rPr lang="en-US" sz="1400" dirty="0">
-                <a:solidFill>
-                  <a:srgbClr val="DCE7F5"/>
-                </a:solidFill>
-                <a:latin typeface="Calibri" pitchFamily="34" charset="0"/>
-                <a:ea typeface="Calibri" pitchFamily="34" charset="-122"/>
-                <a:cs typeface="Calibri" pitchFamily="34" charset="-120"/>
-              </a:rPr>
-              <a:t>Brings attendance, aptitude, technical, and communication data into one clear view.</a:t>
-            </a:r>
-            <a:endParaRPr lang="en-US" sz="1400" dirty="0"/>
-          </a:p>
-        </p:txBody>
-      </p:sp>
-      <p:sp>
-        <p:nvSpPr>
-          <p:cNvPr id="9" name="Shape 6"/>
-          <p:cNvSpPr/>
-          <p:nvPr/>
-        </p:nvSpPr>
-        <p:spPr>
-          <a:xfrm>
-            <a:off x="731520" y="2834640"/>
-            <a:ext cx="594360" cy="594360"/>
-          </a:xfrm>
-          <a:prstGeom prst="ellipse">
-            <a:avLst/>
-          </a:prstGeom>
-          <a:solidFill>
-            <a:srgbClr val="2E6DA4"/>
-          </a:solidFill>
-          <a:ln/>
-        </p:spPr>
-      </p:sp>
-      <p:pic>
-        <p:nvPicPr>
-          <p:cNvPr id="10" name="Image 1" descr="preencoded.png">    </p:cNvPr>
-          <p:cNvPicPr>
-            <a:picLocks noChangeAspect="1"/>
-          </p:cNvPicPr>
-          <p:nvPr/>
-        </p:nvPicPr>
-        <p:blipFill>
-          <a:blip r:embed="rId2"/>
-          <a:stretch>
-            <a:fillRect/>
-          </a:stretch>
-        </p:blipFill>
-        <p:spPr>
-          <a:xfrm>
-            <a:off x="886054" y="2989174"/>
-            <a:ext cx="285293" cy="285293"/>
-          </a:xfrm>
-          <a:prstGeom prst="rect">
-            <a:avLst/>
-          </a:prstGeom>
-        </p:spPr>
-      </p:pic>
-      <p:sp>
-        <p:nvSpPr>
-          <p:cNvPr id="11" name="Text 7"/>
-          <p:cNvSpPr/>
-          <p:nvPr/>
-        </p:nvSpPr>
-        <p:spPr>
-          <a:xfrm>
-            <a:off x="1554480" y="2816352"/>
-            <a:ext cx="8961120" cy="685800"/>
-          </a:xfrm>
-          <a:prstGeom prst="rect">
-            <a:avLst/>
-          </a:prstGeom>
-          <a:noFill/>
-          <a:ln/>
-        </p:spPr>
-        <p:txBody>
-          <a:bodyPr wrap="square" lIns="0" tIns="0" rIns="0" bIns="0" rtlCol="0" anchor="ctr"/>
-          <a:lstStyle/>
-          <a:p>
-            <a:pPr indent="0" marL="0">
-              <a:lnSpc>
-                <a:spcPct val="115000"/>
-              </a:lnSpc>
-              <a:buNone/>
-            </a:pPr>
-            <a:r>
-              <a:rPr lang="en-US" sz="1400" dirty="0">
-                <a:solidFill>
-                  <a:srgbClr val="DCE7F5"/>
-                </a:solidFill>
-                <a:latin typeface="Calibri" pitchFamily="34" charset="0"/>
-                <a:ea typeface="Calibri" pitchFamily="34" charset="-122"/>
-                <a:cs typeface="Calibri" pitchFamily="34" charset="-120"/>
-              </a:rPr>
-              <a:t>Continuous monitoring keeps every student’s preparation on track, not just before placements.</a:t>
-            </a:r>
-            <a:endParaRPr lang="en-US" sz="1400" dirty="0"/>
-          </a:p>
-        </p:txBody>
-      </p:sp>
-      <p:sp>
-        <p:nvSpPr>
-          <p:cNvPr id="12" name="Shape 8"/>
-          <p:cNvSpPr/>
-          <p:nvPr/>
-        </p:nvSpPr>
-        <p:spPr>
-          <a:xfrm>
-            <a:off x="731520" y="3703320"/>
-            <a:ext cx="594360" cy="594360"/>
-          </a:xfrm>
-          <a:prstGeom prst="ellipse">
-            <a:avLst/>
-          </a:prstGeom>
-          <a:solidFill>
-            <a:srgbClr val="2E6DA4"/>
-          </a:solidFill>
-          <a:ln/>
-        </p:spPr>
-      </p:sp>
-      <p:pic>
-        <p:nvPicPr>
-          <p:cNvPr id="13" name="Image 2" descr="preencoded.png">    </p:cNvPr>
+          <p:cNvPr id="7" name="Image 0" descr="preencoded.png"/>
           <p:cNvPicPr>
             <a:picLocks noChangeAspect="1"/>
           </p:cNvPicPr>
@@ -8022,6 +7679,178 @@
         </p:blipFill>
         <p:spPr>
           <a:xfrm>
+            <a:off x="886054" y="2120494"/>
+            <a:ext cx="285293" cy="285293"/>
+          </a:xfrm>
+          <a:prstGeom prst="rect">
+            <a:avLst/>
+          </a:prstGeom>
+        </p:spPr>
+      </p:pic>
+      <p:sp>
+        <p:nvSpPr>
+          <p:cNvPr id="8" name="Text 5"/>
+          <p:cNvSpPr/>
+          <p:nvPr/>
+        </p:nvSpPr>
+        <p:spPr>
+          <a:xfrm>
+            <a:off x="1554480" y="1947672"/>
+            <a:ext cx="8961120" cy="685800"/>
+          </a:xfrm>
+          <a:prstGeom prst="rect">
+            <a:avLst/>
+          </a:prstGeom>
+          <a:noFill/>
+          <a:ln/>
+        </p:spPr>
+        <p:txBody>
+          <a:bodyPr wrap="square" lIns="0" tIns="0" rIns="0" bIns="0" rtlCol="0" anchor="ctr"/>
+          <a:lstStyle/>
+          <a:p>
+            <a:pPr marL="0" indent="0">
+              <a:lnSpc>
+                <a:spcPct val="115000"/>
+              </a:lnSpc>
+              <a:buNone/>
+            </a:pPr>
+            <a:r>
+              <a:rPr lang="en-US" sz="1400" dirty="0">
+                <a:solidFill>
+                  <a:srgbClr val="DCE7F5"/>
+                </a:solidFill>
+                <a:latin typeface="Calibri" pitchFamily="34" charset="0"/>
+                <a:ea typeface="Calibri" pitchFamily="34" charset="-122"/>
+                <a:cs typeface="Calibri" pitchFamily="34" charset="-120"/>
+              </a:rPr>
+              <a:t>Brings attendance, aptitude, technical, and communication data into one clear view.</a:t>
+            </a:r>
+            <a:endParaRPr lang="en-US" sz="1400" dirty="0"/>
+          </a:p>
+        </p:txBody>
+      </p:sp>
+      <p:sp>
+        <p:nvSpPr>
+          <p:cNvPr id="9" name="Shape 6"/>
+          <p:cNvSpPr/>
+          <p:nvPr/>
+        </p:nvSpPr>
+        <p:spPr>
+          <a:xfrm>
+            <a:off x="731520" y="2834640"/>
+            <a:ext cx="594360" cy="594360"/>
+          </a:xfrm>
+          <a:prstGeom prst="ellipse">
+            <a:avLst/>
+          </a:prstGeom>
+          <a:solidFill>
+            <a:srgbClr val="2E6DA4"/>
+          </a:solidFill>
+          <a:ln/>
+        </p:spPr>
+      </p:sp>
+      <p:pic>
+        <p:nvPicPr>
+          <p:cNvPr id="10" name="Image 1" descr="preencoded.png"/>
+          <p:cNvPicPr>
+            <a:picLocks noChangeAspect="1"/>
+          </p:cNvPicPr>
+          <p:nvPr/>
+        </p:nvPicPr>
+        <p:blipFill>
+          <a:blip r:embed="rId4"/>
+          <a:stretch>
+            <a:fillRect/>
+          </a:stretch>
+        </p:blipFill>
+        <p:spPr>
+          <a:xfrm>
+            <a:off x="886054" y="2989174"/>
+            <a:ext cx="285293" cy="285293"/>
+          </a:xfrm>
+          <a:prstGeom prst="rect">
+            <a:avLst/>
+          </a:prstGeom>
+        </p:spPr>
+      </p:pic>
+      <p:sp>
+        <p:nvSpPr>
+          <p:cNvPr id="11" name="Text 7"/>
+          <p:cNvSpPr/>
+          <p:nvPr/>
+        </p:nvSpPr>
+        <p:spPr>
+          <a:xfrm>
+            <a:off x="1554480" y="2816352"/>
+            <a:ext cx="8961120" cy="685800"/>
+          </a:xfrm>
+          <a:prstGeom prst="rect">
+            <a:avLst/>
+          </a:prstGeom>
+          <a:noFill/>
+          <a:ln/>
+        </p:spPr>
+        <p:txBody>
+          <a:bodyPr wrap="square" lIns="0" tIns="0" rIns="0" bIns="0" rtlCol="0" anchor="ctr"/>
+          <a:lstStyle/>
+          <a:p>
+            <a:pPr marL="0" indent="0">
+              <a:lnSpc>
+                <a:spcPct val="115000"/>
+              </a:lnSpc>
+              <a:buNone/>
+            </a:pPr>
+            <a:r>
+              <a:rPr lang="en-US" sz="1400" dirty="0">
+                <a:solidFill>
+                  <a:srgbClr val="DCE7F5"/>
+                </a:solidFill>
+                <a:latin typeface="Calibri" pitchFamily="34" charset="0"/>
+                <a:ea typeface="Calibri" pitchFamily="34" charset="-122"/>
+                <a:cs typeface="Calibri" pitchFamily="34" charset="-120"/>
+              </a:rPr>
+              <a:t>Continuous monitoring keeps every student’s preparation on track, not just before placements.</a:t>
+            </a:r>
+            <a:endParaRPr lang="en-US" sz="1400" dirty="0"/>
+          </a:p>
+        </p:txBody>
+      </p:sp>
+      <p:sp>
+        <p:nvSpPr>
+          <p:cNvPr id="12" name="Shape 8"/>
+          <p:cNvSpPr/>
+          <p:nvPr/>
+        </p:nvSpPr>
+        <p:spPr>
+          <a:xfrm>
+            <a:off x="731520" y="3703320"/>
+            <a:ext cx="594360" cy="594360"/>
+          </a:xfrm>
+          <a:prstGeom prst="ellipse">
+            <a:avLst/>
+          </a:prstGeom>
+          <a:solidFill>
+            <a:srgbClr val="2E6DA4"/>
+          </a:solidFill>
+          <a:ln/>
+        </p:spPr>
+      </p:sp>
+      <p:pic>
+        <p:nvPicPr>
+          <p:cNvPr id="13" name="Image 2" descr="preencoded.png"/>
+          <p:cNvPicPr>
+            <a:picLocks noChangeAspect="1"/>
+          </p:cNvPicPr>
+          <p:nvPr/>
+        </p:nvPicPr>
+        <p:blipFill>
+          <a:blip r:embed="rId5"/>
+          <a:stretch>
+            <a:fillRect/>
+          </a:stretch>
+        </p:blipFill>
+        <p:spPr>
+          <a:xfrm>
             <a:off x="886054" y="3857854"/>
             <a:ext cx="285293" cy="285293"/>
           </a:xfrm>
@@ -8051,7 +7880,7 @@
           <a:bodyPr wrap="square" lIns="0" tIns="0" rIns="0" bIns="0" rtlCol="0" anchor="ctr"/>
           <a:lstStyle/>
           <a:p>
-            <a:pPr indent="0" marL="0">
+            <a:pPr marL="0" indent="0">
               <a:lnSpc>
                 <a:spcPct val="115000"/>
               </a:lnSpc>
@@ -8119,14 +7948,14 @@
       </p:sp>
       <p:pic>
         <p:nvPicPr>
-          <p:cNvPr id="17" name="Image 3" descr="preencoded.png">    </p:cNvPr>
+          <p:cNvPr id="17" name="Image 3" descr="preencoded.png"/>
           <p:cNvPicPr>
             <a:picLocks noChangeAspect="1"/>
           </p:cNvPicPr>
           <p:nvPr/>
         </p:nvPicPr>
         <p:blipFill>
-          <a:blip r:embed="rId4"/>
+          <a:blip r:embed="rId6"/>
           <a:stretch>
             <a:fillRect/>
           </a:stretch>
@@ -8162,7 +7991,7 @@
           <a:bodyPr wrap="square" lIns="0" tIns="0" rIns="0" bIns="0" rtlCol="0" anchor="ctr"/>
           <a:lstStyle/>
           <a:p>
-            <a:pPr algn="ctr" indent="0" marL="0">
+            <a:pPr marL="0" indent="0" algn="ctr">
               <a:buNone/>
             </a:pPr>
             <a:r>
@@ -8481,4 +8310,319 @@
     </a:ext>
   </a:extLst>
 </a:theme>
+</file>
+
+<file path=ppt/theme/theme2.xml><?xml version="1.0" encoding="utf-8"?>
+<a:theme xmlns:a="http://schemas.openxmlformats.org/drawingml/2006/main" name="Office Theme">
+  <a:themeElements>
+    <a:clrScheme name="Office">
+      <a:dk1>
+        <a:sysClr val="windowText" lastClr="000000"/>
+      </a:dk1>
+      <a:lt1>
+        <a:sysClr val="window" lastClr="FFFFFF"/>
+      </a:lt1>
+      <a:dk2>
+        <a:srgbClr val="0E2841"/>
+      </a:dk2>
+      <a:lt2>
+        <a:srgbClr val="E8E8E8"/>
+      </a:lt2>
+      <a:accent1>
+        <a:srgbClr val="156082"/>
+      </a:accent1>
+      <a:accent2>
+        <a:srgbClr val="E97132"/>
+      </a:accent2>
+      <a:accent3>
+        <a:srgbClr val="196B24"/>
+      </a:accent3>
+      <a:accent4>
+        <a:srgbClr val="0F9ED5"/>
+      </a:accent4>
+      <a:accent5>
+        <a:srgbClr val="A02B93"/>
+      </a:accent5>
+      <a:accent6>
+        <a:srgbClr val="4EA72E"/>
+      </a:accent6>
+      <a:hlink>
+        <a:srgbClr val="467886"/>
+      </a:hlink>
+      <a:folHlink>
+        <a:srgbClr val="96607D"/>
+      </a:folHlink>
+    </a:clrScheme>
+    <a:fontScheme name="Office">
+      <a:majorFont>
+        <a:latin typeface="Aptos Display" panose="02110004020202020204"/>
+        <a:ea typeface=""/>
+        <a:cs typeface=""/>
+        <a:font script="Jpan" typeface="游ゴシック Light"/>
+        <a:font script="Hang" typeface="맑은 고딕"/>
+        <a:font script="Hans" typeface="等线 Light"/>
+        <a:font script="Hant" typeface="新細明體"/>
+        <a:font script="Arab" typeface="Times New Roman"/>
+        <a:font script="Hebr" typeface="Times New Roman"/>
+        <a:font script="Thai" typeface="Angsana New"/>
+        <a:font script="Ethi" typeface="Nyala"/>
+        <a:font script="Beng" typeface="Vrinda"/>
+        <a:font script="Gujr" typeface="Shruti"/>
+        <a:font script="Khmr" typeface="MoolBoran"/>
+        <a:font script="Knda" typeface="Tunga"/>
+        <a:font script="Guru" typeface="Raavi"/>
+        <a:font script="Cans" typeface="Euphemia"/>
+        <a:font script="Cher" typeface="Plantagenet Cherokee"/>
+        <a:font script="Yiii" typeface="Microsoft Yi Baiti"/>
+        <a:font script="Tibt" typeface="Microsoft Himalaya"/>
+        <a:font script="Thaa" typeface="MV Boli"/>
+        <a:font script="Deva" typeface="Mangal"/>
+        <a:font script="Telu" typeface="Gautami"/>
+        <a:font script="Taml" typeface="Latha"/>
+        <a:font script="Syrc" typeface="Estrangelo Edessa"/>
+        <a:font script="Orya" typeface="Kalinga"/>
+        <a:font script="Mlym" typeface="Kartika"/>
+        <a:font script="Laoo" typeface="DokChampa"/>
+        <a:font script="Sinh" typeface="Iskoola Pota"/>
+        <a:font script="Mong" typeface="Mongolian Baiti"/>
+        <a:font script="Viet" typeface="Times New Roman"/>
+        <a:font script="Uigh" typeface="Microsoft Uighur"/>
+        <a:font script="Geor" typeface="Sylfaen"/>
+        <a:font script="Armn" typeface="Arial"/>
+        <a:font script="Bugi" typeface="Leelawadee UI"/>
+        <a:font script="Bopo" typeface="Microsoft JhengHei"/>
+        <a:font script="Java" typeface="Javanese Text"/>
+        <a:font script="Lisu" typeface="Segoe UI"/>
+        <a:font script="Mymr" typeface="Myanmar Text"/>
+        <a:font script="Nkoo" typeface="Ebrima"/>
+        <a:font script="Olck" typeface="Nirmala UI"/>
+        <a:font script="Osma" typeface="Ebrima"/>
+        <a:font script="Phag" typeface="Phagspa"/>
+        <a:font script="Syrn" typeface="Estrangelo Edessa"/>
+        <a:font script="Syrj" typeface="Estrangelo Edessa"/>
+        <a:font script="Syre" typeface="Estrangelo Edessa"/>
+        <a:font script="Sora" typeface="Nirmala UI"/>
+        <a:font script="Tale" typeface="Microsoft Tai Le"/>
+        <a:font script="Talu" typeface="Microsoft New Tai Lue"/>
+        <a:font script="Tfng" typeface="Ebrima"/>
+      </a:majorFont>
+      <a:minorFont>
+        <a:latin typeface="Aptos" panose="02110004020202020204"/>
+        <a:ea typeface=""/>
+        <a:cs typeface=""/>
+        <a:font script="Jpan" typeface="游ゴシック"/>
+        <a:font script="Hang" typeface="맑은 고딕"/>
+        <a:font script="Hans" typeface="等线"/>
+        <a:font script="Hant" typeface="新細明體"/>
+        <a:font script="Arab" typeface="Arial"/>
+        <a:font script="Hebr" typeface="Arial"/>
+        <a:font script="Thai" typeface="Cordia New"/>
+        <a:font script="Ethi" typeface="Nyala"/>
+        <a:font script="Beng" typeface="Vrinda"/>
+        <a:font script="Gujr" typeface="Shruti"/>
+        <a:font script="Khmr" typeface="DaunPenh"/>
+        <a:font script="Knda" typeface="Tunga"/>
+        <a:font script="Guru" typeface="Raavi"/>
+        <a:font script="Cans" typeface="Euphemia"/>
+        <a:font script="Cher" typeface="Plantagenet Cherokee"/>
+        <a:font script="Yiii" typeface="Microsoft Yi Baiti"/>
+        <a:font script="Tibt" typeface="Microsoft Himalaya"/>
+        <a:font script="Thaa" typeface="MV Boli"/>
+        <a:font script="Deva" typeface="Mangal"/>
+        <a:font script="Telu" typeface="Gautami"/>
+        <a:font script="Taml" typeface="Latha"/>
+        <a:font script="Syrc" typeface="Estrangelo Edessa"/>
+        <a:font script="Orya" typeface="Kalinga"/>
+        <a:font script="Mlym" typeface="Kartika"/>
+        <a:font script="Laoo" typeface="DokChampa"/>
+        <a:font script="Sinh" typeface="Iskoola Pota"/>
+        <a:font script="Mong" typeface="Mongolian Baiti"/>
+        <a:font script="Viet" typeface="Arial"/>
+        <a:font script="Uigh" typeface="Microsoft Uighur"/>
+        <a:font script="Geor" typeface="Sylfaen"/>
+        <a:font script="Armn" typeface="Arial"/>
+        <a:font script="Bugi" typeface="Leelawadee UI"/>
+        <a:font script="Bopo" typeface="Microsoft JhengHei"/>
+        <a:font script="Java" typeface="Javanese Text"/>
+        <a:font script="Lisu" typeface="Segoe UI"/>
+        <a:font script="Mymr" typeface="Myanmar Text"/>
+        <a:font script="Nkoo" typeface="Ebrima"/>
+        <a:font script="Olck" typeface="Nirmala UI"/>
+        <a:font script="Osma" typeface="Ebrima"/>
+        <a:font script="Phag" typeface="Phagspa"/>
+        <a:font script="Syrn" typeface="Estrangelo Edessa"/>
+        <a:font script="Syrj" typeface="Estrangelo Edessa"/>
+        <a:font script="Syre" typeface="Estrangelo Edessa"/>
+        <a:font script="Sora" typeface="Nirmala UI"/>
+        <a:font script="Tale" typeface="Microsoft Tai Le"/>
+        <a:font script="Talu" typeface="Microsoft New Tai Lue"/>
+        <a:font script="Tfng" typeface="Ebrima"/>
+      </a:minorFont>
+    </a:fontScheme>
+    <a:fmtScheme name="Office">
+      <a:fillStyleLst>
+        <a:solidFill>
+          <a:schemeClr val="phClr"/>
+        </a:solidFill>
+        <a:gradFill rotWithShape="1">
+          <a:gsLst>
+            <a:gs pos="0">
+              <a:schemeClr val="phClr">
+                <a:lumMod val="110000"/>
+                <a:satMod val="105000"/>
+                <a:tint val="67000"/>
+              </a:schemeClr>
+            </a:gs>
+            <a:gs pos="50000">
+              <a:schemeClr val="phClr">
+                <a:lumMod val="105000"/>
+                <a:satMod val="103000"/>
+                <a:tint val="73000"/>
+              </a:schemeClr>
+            </a:gs>
+            <a:gs pos="100000">
+              <a:schemeClr val="phClr">
+                <a:lumMod val="105000"/>
+                <a:satMod val="109000"/>
+                <a:tint val="81000"/>
+              </a:schemeClr>
+            </a:gs>
+          </a:gsLst>
+          <a:lin ang="5400000" scaled="0"/>
+        </a:gradFill>
+        <a:gradFill rotWithShape="1">
+          <a:gsLst>
+            <a:gs pos="0">
+              <a:schemeClr val="phClr">
+                <a:satMod val="103000"/>
+                <a:lumMod val="102000"/>
+                <a:tint val="94000"/>
+              </a:schemeClr>
+            </a:gs>
+            <a:gs pos="50000">
+              <a:schemeClr val="phClr">
+                <a:satMod val="110000"/>
+                <a:lumMod val="100000"/>
+                <a:shade val="100000"/>
+              </a:schemeClr>
+            </a:gs>
+            <a:gs pos="100000">
+              <a:schemeClr val="phClr">
+                <a:lumMod val="99000"/>
+                <a:satMod val="120000"/>
+                <a:shade val="78000"/>
+              </a:schemeClr>
+            </a:gs>
+          </a:gsLst>
+          <a:lin ang="5400000" scaled="0"/>
+        </a:gradFill>
+      </a:fillStyleLst>
+      <a:lnStyleLst>
+        <a:ln w="12700" cap="flat" cmpd="sng" algn="ctr">
+          <a:solidFill>
+            <a:schemeClr val="phClr"/>
+          </a:solidFill>
+          <a:prstDash val="solid"/>
+          <a:miter lim="800000"/>
+        </a:ln>
+        <a:ln w="19050" cap="flat" cmpd="sng" algn="ctr">
+          <a:solidFill>
+            <a:schemeClr val="phClr"/>
+          </a:solidFill>
+          <a:prstDash val="solid"/>
+          <a:miter lim="800000"/>
+        </a:ln>
+        <a:ln w="25400" cap="flat" cmpd="sng" algn="ctr">
+          <a:solidFill>
+            <a:schemeClr val="phClr"/>
+          </a:solidFill>
+          <a:prstDash val="solid"/>
+          <a:miter lim="800000"/>
+        </a:ln>
+      </a:lnStyleLst>
+      <a:effectStyleLst>
+        <a:effectStyle>
+          <a:effectLst/>
+        </a:effectStyle>
+        <a:effectStyle>
+          <a:effectLst/>
+        </a:effectStyle>
+        <a:effectStyle>
+          <a:effectLst>
+            <a:outerShdw blurRad="57150" dist="19050" dir="5400000" algn="ctr" rotWithShape="0">
+              <a:srgbClr val="000000">
+                <a:alpha val="63000"/>
+              </a:srgbClr>
+            </a:outerShdw>
+          </a:effectLst>
+        </a:effectStyle>
+      </a:effectStyleLst>
+      <a:bgFillStyleLst>
+        <a:solidFill>
+          <a:schemeClr val="phClr"/>
+        </a:solidFill>
+        <a:solidFill>
+          <a:schemeClr val="phClr">
+            <a:tint val="95000"/>
+            <a:satMod val="170000"/>
+          </a:schemeClr>
+        </a:solidFill>
+        <a:gradFill rotWithShape="1">
+          <a:gsLst>
+            <a:gs pos="0">
+              <a:schemeClr val="phClr">
+                <a:tint val="93000"/>
+                <a:satMod val="150000"/>
+                <a:shade val="98000"/>
+                <a:lumMod val="102000"/>
+              </a:schemeClr>
+            </a:gs>
+            <a:gs pos="50000">
+              <a:schemeClr val="phClr">
+                <a:tint val="98000"/>
+                <a:satMod val="130000"/>
+                <a:shade val="90000"/>
+                <a:lumMod val="103000"/>
+              </a:schemeClr>
+            </a:gs>
+            <a:gs pos="100000">
+              <a:schemeClr val="phClr">
+                <a:shade val="63000"/>
+                <a:satMod val="120000"/>
+              </a:schemeClr>
+            </a:gs>
+          </a:gsLst>
+          <a:lin ang="5400000" scaled="0"/>
+        </a:gradFill>
+      </a:bgFillStyleLst>
+    </a:fmtScheme>
+  </a:themeElements>
+  <a:objectDefaults>
+    <a:lnDef>
+      <a:spPr/>
+      <a:bodyPr/>
+      <a:lstStyle/>
+      <a:style>
+        <a:lnRef idx="2">
+          <a:schemeClr val="accent1"/>
+        </a:lnRef>
+        <a:fillRef idx="0">
+          <a:schemeClr val="accent1"/>
+        </a:fillRef>
+        <a:effectRef idx="1">
+          <a:schemeClr val="accent1"/>
+        </a:effectRef>
+        <a:fontRef idx="minor">
+          <a:schemeClr val="tx1"/>
+        </a:fontRef>
+      </a:style>
+    </a:lnDef>
+  </a:objectDefaults>
+  <a:extraClrSchemeLst/>
+  <a:extLst>
+    <a:ext uri="{05A4C25C-085E-4340-85A3-A5531E510DB2}">
+      <thm15:themeFamily xmlns:thm15="http://schemas.microsoft.com/office/thememl/2012/main" name="Office Theme" id="{2E142A2C-CD16-42D6-873A-C26D2A0506FA}" vid="{1BDDFF52-6CD6-40A5-AB3C-68EB2F1E4D0A}"/>
+    </a:ext>
+  </a:extLst>
+</a:theme>
 </file>